--- a/exports/pptx/lessons/middle-module-10-herbs-aushadhi/day-01-what-is-aushadhi.pptx
+++ b/exports/pptx/lessons/middle-module-10-herbs-aushadhi/day-01-what-is-aushadhi.pptx
@@ -17,9 +17,17 @@
     <p:sldId id="265" r:id="rId11"/>
     <p:sldId id="266" r:id="rId12"/>
     <p:sldId id="267" r:id="rId13"/>
+    <p:sldId id="268" r:id="rId14"/>
+    <p:sldId id="269" r:id="rId15"/>
+    <p:sldId id="270" r:id="rId16"/>
+    <p:sldId id="271" r:id="rId17"/>
+    <p:sldId id="272" r:id="rId18"/>
+    <p:sldId id="273" r:id="rId19"/>
+    <p:sldId id="274" r:id="rId20"/>
+    <p:sldId id="275" r:id="rId21"/>
   </p:sldIdLst>
   <p:notesMasterIdLst>
-    <p:notesMasterId r:id="rId14"/>
+    <p:notesMasterId r:id="rId22"/>
   </p:notesMasterIdLst>
   <p:sldSz cx="9144000" cy="5143500"/>
   <p:notesSz cx="5143500" cy="9144000"/>
@@ -819,6 +827,622 @@
 </p:notes>
 </file>
 
+<file path=ppt/notesSlides/notesSlide13.xml><?xml version="1.0" encoding="utf-8"?>
+<p:notes xmlns:a="http://schemas.openxmlformats.org/drawingml/2006/main" xmlns:r="http://schemas.openxmlformats.org/officeDocument/2006/relationships" xmlns:p="http://schemas.openxmlformats.org/presentationml/2006/main">
+  <p:cSld>
+    <p:spTree>
+      <p:nvGrpSpPr>
+        <p:cNvPr id="1" name=""/>
+        <p:cNvGrpSpPr/>
+        <p:nvPr/>
+      </p:nvGrpSpPr>
+      <p:grpSpPr>
+        <a:xfrm>
+          <a:off x="0" y="0"/>
+          <a:ext cx="0" cy="0"/>
+          <a:chOff x="0" y="0"/>
+          <a:chExt cx="0" cy="0"/>
+        </a:xfrm>
+      </p:grpSpPr>
+      <p:sp>
+        <p:nvSpPr>
+          <p:cNvPr id="2" name="Slide Image Placeholder 1"/>
+          <p:cNvSpPr>
+            <a:spLocks noGrp="1" noRot="1" noChangeAspect="1"/>
+          </p:cNvSpPr>
+          <p:nvPr>
+            <p:ph type="sldImg"/>
+          </p:nvPr>
+        </p:nvSpPr>
+        <p:spPr/>
+      </p:sp>
+      <p:sp>
+        <p:nvSpPr>
+          <p:cNvPr id="3" name="Notes Placeholder 2"/>
+          <p:cNvSpPr>
+            <a:spLocks noGrp="1"/>
+          </p:cNvSpPr>
+          <p:nvPr>
+            <p:ph type="body" idx="1"/>
+          </p:nvPr>
+        </p:nvSpPr>
+        <p:spPr/>
+        <p:txBody>
+          <a:bodyPr/>
+          <a:lstStyle/>
+          <a:p>
+            <a:r>
+              <a:rPr lang="en-US" dirty="0"/>
+              <a:t/>
+            </a:r>
+            <a:endParaRPr lang="en-US" dirty="0"/>
+          </a:p>
+        </p:txBody>
+      </p:sp>
+      <p:sp>
+        <p:nvSpPr>
+          <p:cNvPr id="4" name="Slide Number Placeholder 3"/>
+          <p:cNvSpPr>
+            <a:spLocks noGrp="1"/>
+          </p:cNvSpPr>
+          <p:nvPr>
+            <p:ph type="sldNum" sz="quarter" idx="10"/>
+          </p:nvPr>
+        </p:nvSpPr>
+        <p:spPr/>
+        <p:txBody>
+          <a:bodyPr/>
+          <a:lstStyle/>
+          <a:p>
+            <a:fld id="{F7021451-1387-4CA6-816F-3879F97B5CBC}" type="slidenum">
+              <a:rPr lang="en-US"/>
+              <a:t>13</a:t>
+            </a:fld>
+            <a:endParaRPr lang="en-US"/>
+          </a:p>
+        </p:txBody>
+      </p:sp>
+    </p:spTree>
+    <p:extLst>
+      <p:ext uri="{BB962C8B-B14F-4D97-AF65-F5344CB8AC3E}">
+        <p14:creationId xmlns:p14="http://schemas.microsoft.com/office/powerpoint/2010/main" val="1024086991"/>
+      </p:ext>
+    </p:extLst>
+  </p:cSld>
+  <p:clrMapOvr>
+    <a:masterClrMapping/>
+  </p:clrMapOvr>
+</p:notes>
+</file>
+
+<file path=ppt/notesSlides/notesSlide14.xml><?xml version="1.0" encoding="utf-8"?>
+<p:notes xmlns:a="http://schemas.openxmlformats.org/drawingml/2006/main" xmlns:r="http://schemas.openxmlformats.org/officeDocument/2006/relationships" xmlns:p="http://schemas.openxmlformats.org/presentationml/2006/main">
+  <p:cSld>
+    <p:spTree>
+      <p:nvGrpSpPr>
+        <p:cNvPr id="1" name=""/>
+        <p:cNvGrpSpPr/>
+        <p:nvPr/>
+      </p:nvGrpSpPr>
+      <p:grpSpPr>
+        <a:xfrm>
+          <a:off x="0" y="0"/>
+          <a:ext cx="0" cy="0"/>
+          <a:chOff x="0" y="0"/>
+          <a:chExt cx="0" cy="0"/>
+        </a:xfrm>
+      </p:grpSpPr>
+      <p:sp>
+        <p:nvSpPr>
+          <p:cNvPr id="2" name="Slide Image Placeholder 1"/>
+          <p:cNvSpPr>
+            <a:spLocks noGrp="1" noRot="1" noChangeAspect="1"/>
+          </p:cNvSpPr>
+          <p:nvPr>
+            <p:ph type="sldImg"/>
+          </p:nvPr>
+        </p:nvSpPr>
+        <p:spPr/>
+      </p:sp>
+      <p:sp>
+        <p:nvSpPr>
+          <p:cNvPr id="3" name="Notes Placeholder 2"/>
+          <p:cNvSpPr>
+            <a:spLocks noGrp="1"/>
+          </p:cNvSpPr>
+          <p:nvPr>
+            <p:ph type="body" idx="1"/>
+          </p:nvPr>
+        </p:nvSpPr>
+        <p:spPr/>
+        <p:txBody>
+          <a:bodyPr/>
+          <a:lstStyle/>
+          <a:p>
+            <a:r>
+              <a:rPr lang="en-US" dirty="0"/>
+              <a:t/>
+            </a:r>
+            <a:endParaRPr lang="en-US" dirty="0"/>
+          </a:p>
+        </p:txBody>
+      </p:sp>
+      <p:sp>
+        <p:nvSpPr>
+          <p:cNvPr id="4" name="Slide Number Placeholder 3"/>
+          <p:cNvSpPr>
+            <a:spLocks noGrp="1"/>
+          </p:cNvSpPr>
+          <p:nvPr>
+            <p:ph type="sldNum" sz="quarter" idx="10"/>
+          </p:nvPr>
+        </p:nvSpPr>
+        <p:spPr/>
+        <p:txBody>
+          <a:bodyPr/>
+          <a:lstStyle/>
+          <a:p>
+            <a:fld id="{F7021451-1387-4CA6-816F-3879F97B5CBC}" type="slidenum">
+              <a:rPr lang="en-US"/>
+              <a:t>14</a:t>
+            </a:fld>
+            <a:endParaRPr lang="en-US"/>
+          </a:p>
+        </p:txBody>
+      </p:sp>
+    </p:spTree>
+    <p:extLst>
+      <p:ext uri="{BB962C8B-B14F-4D97-AF65-F5344CB8AC3E}">
+        <p14:creationId xmlns:p14="http://schemas.microsoft.com/office/powerpoint/2010/main" val="1024086991"/>
+      </p:ext>
+    </p:extLst>
+  </p:cSld>
+  <p:clrMapOvr>
+    <a:masterClrMapping/>
+  </p:clrMapOvr>
+</p:notes>
+</file>
+
+<file path=ppt/notesSlides/notesSlide15.xml><?xml version="1.0" encoding="utf-8"?>
+<p:notes xmlns:a="http://schemas.openxmlformats.org/drawingml/2006/main" xmlns:r="http://schemas.openxmlformats.org/officeDocument/2006/relationships" xmlns:p="http://schemas.openxmlformats.org/presentationml/2006/main">
+  <p:cSld>
+    <p:spTree>
+      <p:nvGrpSpPr>
+        <p:cNvPr id="1" name=""/>
+        <p:cNvGrpSpPr/>
+        <p:nvPr/>
+      </p:nvGrpSpPr>
+      <p:grpSpPr>
+        <a:xfrm>
+          <a:off x="0" y="0"/>
+          <a:ext cx="0" cy="0"/>
+          <a:chOff x="0" y="0"/>
+          <a:chExt cx="0" cy="0"/>
+        </a:xfrm>
+      </p:grpSpPr>
+      <p:sp>
+        <p:nvSpPr>
+          <p:cNvPr id="2" name="Slide Image Placeholder 1"/>
+          <p:cNvSpPr>
+            <a:spLocks noGrp="1" noRot="1" noChangeAspect="1"/>
+          </p:cNvSpPr>
+          <p:nvPr>
+            <p:ph type="sldImg"/>
+          </p:nvPr>
+        </p:nvSpPr>
+        <p:spPr/>
+      </p:sp>
+      <p:sp>
+        <p:nvSpPr>
+          <p:cNvPr id="3" name="Notes Placeholder 2"/>
+          <p:cNvSpPr>
+            <a:spLocks noGrp="1"/>
+          </p:cNvSpPr>
+          <p:nvPr>
+            <p:ph type="body" idx="1"/>
+          </p:nvPr>
+        </p:nvSpPr>
+        <p:spPr/>
+        <p:txBody>
+          <a:bodyPr/>
+          <a:lstStyle/>
+          <a:p>
+            <a:r>
+              <a:rPr lang="en-US" dirty="0"/>
+              <a:t/>
+            </a:r>
+            <a:endParaRPr lang="en-US" dirty="0"/>
+          </a:p>
+        </p:txBody>
+      </p:sp>
+      <p:sp>
+        <p:nvSpPr>
+          <p:cNvPr id="4" name="Slide Number Placeholder 3"/>
+          <p:cNvSpPr>
+            <a:spLocks noGrp="1"/>
+          </p:cNvSpPr>
+          <p:nvPr>
+            <p:ph type="sldNum" sz="quarter" idx="10"/>
+          </p:nvPr>
+        </p:nvSpPr>
+        <p:spPr/>
+        <p:txBody>
+          <a:bodyPr/>
+          <a:lstStyle/>
+          <a:p>
+            <a:fld id="{F7021451-1387-4CA6-816F-3879F97B5CBC}" type="slidenum">
+              <a:rPr lang="en-US"/>
+              <a:t>15</a:t>
+            </a:fld>
+            <a:endParaRPr lang="en-US"/>
+          </a:p>
+        </p:txBody>
+      </p:sp>
+    </p:spTree>
+    <p:extLst>
+      <p:ext uri="{BB962C8B-B14F-4D97-AF65-F5344CB8AC3E}">
+        <p14:creationId xmlns:p14="http://schemas.microsoft.com/office/powerpoint/2010/main" val="1024086991"/>
+      </p:ext>
+    </p:extLst>
+  </p:cSld>
+  <p:clrMapOvr>
+    <a:masterClrMapping/>
+  </p:clrMapOvr>
+</p:notes>
+</file>
+
+<file path=ppt/notesSlides/notesSlide16.xml><?xml version="1.0" encoding="utf-8"?>
+<p:notes xmlns:a="http://schemas.openxmlformats.org/drawingml/2006/main" xmlns:r="http://schemas.openxmlformats.org/officeDocument/2006/relationships" xmlns:p="http://schemas.openxmlformats.org/presentationml/2006/main">
+  <p:cSld>
+    <p:spTree>
+      <p:nvGrpSpPr>
+        <p:cNvPr id="1" name=""/>
+        <p:cNvGrpSpPr/>
+        <p:nvPr/>
+      </p:nvGrpSpPr>
+      <p:grpSpPr>
+        <a:xfrm>
+          <a:off x="0" y="0"/>
+          <a:ext cx="0" cy="0"/>
+          <a:chOff x="0" y="0"/>
+          <a:chExt cx="0" cy="0"/>
+        </a:xfrm>
+      </p:grpSpPr>
+      <p:sp>
+        <p:nvSpPr>
+          <p:cNvPr id="2" name="Slide Image Placeholder 1"/>
+          <p:cNvSpPr>
+            <a:spLocks noGrp="1" noRot="1" noChangeAspect="1"/>
+          </p:cNvSpPr>
+          <p:nvPr>
+            <p:ph type="sldImg"/>
+          </p:nvPr>
+        </p:nvSpPr>
+        <p:spPr/>
+      </p:sp>
+      <p:sp>
+        <p:nvSpPr>
+          <p:cNvPr id="3" name="Notes Placeholder 2"/>
+          <p:cNvSpPr>
+            <a:spLocks noGrp="1"/>
+          </p:cNvSpPr>
+          <p:nvPr>
+            <p:ph type="body" idx="1"/>
+          </p:nvPr>
+        </p:nvSpPr>
+        <p:spPr/>
+        <p:txBody>
+          <a:bodyPr/>
+          <a:lstStyle/>
+          <a:p>
+            <a:r>
+              <a:rPr lang="en-US" dirty="0"/>
+              <a:t/>
+            </a:r>
+            <a:endParaRPr lang="en-US" dirty="0"/>
+          </a:p>
+        </p:txBody>
+      </p:sp>
+      <p:sp>
+        <p:nvSpPr>
+          <p:cNvPr id="4" name="Slide Number Placeholder 3"/>
+          <p:cNvSpPr>
+            <a:spLocks noGrp="1"/>
+          </p:cNvSpPr>
+          <p:nvPr>
+            <p:ph type="sldNum" sz="quarter" idx="10"/>
+          </p:nvPr>
+        </p:nvSpPr>
+        <p:spPr/>
+        <p:txBody>
+          <a:bodyPr/>
+          <a:lstStyle/>
+          <a:p>
+            <a:fld id="{F7021451-1387-4CA6-816F-3879F97B5CBC}" type="slidenum">
+              <a:rPr lang="en-US"/>
+              <a:t>16</a:t>
+            </a:fld>
+            <a:endParaRPr lang="en-US"/>
+          </a:p>
+        </p:txBody>
+      </p:sp>
+    </p:spTree>
+    <p:extLst>
+      <p:ext uri="{BB962C8B-B14F-4D97-AF65-F5344CB8AC3E}">
+        <p14:creationId xmlns:p14="http://schemas.microsoft.com/office/powerpoint/2010/main" val="1024086991"/>
+      </p:ext>
+    </p:extLst>
+  </p:cSld>
+  <p:clrMapOvr>
+    <a:masterClrMapping/>
+  </p:clrMapOvr>
+</p:notes>
+</file>
+
+<file path=ppt/notesSlides/notesSlide17.xml><?xml version="1.0" encoding="utf-8"?>
+<p:notes xmlns:a="http://schemas.openxmlformats.org/drawingml/2006/main" xmlns:r="http://schemas.openxmlformats.org/officeDocument/2006/relationships" xmlns:p="http://schemas.openxmlformats.org/presentationml/2006/main">
+  <p:cSld>
+    <p:spTree>
+      <p:nvGrpSpPr>
+        <p:cNvPr id="1" name=""/>
+        <p:cNvGrpSpPr/>
+        <p:nvPr/>
+      </p:nvGrpSpPr>
+      <p:grpSpPr>
+        <a:xfrm>
+          <a:off x="0" y="0"/>
+          <a:ext cx="0" cy="0"/>
+          <a:chOff x="0" y="0"/>
+          <a:chExt cx="0" cy="0"/>
+        </a:xfrm>
+      </p:grpSpPr>
+      <p:sp>
+        <p:nvSpPr>
+          <p:cNvPr id="2" name="Slide Image Placeholder 1"/>
+          <p:cNvSpPr>
+            <a:spLocks noGrp="1" noRot="1" noChangeAspect="1"/>
+          </p:cNvSpPr>
+          <p:nvPr>
+            <p:ph type="sldImg"/>
+          </p:nvPr>
+        </p:nvSpPr>
+        <p:spPr/>
+      </p:sp>
+      <p:sp>
+        <p:nvSpPr>
+          <p:cNvPr id="3" name="Notes Placeholder 2"/>
+          <p:cNvSpPr>
+            <a:spLocks noGrp="1"/>
+          </p:cNvSpPr>
+          <p:nvPr>
+            <p:ph type="body" idx="1"/>
+          </p:nvPr>
+        </p:nvSpPr>
+        <p:spPr/>
+        <p:txBody>
+          <a:bodyPr/>
+          <a:lstStyle/>
+          <a:p>
+            <a:r>
+              <a:rPr lang="en-US" dirty="0"/>
+              <a:t/>
+            </a:r>
+            <a:endParaRPr lang="en-US" dirty="0"/>
+          </a:p>
+        </p:txBody>
+      </p:sp>
+      <p:sp>
+        <p:nvSpPr>
+          <p:cNvPr id="4" name="Slide Number Placeholder 3"/>
+          <p:cNvSpPr>
+            <a:spLocks noGrp="1"/>
+          </p:cNvSpPr>
+          <p:nvPr>
+            <p:ph type="sldNum" sz="quarter" idx="10"/>
+          </p:nvPr>
+        </p:nvSpPr>
+        <p:spPr/>
+        <p:txBody>
+          <a:bodyPr/>
+          <a:lstStyle/>
+          <a:p>
+            <a:fld id="{F7021451-1387-4CA6-816F-3879F97B5CBC}" type="slidenum">
+              <a:rPr lang="en-US"/>
+              <a:t>17</a:t>
+            </a:fld>
+            <a:endParaRPr lang="en-US"/>
+          </a:p>
+        </p:txBody>
+      </p:sp>
+    </p:spTree>
+    <p:extLst>
+      <p:ext uri="{BB962C8B-B14F-4D97-AF65-F5344CB8AC3E}">
+        <p14:creationId xmlns:p14="http://schemas.microsoft.com/office/powerpoint/2010/main" val="1024086991"/>
+      </p:ext>
+    </p:extLst>
+  </p:cSld>
+  <p:clrMapOvr>
+    <a:masterClrMapping/>
+  </p:clrMapOvr>
+</p:notes>
+</file>
+
+<file path=ppt/notesSlides/notesSlide18.xml><?xml version="1.0" encoding="utf-8"?>
+<p:notes xmlns:a="http://schemas.openxmlformats.org/drawingml/2006/main" xmlns:r="http://schemas.openxmlformats.org/officeDocument/2006/relationships" xmlns:p="http://schemas.openxmlformats.org/presentationml/2006/main">
+  <p:cSld>
+    <p:spTree>
+      <p:nvGrpSpPr>
+        <p:cNvPr id="1" name=""/>
+        <p:cNvGrpSpPr/>
+        <p:nvPr/>
+      </p:nvGrpSpPr>
+      <p:grpSpPr>
+        <a:xfrm>
+          <a:off x="0" y="0"/>
+          <a:ext cx="0" cy="0"/>
+          <a:chOff x="0" y="0"/>
+          <a:chExt cx="0" cy="0"/>
+        </a:xfrm>
+      </p:grpSpPr>
+      <p:sp>
+        <p:nvSpPr>
+          <p:cNvPr id="2" name="Slide Image Placeholder 1"/>
+          <p:cNvSpPr>
+            <a:spLocks noGrp="1" noRot="1" noChangeAspect="1"/>
+          </p:cNvSpPr>
+          <p:nvPr>
+            <p:ph type="sldImg"/>
+          </p:nvPr>
+        </p:nvSpPr>
+        <p:spPr/>
+      </p:sp>
+      <p:sp>
+        <p:nvSpPr>
+          <p:cNvPr id="3" name="Notes Placeholder 2"/>
+          <p:cNvSpPr>
+            <a:spLocks noGrp="1"/>
+          </p:cNvSpPr>
+          <p:nvPr>
+            <p:ph type="body" idx="1"/>
+          </p:nvPr>
+        </p:nvSpPr>
+        <p:spPr/>
+        <p:txBody>
+          <a:bodyPr/>
+          <a:lstStyle/>
+          <a:p>
+            <a:r>
+              <a:rPr lang="en-US" dirty="0"/>
+              <a:t/>
+            </a:r>
+            <a:endParaRPr lang="en-US" dirty="0"/>
+          </a:p>
+        </p:txBody>
+      </p:sp>
+      <p:sp>
+        <p:nvSpPr>
+          <p:cNvPr id="4" name="Slide Number Placeholder 3"/>
+          <p:cNvSpPr>
+            <a:spLocks noGrp="1"/>
+          </p:cNvSpPr>
+          <p:nvPr>
+            <p:ph type="sldNum" sz="quarter" idx="10"/>
+          </p:nvPr>
+        </p:nvSpPr>
+        <p:spPr/>
+        <p:txBody>
+          <a:bodyPr/>
+          <a:lstStyle/>
+          <a:p>
+            <a:fld id="{F7021451-1387-4CA6-816F-3879F97B5CBC}" type="slidenum">
+              <a:rPr lang="en-US"/>
+              <a:t>18</a:t>
+            </a:fld>
+            <a:endParaRPr lang="en-US"/>
+          </a:p>
+        </p:txBody>
+      </p:sp>
+    </p:spTree>
+    <p:extLst>
+      <p:ext uri="{BB962C8B-B14F-4D97-AF65-F5344CB8AC3E}">
+        <p14:creationId xmlns:p14="http://schemas.microsoft.com/office/powerpoint/2010/main" val="1024086991"/>
+      </p:ext>
+    </p:extLst>
+  </p:cSld>
+  <p:clrMapOvr>
+    <a:masterClrMapping/>
+  </p:clrMapOvr>
+</p:notes>
+</file>
+
+<file path=ppt/notesSlides/notesSlide19.xml><?xml version="1.0" encoding="utf-8"?>
+<p:notes xmlns:a="http://schemas.openxmlformats.org/drawingml/2006/main" xmlns:r="http://schemas.openxmlformats.org/officeDocument/2006/relationships" xmlns:p="http://schemas.openxmlformats.org/presentationml/2006/main">
+  <p:cSld>
+    <p:spTree>
+      <p:nvGrpSpPr>
+        <p:cNvPr id="1" name=""/>
+        <p:cNvGrpSpPr/>
+        <p:nvPr/>
+      </p:nvGrpSpPr>
+      <p:grpSpPr>
+        <a:xfrm>
+          <a:off x="0" y="0"/>
+          <a:ext cx="0" cy="0"/>
+          <a:chOff x="0" y="0"/>
+          <a:chExt cx="0" cy="0"/>
+        </a:xfrm>
+      </p:grpSpPr>
+      <p:sp>
+        <p:nvSpPr>
+          <p:cNvPr id="2" name="Slide Image Placeholder 1"/>
+          <p:cNvSpPr>
+            <a:spLocks noGrp="1" noRot="1" noChangeAspect="1"/>
+          </p:cNvSpPr>
+          <p:nvPr>
+            <p:ph type="sldImg"/>
+          </p:nvPr>
+        </p:nvSpPr>
+        <p:spPr/>
+      </p:sp>
+      <p:sp>
+        <p:nvSpPr>
+          <p:cNvPr id="3" name="Notes Placeholder 2"/>
+          <p:cNvSpPr>
+            <a:spLocks noGrp="1"/>
+          </p:cNvSpPr>
+          <p:nvPr>
+            <p:ph type="body" idx="1"/>
+          </p:nvPr>
+        </p:nvSpPr>
+        <p:spPr/>
+        <p:txBody>
+          <a:bodyPr/>
+          <a:lstStyle/>
+          <a:p>
+            <a:r>
+              <a:rPr lang="en-US" dirty="0"/>
+              <a:t/>
+            </a:r>
+            <a:endParaRPr lang="en-US" dirty="0"/>
+          </a:p>
+        </p:txBody>
+      </p:sp>
+      <p:sp>
+        <p:nvSpPr>
+          <p:cNvPr id="4" name="Slide Number Placeholder 3"/>
+          <p:cNvSpPr>
+            <a:spLocks noGrp="1"/>
+          </p:cNvSpPr>
+          <p:nvPr>
+            <p:ph type="sldNum" sz="quarter" idx="10"/>
+          </p:nvPr>
+        </p:nvSpPr>
+        <p:spPr/>
+        <p:txBody>
+          <a:bodyPr/>
+          <a:lstStyle/>
+          <a:p>
+            <a:fld id="{F7021451-1387-4CA6-816F-3879F97B5CBC}" type="slidenum">
+              <a:rPr lang="en-US"/>
+              <a:t>19</a:t>
+            </a:fld>
+            <a:endParaRPr lang="en-US"/>
+          </a:p>
+        </p:txBody>
+      </p:sp>
+    </p:spTree>
+    <p:extLst>
+      <p:ext uri="{BB962C8B-B14F-4D97-AF65-F5344CB8AC3E}">
+        <p14:creationId xmlns:p14="http://schemas.microsoft.com/office/powerpoint/2010/main" val="1024086991"/>
+      </p:ext>
+    </p:extLst>
+  </p:cSld>
+  <p:clrMapOvr>
+    <a:masterClrMapping/>
+  </p:clrMapOvr>
+</p:notes>
+</file>
+
 <file path=ppt/notesSlides/notesSlide2.xml><?xml version="1.0" encoding="utf-8"?>
 <p:notes xmlns:a="http://schemas.openxmlformats.org/drawingml/2006/main" xmlns:r="http://schemas.openxmlformats.org/officeDocument/2006/relationships" xmlns:p="http://schemas.openxmlformats.org/presentationml/2006/main">
   <p:cSld>
@@ -889,6 +1513,94 @@
             <a:fld id="{F7021451-1387-4CA6-816F-3879F97B5CBC}" type="slidenum">
               <a:rPr lang="en-US"/>
               <a:t>2</a:t>
+            </a:fld>
+            <a:endParaRPr lang="en-US"/>
+          </a:p>
+        </p:txBody>
+      </p:sp>
+    </p:spTree>
+    <p:extLst>
+      <p:ext uri="{BB962C8B-B14F-4D97-AF65-F5344CB8AC3E}">
+        <p14:creationId xmlns:p14="http://schemas.microsoft.com/office/powerpoint/2010/main" val="1024086991"/>
+      </p:ext>
+    </p:extLst>
+  </p:cSld>
+  <p:clrMapOvr>
+    <a:masterClrMapping/>
+  </p:clrMapOvr>
+</p:notes>
+</file>
+
+<file path=ppt/notesSlides/notesSlide20.xml><?xml version="1.0" encoding="utf-8"?>
+<p:notes xmlns:a="http://schemas.openxmlformats.org/drawingml/2006/main" xmlns:r="http://schemas.openxmlformats.org/officeDocument/2006/relationships" xmlns:p="http://schemas.openxmlformats.org/presentationml/2006/main">
+  <p:cSld>
+    <p:spTree>
+      <p:nvGrpSpPr>
+        <p:cNvPr id="1" name=""/>
+        <p:cNvGrpSpPr/>
+        <p:nvPr/>
+      </p:nvGrpSpPr>
+      <p:grpSpPr>
+        <a:xfrm>
+          <a:off x="0" y="0"/>
+          <a:ext cx="0" cy="0"/>
+          <a:chOff x="0" y="0"/>
+          <a:chExt cx="0" cy="0"/>
+        </a:xfrm>
+      </p:grpSpPr>
+      <p:sp>
+        <p:nvSpPr>
+          <p:cNvPr id="2" name="Slide Image Placeholder 1"/>
+          <p:cNvSpPr>
+            <a:spLocks noGrp="1" noRot="1" noChangeAspect="1"/>
+          </p:cNvSpPr>
+          <p:nvPr>
+            <p:ph type="sldImg"/>
+          </p:nvPr>
+        </p:nvSpPr>
+        <p:spPr/>
+      </p:sp>
+      <p:sp>
+        <p:nvSpPr>
+          <p:cNvPr id="3" name="Notes Placeholder 2"/>
+          <p:cNvSpPr>
+            <a:spLocks noGrp="1"/>
+          </p:cNvSpPr>
+          <p:nvPr>
+            <p:ph type="body" idx="1"/>
+          </p:nvPr>
+        </p:nvSpPr>
+        <p:spPr/>
+        <p:txBody>
+          <a:bodyPr/>
+          <a:lstStyle/>
+          <a:p>
+            <a:r>
+              <a:rPr lang="en-US" dirty="0"/>
+              <a:t/>
+            </a:r>
+            <a:endParaRPr lang="en-US" dirty="0"/>
+          </a:p>
+        </p:txBody>
+      </p:sp>
+      <p:sp>
+        <p:nvSpPr>
+          <p:cNvPr id="4" name="Slide Number Placeholder 3"/>
+          <p:cNvSpPr>
+            <a:spLocks noGrp="1"/>
+          </p:cNvSpPr>
+          <p:nvPr>
+            <p:ph type="sldNum" sz="quarter" idx="10"/>
+          </p:nvPr>
+        </p:nvSpPr>
+        <p:spPr/>
+        <p:txBody>
+          <a:bodyPr/>
+          <a:lstStyle/>
+          <a:p>
+            <a:fld id="{F7021451-1387-4CA6-816F-3879F97B5CBC}" type="slidenum">
+              <a:rPr lang="en-US"/>
+              <a:t>20</a:t>
             </a:fld>
             <a:endParaRPr lang="en-US"/>
           </a:p>
@@ -2140,194 +2852,6 @@
         </p:nvSpPr>
         <p:spPr>
           <a:xfrm>
-            <a:off x="406301" y="1223963"/>
-            <a:ext cx="8498026" cy="274290"/>
-          </a:xfrm>
-          <a:prstGeom prst="rect">
-            <a:avLst/>
-          </a:prstGeom>
-          <a:noFill/>
-          <a:ln/>
-        </p:spPr>
-        <p:txBody>
-          <a:bodyPr wrap="square" lIns="0" tIns="0" rIns="0" bIns="0" rtlCol="0" anchor="t"/>
-          <a:lstStyle/>
-          <a:p>
-            <a:pPr algn="l" indent="0" marL="0">
-              <a:lnSpc>
-                <a:spcPts val="2160"/>
-              </a:lnSpc>
-              <a:spcBef>
-                <a:spcPts val="600"/>
-              </a:spcBef>
-              <a:spcAft>
-                <a:spcPts val="800"/>
-              </a:spcAft>
-              <a:buNone/>
-            </a:pPr>
-            <a:r>
-              <a:rPr lang="en-US" sz="1800" b="1" dirty="0">
-                <a:solidFill>
-                  <a:srgbClr val="FE4447"/>
-                </a:solidFill>
-                <a:latin typeface="Georgia" pitchFamily="34" charset="0"/>
-                <a:ea typeface="Georgia" pitchFamily="34" charset="-122"/>
-                <a:cs typeface="Georgia" pitchFamily="34" charset="-120"/>
-              </a:rPr>
-              <a:t>Learning objective</a:t>
-            </a:r>
-            <a:endParaRPr lang="en-US" sz="1800" dirty="0"/>
-          </a:p>
-        </p:txBody>
-      </p:sp>
-      <p:sp>
-        <p:nvSpPr>
-          <p:cNvPr id="6" name="Text 4"/>
-          <p:cNvSpPr/>
-          <p:nvPr/>
-        </p:nvSpPr>
-        <p:spPr>
-          <a:xfrm>
-            <a:off x="406301" y="1637854"/>
-            <a:ext cx="8498026" cy="426541"/>
-          </a:xfrm>
-          <a:prstGeom prst="rect">
-            <a:avLst/>
-          </a:prstGeom>
-          <a:noFill/>
-          <a:ln/>
-        </p:spPr>
-        <p:txBody>
-          <a:bodyPr wrap="square" lIns="0" tIns="0" rIns="0" bIns="0" rtlCol="0" anchor="t"/>
-          <a:lstStyle/>
-          <a:p>
-            <a:pPr algn="l" indent="0" marL="0">
-              <a:lnSpc>
-                <a:spcPts val="1680"/>
-              </a:lnSpc>
-              <a:spcBef>
-                <a:spcPts val="300"/>
-              </a:spcBef>
-              <a:spcAft>
-                <a:spcPts val="300"/>
-              </a:spcAft>
-              <a:buNone/>
-            </a:pPr>
-            <a:r>
-              <a:rPr lang="en-US" sz="1200" dirty="0">
-                <a:solidFill>
-                  <a:srgbClr val="1C2833"/>
-                </a:solidFill>
-                <a:latin typeface="Arial" pitchFamily="34" charset="0"/>
-                <a:ea typeface="Arial" pitchFamily="34" charset="-122"/>
-                <a:cs typeface="Arial" pitchFamily="34" charset="-120"/>
-              </a:rPr>
-              <a:t>By the end of this lesson, students can define </a:t>
-            </a:r>
-            <a:pPr algn="l" indent="0" marL="0">
-              <a:lnSpc>
-                <a:spcPts val="1680"/>
-              </a:lnSpc>
-              <a:spcBef>
-                <a:spcPts val="300"/>
-              </a:spcBef>
-              <a:spcAft>
-                <a:spcPts val="300"/>
-              </a:spcAft>
-              <a:buNone/>
-            </a:pPr>
-            <a:r>
-              <a:rPr lang="en-US" sz="1200" i="1" dirty="0">
-                <a:solidFill>
-                  <a:srgbClr val="1C2833"/>
-                </a:solidFill>
-                <a:latin typeface="Arial" pitchFamily="34" charset="0"/>
-                <a:ea typeface="Arial" pitchFamily="34" charset="-122"/>
-                <a:cs typeface="Arial" pitchFamily="34" charset="-120"/>
-              </a:rPr>
-              <a:t>auṣadhi</a:t>
-            </a:r>
-            <a:pPr algn="l" indent="0" marL="0">
-              <a:lnSpc>
-                <a:spcPts val="1680"/>
-              </a:lnSpc>
-              <a:spcBef>
-                <a:spcPts val="300"/>
-              </a:spcBef>
-              <a:spcAft>
-                <a:spcPts val="300"/>
-              </a:spcAft>
-              <a:buNone/>
-            </a:pPr>
-            <a:r>
-              <a:rPr lang="en-US" sz="1200" dirty="0">
-                <a:solidFill>
-                  <a:srgbClr val="1C2833"/>
-                </a:solidFill>
-                <a:latin typeface="Arial" pitchFamily="34" charset="0"/>
-                <a:ea typeface="Arial" pitchFamily="34" charset="-122"/>
-                <a:cs typeface="Arial" pitchFamily="34" charset="-120"/>
-              </a:rPr>
-              <a:t>, name at least four of the six herbs the module will cover, and articulate the core safety rule: </a:t>
-            </a:r>
-            <a:pPr algn="l" indent="0" marL="0">
-              <a:lnSpc>
-                <a:spcPts val="1680"/>
-              </a:lnSpc>
-              <a:spcBef>
-                <a:spcPts val="300"/>
-              </a:spcBef>
-              <a:spcAft>
-                <a:spcPts val="300"/>
-              </a:spcAft>
-              <a:buNone/>
-            </a:pPr>
-            <a:r>
-              <a:rPr lang="en-US" sz="1200" b="1" dirty="0">
-                <a:solidFill>
-                  <a:srgbClr val="1C2833"/>
-                </a:solidFill>
-                <a:latin typeface="Arial" pitchFamily="34" charset="0"/>
-                <a:ea typeface="Arial" pitchFamily="34" charset="-122"/>
-                <a:cs typeface="Arial" pitchFamily="34" charset="-120"/>
-              </a:rPr>
-              <a:t>food amounts are safe; therapeutic doses are a clinical question</a:t>
-            </a:r>
-            <a:pPr algn="l" indent="0" marL="0">
-              <a:lnSpc>
-                <a:spcPts val="1680"/>
-              </a:lnSpc>
-              <a:spcBef>
-                <a:spcPts val="300"/>
-              </a:spcBef>
-              <a:spcAft>
-                <a:spcPts val="300"/>
-              </a:spcAft>
-              <a:buNone/>
-            </a:pPr>
-            <a:r>
-              <a:rPr lang="en-US" sz="1200" dirty="0">
-                <a:solidFill>
-                  <a:srgbClr val="1C2833"/>
-                </a:solidFill>
-                <a:latin typeface="Arial" pitchFamily="34" charset="0"/>
-                <a:ea typeface="Arial" pitchFamily="34" charset="-122"/>
-                <a:cs typeface="Arial" pitchFamily="34" charset="-120"/>
-              </a:rPr>
-              <a:t>.</a:t>
-            </a:r>
-            <a:endParaRPr lang="en-US" sz="1200" dirty="0"/>
-          </a:p>
-        </p:txBody>
-      </p:sp>
-      <p:sp>
-        <p:nvSpPr>
-          <p:cNvPr id="7" name="Text 5"/>
-          <p:cNvSpPr/>
-          <p:nvPr/>
-        </p:nvSpPr>
-        <p:spPr>
-          <a:xfrm>
             <a:off x="406301" y="4434929"/>
             <a:ext cx="8498026" cy="213271"/>
           </a:xfrm>
@@ -2472,7 +2996,7 @@
                 <a:ea typeface="Georgia" pitchFamily="34" charset="-122"/>
                 <a:cs typeface="Georgia" pitchFamily="34" charset="-120"/>
               </a:rPr>
-              <a:t>Differentiation</a:t>
+              <a:t>Core (20 min) (cont.)</a:t>
             </a:r>
             <a:endParaRPr lang="en-US" sz="1800" dirty="0"/>
           </a:p>
@@ -2487,7 +3011,7 @@
         <p:spPr>
           <a:xfrm>
             <a:off x="634901" y="883593"/>
-            <a:ext cx="8102798" cy="937022"/>
+            <a:ext cx="8102798" cy="1500783"/>
           </a:xfrm>
           <a:prstGeom prst="rect">
             <a:avLst/>
@@ -2510,15 +3034,15 @@
               <a:buChar char="•"/>
             </a:pPr>
             <a:r>
-              <a:rPr lang="en-US" sz="1200" b="1" dirty="0">
-                <a:solidFill>
-                  <a:srgbClr val="1C2833"/>
-                </a:solidFill>
-                <a:latin typeface="Arial" pitchFamily="34" charset="0"/>
-                <a:ea typeface="Arial" pitchFamily="34" charset="-122"/>
-                <a:cs typeface="Arial" pitchFamily="34" charset="-120"/>
-              </a:rPr>
-              <a:t>One tier up:</a:t>
+              <a:rPr lang="en-US" sz="1200" i="1" dirty="0">
+                <a:solidFill>
+                  <a:srgbClr val="1C2833"/>
+                </a:solidFill>
+                <a:latin typeface="Arial" pitchFamily="34" charset="0"/>
+                <a:ea typeface="Arial" pitchFamily="34" charset="-122"/>
+                <a:cs typeface="Arial" pitchFamily="34" charset="-120"/>
+              </a:rPr>
+              <a:t>tulasī</a:t>
             </a:r>
             <a:pPr algn="l" indent="0" marL="0">
               <a:lnSpc>
@@ -2538,7 +3062,7 @@
                 <a:ea typeface="Arial" pitchFamily="34" charset="-122"/>
                 <a:cs typeface="Arial" pitchFamily="34" charset="-120"/>
               </a:rPr>
-              <a:t> Find a </a:t>
+              <a:t> — tulsi, holy basil · </a:t>
             </a:r>
             <a:pPr algn="l" indent="0" marL="0">
               <a:lnSpc>
@@ -2558,7 +3082,7 @@
                 <a:ea typeface="Arial" pitchFamily="34" charset="-122"/>
                 <a:cs typeface="Arial" pitchFamily="34" charset="-120"/>
               </a:rPr>
-              <a:t>seventh</a:t>
+              <a:t>Ocimum tenuiflorum</a:t>
             </a:r>
             <a:pPr algn="l" indent="0" marL="0">
               <a:lnSpc>
@@ -2578,47 +3102,7 @@
                 <a:ea typeface="Arial" pitchFamily="34" charset="-122"/>
                 <a:cs typeface="Arial" pitchFamily="34" charset="-120"/>
               </a:rPr>
-              <a:t> herb in your kitchen we haven't named (cilantro, fennel, fenugreek, curry leaf, etc.). What might its Sanskrit name be? (Hint: look up </a:t>
-            </a:r>
-            <a:pPr algn="l" indent="0" marL="0">
-              <a:lnSpc>
-                <a:spcPts val="1620"/>
-              </a:lnSpc>
-              <a:spcAft>
-                <a:spcPts val="300"/>
-              </a:spcAft>
-              <a:buNone/>
-            </a:pPr>
-            <a:r>
-              <a:rPr lang="en-US" sz="1200" i="1" dirty="0">
-                <a:solidFill>
-                  <a:srgbClr val="1C2833"/>
-                </a:solidFill>
-                <a:latin typeface="Arial" pitchFamily="34" charset="0"/>
-                <a:ea typeface="Arial" pitchFamily="34" charset="-122"/>
-                <a:cs typeface="Arial" pitchFamily="34" charset="-120"/>
-              </a:rPr>
-              <a:t>dhānyaka, methi, kariveppilai</a:t>
-            </a:r>
-            <a:pPr algn="l" indent="0" marL="0">
-              <a:lnSpc>
-                <a:spcPts val="1620"/>
-              </a:lnSpc>
-              <a:spcAft>
-                <a:spcPts val="300"/>
-              </a:spcAft>
-              <a:buNone/>
-            </a:pPr>
-            <a:r>
-              <a:rPr lang="en-US" sz="1200" dirty="0">
-                <a:solidFill>
-                  <a:srgbClr val="1C2833"/>
-                </a:solidFill>
-                <a:latin typeface="Arial" pitchFamily="34" charset="0"/>
-                <a:ea typeface="Arial" pitchFamily="34" charset="-122"/>
-                <a:cs typeface="Arial" pitchFamily="34" charset="-120"/>
-              </a:rPr>
-              <a:t>.)</a:t>
+              <a:t> · garden pot, prayer area</a:t>
             </a:r>
             <a:endParaRPr lang="en-US" sz="1200" dirty="0"/>
           </a:p>
@@ -2634,15 +3118,15 @@
               <a:buChar char="•"/>
             </a:pPr>
             <a:r>
-              <a:rPr lang="en-US" sz="1200" b="1" dirty="0">
-                <a:solidFill>
-                  <a:srgbClr val="1C2833"/>
-                </a:solidFill>
-                <a:latin typeface="Arial" pitchFamily="34" charset="0"/>
-                <a:ea typeface="Arial" pitchFamily="34" charset="-122"/>
-                <a:cs typeface="Arial" pitchFamily="34" charset="-120"/>
-              </a:rPr>
-              <a:t>One tier down:</a:t>
+              <a:rPr lang="en-US" sz="1200" i="1" dirty="0">
+                <a:solidFill>
+                  <a:srgbClr val="1C2833"/>
+                </a:solidFill>
+                <a:latin typeface="Arial" pitchFamily="34" charset="0"/>
+                <a:ea typeface="Arial" pitchFamily="34" charset="-122"/>
+                <a:cs typeface="Arial" pitchFamily="34" charset="-120"/>
+              </a:rPr>
+              <a:t>nimba</a:t>
             </a:r>
             <a:pPr algn="l" indent="0" marL="0">
               <a:lnSpc>
@@ -2662,7 +3146,383 @@
                 <a:ea typeface="Arial" pitchFamily="34" charset="-122"/>
                 <a:cs typeface="Arial" pitchFamily="34" charset="-120"/>
               </a:rPr>
-              <a:t> Just remember three herbs by Friday — tulsi, turmeric, ginger. The other three can come over the next week.</a:t>
+              <a:t> — neem · </a:t>
+            </a:r>
+            <a:pPr algn="l" indent="0" marL="0">
+              <a:lnSpc>
+                <a:spcPts val="1620"/>
+              </a:lnSpc>
+              <a:spcAft>
+                <a:spcPts val="300"/>
+              </a:spcAft>
+              <a:buNone/>
+            </a:pPr>
+            <a:r>
+              <a:rPr lang="en-US" sz="1200" i="1" dirty="0">
+                <a:solidFill>
+                  <a:srgbClr val="1C2833"/>
+                </a:solidFill>
+                <a:latin typeface="Arial" pitchFamily="34" charset="0"/>
+                <a:ea typeface="Arial" pitchFamily="34" charset="-122"/>
+                <a:cs typeface="Arial" pitchFamily="34" charset="-120"/>
+              </a:rPr>
+              <a:t>Azadirachta indica</a:t>
+            </a:r>
+            <a:pPr algn="l" indent="0" marL="0">
+              <a:lnSpc>
+                <a:spcPts val="1620"/>
+              </a:lnSpc>
+              <a:spcAft>
+                <a:spcPts val="300"/>
+              </a:spcAft>
+              <a:buNone/>
+            </a:pPr>
+            <a:r>
+              <a:rPr lang="en-US" sz="1200" dirty="0">
+                <a:solidFill>
+                  <a:srgbClr val="1C2833"/>
+                </a:solidFill>
+                <a:latin typeface="Arial" pitchFamily="34" charset="0"/>
+                <a:ea typeface="Arial" pitchFamily="34" charset="-122"/>
+                <a:cs typeface="Arial" pitchFamily="34" charset="-120"/>
+              </a:rPr>
+              <a:t> · street tree, soap</a:t>
+            </a:r>
+            <a:endParaRPr lang="en-US" sz="1200" dirty="0"/>
+          </a:p>
+          <a:p>
+            <a:pPr algn="l" marL="342900" indent="-342900">
+              <a:lnSpc>
+                <a:spcPts val="1620"/>
+              </a:lnSpc>
+              <a:spcAft>
+                <a:spcPts val="300"/>
+              </a:spcAft>
+              <a:buSzPct val="100000"/>
+              <a:buChar char="•"/>
+            </a:pPr>
+            <a:r>
+              <a:rPr lang="en-US" sz="1200" i="1" dirty="0">
+                <a:solidFill>
+                  <a:srgbClr val="1C2833"/>
+                </a:solidFill>
+                <a:latin typeface="Arial" pitchFamily="34" charset="0"/>
+                <a:ea typeface="Arial" pitchFamily="34" charset="-122"/>
+                <a:cs typeface="Arial" pitchFamily="34" charset="-120"/>
+              </a:rPr>
+              <a:t>haridrā</a:t>
+            </a:r>
+            <a:pPr algn="l" indent="0" marL="0">
+              <a:lnSpc>
+                <a:spcPts val="1620"/>
+              </a:lnSpc>
+              <a:spcAft>
+                <a:spcPts val="300"/>
+              </a:spcAft>
+              <a:buNone/>
+            </a:pPr>
+            <a:r>
+              <a:rPr lang="en-US" sz="1200" dirty="0">
+                <a:solidFill>
+                  <a:srgbClr val="1C2833"/>
+                </a:solidFill>
+                <a:latin typeface="Arial" pitchFamily="34" charset="0"/>
+                <a:ea typeface="Arial" pitchFamily="34" charset="-122"/>
+                <a:cs typeface="Arial" pitchFamily="34" charset="-120"/>
+              </a:rPr>
+              <a:t> — turmeric, haldi · </a:t>
+            </a:r>
+            <a:pPr algn="l" indent="0" marL="0">
+              <a:lnSpc>
+                <a:spcPts val="1620"/>
+              </a:lnSpc>
+              <a:spcAft>
+                <a:spcPts val="300"/>
+              </a:spcAft>
+              <a:buNone/>
+            </a:pPr>
+            <a:r>
+              <a:rPr lang="en-US" sz="1200" i="1" dirty="0">
+                <a:solidFill>
+                  <a:srgbClr val="1C2833"/>
+                </a:solidFill>
+                <a:latin typeface="Arial" pitchFamily="34" charset="0"/>
+                <a:ea typeface="Arial" pitchFamily="34" charset="-122"/>
+                <a:cs typeface="Arial" pitchFamily="34" charset="-120"/>
+              </a:rPr>
+              <a:t>Curcuma longa</a:t>
+            </a:r>
+            <a:pPr algn="l" indent="0" marL="0">
+              <a:lnSpc>
+                <a:spcPts val="1620"/>
+              </a:lnSpc>
+              <a:spcAft>
+                <a:spcPts val="300"/>
+              </a:spcAft>
+              <a:buNone/>
+            </a:pPr>
+            <a:r>
+              <a:rPr lang="en-US" sz="1200" dirty="0">
+                <a:solidFill>
+                  <a:srgbClr val="1C2833"/>
+                </a:solidFill>
+                <a:latin typeface="Arial" pitchFamily="34" charset="0"/>
+                <a:ea typeface="Arial" pitchFamily="34" charset="-122"/>
+                <a:cs typeface="Arial" pitchFamily="34" charset="-120"/>
+              </a:rPr>
+              <a:t> · daal, milk</a:t>
+            </a:r>
+            <a:endParaRPr lang="en-US" sz="1200" dirty="0"/>
+          </a:p>
+          <a:p>
+            <a:pPr algn="l" marL="342900" indent="-342900">
+              <a:lnSpc>
+                <a:spcPts val="1620"/>
+              </a:lnSpc>
+              <a:spcAft>
+                <a:spcPts val="300"/>
+              </a:spcAft>
+              <a:buSzPct val="100000"/>
+              <a:buChar char="•"/>
+            </a:pPr>
+            <a:r>
+              <a:rPr lang="en-US" sz="1200" i="1" dirty="0">
+                <a:solidFill>
+                  <a:srgbClr val="1C2833"/>
+                </a:solidFill>
+                <a:latin typeface="Arial" pitchFamily="34" charset="0"/>
+                <a:ea typeface="Arial" pitchFamily="34" charset="-122"/>
+                <a:cs typeface="Arial" pitchFamily="34" charset="-120"/>
+              </a:rPr>
+              <a:t>adraka</a:t>
+            </a:r>
+            <a:pPr algn="l" indent="0" marL="0">
+              <a:lnSpc>
+                <a:spcPts val="1620"/>
+              </a:lnSpc>
+              <a:spcAft>
+                <a:spcPts val="300"/>
+              </a:spcAft>
+              <a:buNone/>
+            </a:pPr>
+            <a:r>
+              <a:rPr lang="en-US" sz="1200" dirty="0">
+                <a:solidFill>
+                  <a:srgbClr val="1C2833"/>
+                </a:solidFill>
+                <a:latin typeface="Arial" pitchFamily="34" charset="0"/>
+                <a:ea typeface="Arial" pitchFamily="34" charset="-122"/>
+                <a:cs typeface="Arial" pitchFamily="34" charset="-120"/>
+              </a:rPr>
+              <a:t> — ginger, adrak · </a:t>
+            </a:r>
+            <a:pPr algn="l" indent="0" marL="0">
+              <a:lnSpc>
+                <a:spcPts val="1620"/>
+              </a:lnSpc>
+              <a:spcAft>
+                <a:spcPts val="300"/>
+              </a:spcAft>
+              <a:buNone/>
+            </a:pPr>
+            <a:r>
+              <a:rPr lang="en-US" sz="1200" i="1" dirty="0">
+                <a:solidFill>
+                  <a:srgbClr val="1C2833"/>
+                </a:solidFill>
+                <a:latin typeface="Arial" pitchFamily="34" charset="0"/>
+                <a:ea typeface="Arial" pitchFamily="34" charset="-122"/>
+                <a:cs typeface="Arial" pitchFamily="34" charset="-120"/>
+              </a:rPr>
+              <a:t>Zingiber officinale</a:t>
+            </a:r>
+            <a:pPr algn="l" indent="0" marL="0">
+              <a:lnSpc>
+                <a:spcPts val="1620"/>
+              </a:lnSpc>
+              <a:spcAft>
+                <a:spcPts val="300"/>
+              </a:spcAft>
+              <a:buNone/>
+            </a:pPr>
+            <a:r>
+              <a:rPr lang="en-US" sz="1200" dirty="0">
+                <a:solidFill>
+                  <a:srgbClr val="1C2833"/>
+                </a:solidFill>
+                <a:latin typeface="Arial" pitchFamily="34" charset="0"/>
+                <a:ea typeface="Arial" pitchFamily="34" charset="-122"/>
+                <a:cs typeface="Arial" pitchFamily="34" charset="-120"/>
+              </a:rPr>
+              <a:t> · tea, sabzi</a:t>
+            </a:r>
+            <a:endParaRPr lang="en-US" sz="1200" dirty="0"/>
+          </a:p>
+          <a:p>
+            <a:pPr algn="l" marL="342900" indent="-342900">
+              <a:lnSpc>
+                <a:spcPts val="1620"/>
+              </a:lnSpc>
+              <a:spcAft>
+                <a:spcPts val="300"/>
+              </a:spcAft>
+              <a:buSzPct val="100000"/>
+              <a:buChar char="•"/>
+            </a:pPr>
+            <a:r>
+              <a:rPr lang="en-US" sz="1200" i="1" dirty="0">
+                <a:solidFill>
+                  <a:srgbClr val="1C2833"/>
+                </a:solidFill>
+                <a:latin typeface="Arial" pitchFamily="34" charset="0"/>
+                <a:ea typeface="Arial" pitchFamily="34" charset="-122"/>
+                <a:cs typeface="Arial" pitchFamily="34" charset="-120"/>
+              </a:rPr>
+              <a:t>yavānī</a:t>
+            </a:r>
+            <a:pPr algn="l" indent="0" marL="0">
+              <a:lnSpc>
+                <a:spcPts val="1620"/>
+              </a:lnSpc>
+              <a:spcAft>
+                <a:spcPts val="300"/>
+              </a:spcAft>
+              <a:buNone/>
+            </a:pPr>
+            <a:r>
+              <a:rPr lang="en-US" sz="1200" dirty="0">
+                <a:solidFill>
+                  <a:srgbClr val="1C2833"/>
+                </a:solidFill>
+                <a:latin typeface="Arial" pitchFamily="34" charset="0"/>
+                <a:ea typeface="Arial" pitchFamily="34" charset="-122"/>
+                <a:cs typeface="Arial" pitchFamily="34" charset="-120"/>
+              </a:rPr>
+              <a:t> — ajwain, carom · </a:t>
+            </a:r>
+            <a:pPr algn="l" indent="0" marL="0">
+              <a:lnSpc>
+                <a:spcPts val="1620"/>
+              </a:lnSpc>
+              <a:spcAft>
+                <a:spcPts val="300"/>
+              </a:spcAft>
+              <a:buNone/>
+            </a:pPr>
+            <a:r>
+              <a:rPr lang="en-US" sz="1200" i="1" dirty="0">
+                <a:solidFill>
+                  <a:srgbClr val="1C2833"/>
+                </a:solidFill>
+                <a:latin typeface="Arial" pitchFamily="34" charset="0"/>
+                <a:ea typeface="Arial" pitchFamily="34" charset="-122"/>
+                <a:cs typeface="Arial" pitchFamily="34" charset="-120"/>
+              </a:rPr>
+              <a:t>Trachyspermum ammi</a:t>
+            </a:r>
+            <a:pPr algn="l" indent="0" marL="0">
+              <a:lnSpc>
+                <a:spcPts val="1620"/>
+              </a:lnSpc>
+              <a:spcAft>
+                <a:spcPts val="300"/>
+              </a:spcAft>
+              <a:buNone/>
+            </a:pPr>
+            <a:r>
+              <a:rPr lang="en-US" sz="1200" dirty="0">
+                <a:solidFill>
+                  <a:srgbClr val="1C2833"/>
+                </a:solidFill>
+                <a:latin typeface="Arial" pitchFamily="34" charset="0"/>
+                <a:ea typeface="Arial" pitchFamily="34" charset="-122"/>
+                <a:cs typeface="Arial" pitchFamily="34" charset="-120"/>
+              </a:rPr>
+              <a:t> · parathas, achaar</a:t>
+            </a:r>
+            <a:endParaRPr lang="en-US" sz="1200" dirty="0"/>
+          </a:p>
+          <a:p>
+            <a:pPr algn="l" marL="342900" indent="-342900">
+              <a:lnSpc>
+                <a:spcPts val="1620"/>
+              </a:lnSpc>
+              <a:spcAft>
+                <a:spcPts val="300"/>
+              </a:spcAft>
+              <a:buSzPct val="100000"/>
+              <a:buChar char="•"/>
+            </a:pPr>
+            <a:r>
+              <a:rPr lang="en-US" sz="1200" i="1" dirty="0">
+                <a:solidFill>
+                  <a:srgbClr val="1C2833"/>
+                </a:solidFill>
+                <a:latin typeface="Arial" pitchFamily="34" charset="0"/>
+                <a:ea typeface="Arial" pitchFamily="34" charset="-122"/>
+                <a:cs typeface="Arial" pitchFamily="34" charset="-120"/>
+              </a:rPr>
+              <a:t>pudīnā</a:t>
+            </a:r>
+            <a:pPr algn="l" indent="0" marL="0">
+              <a:lnSpc>
+                <a:spcPts val="1620"/>
+              </a:lnSpc>
+              <a:spcAft>
+                <a:spcPts val="300"/>
+              </a:spcAft>
+              <a:buNone/>
+            </a:pPr>
+            <a:r>
+              <a:rPr lang="en-US" sz="1200" dirty="0">
+                <a:solidFill>
+                  <a:srgbClr val="1C2833"/>
+                </a:solidFill>
+                <a:latin typeface="Arial" pitchFamily="34" charset="0"/>
+                <a:ea typeface="Arial" pitchFamily="34" charset="-122"/>
+                <a:cs typeface="Arial" pitchFamily="34" charset="-120"/>
+              </a:rPr>
+              <a:t> — mint, pudina · </a:t>
+            </a:r>
+            <a:pPr algn="l" indent="0" marL="0">
+              <a:lnSpc>
+                <a:spcPts val="1620"/>
+              </a:lnSpc>
+              <a:spcAft>
+                <a:spcPts val="300"/>
+              </a:spcAft>
+              <a:buNone/>
+            </a:pPr>
+            <a:r>
+              <a:rPr lang="en-US" sz="1200" i="1" dirty="0">
+                <a:solidFill>
+                  <a:srgbClr val="1C2833"/>
+                </a:solidFill>
+                <a:latin typeface="Arial" pitchFamily="34" charset="0"/>
+                <a:ea typeface="Arial" pitchFamily="34" charset="-122"/>
+                <a:cs typeface="Arial" pitchFamily="34" charset="-120"/>
+              </a:rPr>
+              <a:t>Mentha</a:t>
+            </a:r>
+            <a:pPr algn="l" indent="0" marL="0">
+              <a:lnSpc>
+                <a:spcPts val="1620"/>
+              </a:lnSpc>
+              <a:spcAft>
+                <a:spcPts val="300"/>
+              </a:spcAft>
+              <a:buNone/>
+            </a:pPr>
+            <a:r>
+              <a:rPr lang="en-US" sz="1200" dirty="0">
+                <a:solidFill>
+                  <a:srgbClr val="1C2833"/>
+                </a:solidFill>
+                <a:latin typeface="Arial" pitchFamily="34" charset="0"/>
+                <a:ea typeface="Arial" pitchFamily="34" charset="-122"/>
+                <a:cs typeface="Arial" pitchFamily="34" charset="-120"/>
+              </a:rPr>
+              <a:t> species · chutney, raita</a:t>
             </a:r>
             <a:endParaRPr lang="en-US" sz="1200" dirty="0"/>
           </a:p>
@@ -2820,7 +3680,7 @@
                 <a:ea typeface="Georgia" pitchFamily="34" charset="-122"/>
                 <a:cs typeface="Georgia" pitchFamily="34" charset="-120"/>
               </a:rPr>
-              <a:t>Teacher notes</a:t>
+              <a:t>Core (20 min) (cont.)</a:t>
             </a:r>
             <a:endParaRPr lang="en-US" sz="1800" dirty="0"/>
           </a:p>
@@ -2835,7 +3695,7 @@
         <p:spPr>
           <a:xfrm>
             <a:off x="406301" y="870942"/>
-            <a:ext cx="8498026" cy="853083"/>
+            <a:ext cx="8498026" cy="213271"/>
           </a:xfrm>
           <a:prstGeom prst="rect">
             <a:avLst/>
@@ -2868,7 +3728,7 @@
                 <a:ea typeface="Arial" pitchFamily="34" charset="-122"/>
                 <a:cs typeface="Arial" pitchFamily="34" charset="-120"/>
               </a:rPr>
-              <a:t>– Have the safety rule visible on the board for </a:t>
+              <a:t>Ask the class: </a:t>
             </a:r>
             <a:pPr algn="l" indent="0" marL="0">
               <a:lnSpc>
@@ -2883,6 +3743,75 @@
               <a:buNone/>
             </a:pPr>
             <a:r>
+              <a:rPr lang="en-US" sz="1200" i="1" dirty="0">
+                <a:solidFill>
+                  <a:srgbClr val="1C2833"/>
+                </a:solidFill>
+                <a:latin typeface="Arial" pitchFamily="34" charset="0"/>
+                <a:ea typeface="Arial" pitchFamily="34" charset="-122"/>
+                <a:cs typeface="Arial" pitchFamily="34" charset="-120"/>
+              </a:rPr>
+              <a:t>"Which two of these are you most familiar with? Which are you not?"</a:t>
+            </a:r>
+            <a:pPr algn="l" indent="0" marL="0">
+              <a:lnSpc>
+                <a:spcPts val="1680"/>
+              </a:lnSpc>
+              <a:spcBef>
+                <a:spcPts val="300"/>
+              </a:spcBef>
+              <a:spcAft>
+                <a:spcPts val="300"/>
+              </a:spcAft>
+              <a:buNone/>
+            </a:pPr>
+            <a:r>
+              <a:rPr lang="en-US" sz="1200" dirty="0">
+                <a:solidFill>
+                  <a:srgbClr val="1C2833"/>
+                </a:solidFill>
+                <a:latin typeface="Arial" pitchFamily="34" charset="0"/>
+                <a:ea typeface="Arial" pitchFamily="34" charset="-122"/>
+                <a:cs typeface="Arial" pitchFamily="34" charset="-120"/>
+              </a:rPr>
+              <a:t> Show of hands per herb.</a:t>
+            </a:r>
+            <a:endParaRPr lang="en-US" sz="1200" dirty="0"/>
+          </a:p>
+        </p:txBody>
+      </p:sp>
+      <p:sp>
+        <p:nvSpPr>
+          <p:cNvPr id="5" name="Text 3"/>
+          <p:cNvSpPr/>
+          <p:nvPr/>
+        </p:nvSpPr>
+        <p:spPr>
+          <a:xfrm>
+            <a:off x="634901" y="1173063"/>
+            <a:ext cx="8102798" cy="281880"/>
+          </a:xfrm>
+          <a:prstGeom prst="rect">
+            <a:avLst/>
+          </a:prstGeom>
+          <a:noFill/>
+          <a:ln/>
+        </p:spPr>
+        <p:txBody>
+          <a:bodyPr wrap="square" lIns="0" tIns="0" rIns="0" bIns="0" rtlCol="0" anchor="t"/>
+          <a:lstStyle/>
+          <a:p>
+            <a:pPr algn="l" marL="342900" indent="-342900">
+              <a:lnSpc>
+                <a:spcPts val="1620"/>
+              </a:lnSpc>
+              <a:spcAft>
+                <a:spcPts val="300"/>
+              </a:spcAft>
+              <a:buSzPct val="100000"/>
+              <a:buChar char="•"/>
+            </a:pPr>
+            <a:r>
               <a:rPr lang="en-US" sz="1200" b="1" dirty="0">
                 <a:solidFill>
                   <a:srgbClr val="1C2833"/>
@@ -2891,11 +3820,109 @@
                 <a:ea typeface="Arial" pitchFamily="34" charset="-122"/>
                 <a:cs typeface="Arial" pitchFamily="34" charset="-120"/>
               </a:rPr>
-              <a:t>every class</a:t>
-            </a:r>
-            <a:pPr algn="l" indent="0" marL="0">
-              <a:lnSpc>
-                <a:spcPts val="1680"/>
+              <a:t>The big safety rule</a:t>
+            </a:r>
+            <a:pPr algn="l" indent="0" marL="0">
+              <a:lnSpc>
+                <a:spcPts val="1620"/>
+              </a:lnSpc>
+              <a:spcAft>
+                <a:spcPts val="300"/>
+              </a:spcAft>
+              <a:buNone/>
+            </a:pPr>
+            <a:r>
+              <a:rPr lang="en-US" sz="1200" dirty="0">
+                <a:solidFill>
+                  <a:srgbClr val="1C2833"/>
+                </a:solidFill>
+                <a:latin typeface="Arial" pitchFamily="34" charset="0"/>
+                <a:ea typeface="Arial" pitchFamily="34" charset="-122"/>
+                <a:cs typeface="Arial" pitchFamily="34" charset="-120"/>
+              </a:rPr>
+              <a:t> (write on board in capitals — leave it there for the rest of the module):</a:t>
+            </a:r>
+            <a:endParaRPr lang="en-US" sz="1200" dirty="0"/>
+          </a:p>
+        </p:txBody>
+      </p:sp>
+      <p:sp>
+        <p:nvSpPr>
+          <p:cNvPr id="6" name="Text 4"/>
+          <p:cNvSpPr/>
+          <p:nvPr/>
+        </p:nvSpPr>
+        <p:spPr>
+          <a:xfrm>
+            <a:off x="406301" y="1556445"/>
+            <a:ext cx="8331398" cy="611981"/>
+          </a:xfrm>
+          <a:prstGeom prst="rect">
+            <a:avLst/>
+          </a:prstGeom>
+          <a:solidFill>
+            <a:srgbClr val="F4F8F9"/>
+          </a:solidFill>
+          <a:ln/>
+        </p:spPr>
+        <p:txBody>
+          <a:bodyPr wrap="square" rtlCol="0" anchor="ctr"/>
+          <a:lstStyle/>
+          <a:p>
+            <a:pPr indent="0" marL="0">
+              <a:buNone/>
+            </a:pPr>
+            <a:endParaRPr lang="en-US" dirty="0"/>
+          </a:p>
+        </p:txBody>
+      </p:sp>
+      <p:sp>
+        <p:nvSpPr>
+          <p:cNvPr id="7" name="Shape 5"/>
+          <p:cNvSpPr/>
+          <p:nvPr/>
+        </p:nvSpPr>
+        <p:spPr>
+          <a:xfrm>
+            <a:off x="434876" y="1556445"/>
+            <a:ext cx="0" cy="611981"/>
+          </a:xfrm>
+          <a:prstGeom prst="line">
+            <a:avLst/>
+          </a:prstGeom>
+          <a:noFill/>
+          <a:ln w="57150">
+            <a:solidFill>
+              <a:srgbClr val="FE4447"/>
+            </a:solidFill>
+            <a:prstDash val="solid"/>
+          </a:ln>
+        </p:spPr>
+      </p:sp>
+      <p:sp>
+        <p:nvSpPr>
+          <p:cNvPr id="8" name="Text 6"/>
+          <p:cNvSpPr/>
+          <p:nvPr/>
+        </p:nvSpPr>
+        <p:spPr>
+          <a:xfrm>
+            <a:off x="692051" y="1746945"/>
+            <a:ext cx="7973389" cy="230981"/>
+          </a:xfrm>
+          <a:prstGeom prst="rect">
+            <a:avLst/>
+          </a:prstGeom>
+          <a:noFill/>
+          <a:ln/>
+        </p:spPr>
+        <p:txBody>
+          <a:bodyPr wrap="square" lIns="0" tIns="0" rIns="0" bIns="0" rtlCol="0" anchor="t"/>
+          <a:lstStyle/>
+          <a:p>
+            <a:pPr algn="l" indent="0" marL="0">
+              <a:lnSpc>
+                <a:spcPts val="1820"/>
               </a:lnSpc>
               <a:spcBef>
                 <a:spcPts val="300"/>
@@ -2906,69 +3933,23 @@
               <a:buNone/>
             </a:pPr>
             <a:r>
-              <a:rPr lang="en-US" sz="1200" dirty="0">
-                <a:solidFill>
-                  <a:srgbClr val="1C2833"/>
-                </a:solidFill>
-                <a:latin typeface="Arial" pitchFamily="34" charset="0"/>
-                <a:ea typeface="Arial" pitchFamily="34" charset="-122"/>
-                <a:cs typeface="Arial" pitchFamily="34" charset="-120"/>
-              </a:rPr>
-              <a:t> in this module, not just today. – A few students will laugh at "addressed the herbs as if they were beings." Use this. It's a glimpse of a world where you talked to plants. We don't have to take the metaphysics literally to take the </a:t>
-            </a:r>
-            <a:pPr algn="l" indent="0" marL="0">
-              <a:lnSpc>
-                <a:spcPts val="1680"/>
-              </a:lnSpc>
-              <a:spcBef>
-                <a:spcPts val="300"/>
-              </a:spcBef>
-              <a:spcAft>
-                <a:spcPts val="300"/>
-              </a:spcAft>
-              <a:buNone/>
-            </a:pPr>
-            <a:r>
-              <a:rPr lang="en-US" sz="1200" i="1" dirty="0">
-                <a:solidFill>
-                  <a:srgbClr val="1C2833"/>
-                </a:solidFill>
-                <a:latin typeface="Arial" pitchFamily="34" charset="0"/>
-                <a:ea typeface="Arial" pitchFamily="34" charset="-122"/>
-                <a:cs typeface="Arial" pitchFamily="34" charset="-120"/>
-              </a:rPr>
-              <a:t>attention</a:t>
-            </a:r>
-            <a:pPr algn="l" indent="0" marL="0">
-              <a:lnSpc>
-                <a:spcPts val="1680"/>
-              </a:lnSpc>
-              <a:spcBef>
-                <a:spcPts val="300"/>
-              </a:spcBef>
-              <a:spcAft>
-                <a:spcPts val="300"/>
-              </a:spcAft>
-              <a:buNone/>
-            </a:pPr>
-            <a:r>
-              <a:rPr lang="en-US" sz="1200" dirty="0">
-                <a:solidFill>
-                  <a:srgbClr val="1C2833"/>
-                </a:solidFill>
-                <a:latin typeface="Arial" pitchFamily="34" charset="0"/>
-                <a:ea typeface="Arial" pitchFamily="34" charset="-122"/>
-                <a:cs typeface="Arial" pitchFamily="34" charset="-120"/>
-              </a:rPr>
-              <a:t> seriously. – The class word-cloud from the walkaround is your fastest read on who already knows what. Use it to plan Days 2–7.</a:t>
-            </a:r>
-            <a:endParaRPr lang="en-US" sz="1200" dirty="0"/>
-          </a:p>
-        </p:txBody>
-      </p:sp>
-      <p:sp>
-        <p:nvSpPr>
-          <p:cNvPr id="5" name="Text 3"/>
+              <a:rPr lang="en-US" sz="1300" b="1" i="1" dirty="0">
+                <a:solidFill>
+                  <a:srgbClr val="1C2833"/>
+                </a:solidFill>
+                <a:latin typeface="Georgia" pitchFamily="34" charset="0"/>
+                <a:ea typeface="Georgia" pitchFamily="34" charset="-122"/>
+                <a:cs typeface="Georgia" pitchFamily="34" charset="-120"/>
+              </a:rPr>
+              <a:t>FOOD AMOUNTS: SAFE. THERAPEUTIC DOSES: ASK A DOCTOR.</a:t>
+            </a:r>
+            <a:endParaRPr lang="en-US" sz="1300" dirty="0"/>
+          </a:p>
+        </p:txBody>
+      </p:sp>
+      <p:sp>
+        <p:nvSpPr>
+          <p:cNvPr id="9" name="Text 7"/>
           <p:cNvSpPr/>
           <p:nvPr/>
         </p:nvSpPr>
@@ -3118,7 +4099,7 @@
                 <a:ea typeface="Georgia" pitchFamily="34" charset="-122"/>
                 <a:cs typeface="Georgia" pitchFamily="34" charset="-120"/>
               </a:rPr>
-              <a:t>Citation(s) used in this lesson</a:t>
+              <a:t>Core (20 min) (cont.)</a:t>
             </a:r>
             <a:endParaRPr lang="en-US" sz="1800" dirty="0"/>
           </a:p>
@@ -3132,8 +4113,8 @@
         </p:nvSpPr>
         <p:spPr>
           <a:xfrm>
-            <a:off x="634901" y="883593"/>
-            <a:ext cx="8102798" cy="525661"/>
+            <a:off x="406301" y="870942"/>
+            <a:ext cx="8498026" cy="639812"/>
           </a:xfrm>
           <a:prstGeom prst="rect">
             <a:avLst/>
@@ -3145,6 +4126,354 @@
           <a:bodyPr wrap="square" lIns="0" tIns="0" rIns="0" bIns="0" rtlCol="0" anchor="t"/>
           <a:lstStyle/>
           <a:p>
+            <a:pPr algn="l" indent="0" marL="0">
+              <a:lnSpc>
+                <a:spcPts val="1680"/>
+              </a:lnSpc>
+              <a:spcBef>
+                <a:spcPts val="300"/>
+              </a:spcBef>
+              <a:spcAft>
+                <a:spcPts val="300"/>
+              </a:spcAft>
+              <a:buNone/>
+            </a:pPr>
+            <a:r>
+              <a:rPr lang="en-US" sz="1200" dirty="0">
+                <a:solidFill>
+                  <a:srgbClr val="1C2833"/>
+                </a:solidFill>
+                <a:latin typeface="Arial" pitchFamily="34" charset="0"/>
+                <a:ea typeface="Arial" pitchFamily="34" charset="-122"/>
+                <a:cs typeface="Arial" pitchFamily="34" charset="-120"/>
+              </a:rPr>
+              <a:t>Explain in one minute: every plant on this table contains chemicals that affect the human body. In small amounts — the pinch you put in food — these chemicals are mostly safe and often helpful. In concentrated form — powders, capsules, oils — they become medicine, and medicine needs supervision.</a:t>
+            </a:r>
+            <a:endParaRPr lang="en-US" sz="1200" dirty="0"/>
+          </a:p>
+        </p:txBody>
+      </p:sp>
+      <p:sp>
+        <p:nvSpPr>
+          <p:cNvPr id="5" name="Text 3"/>
+          <p:cNvSpPr/>
+          <p:nvPr/>
+        </p:nvSpPr>
+        <p:spPr>
+          <a:xfrm>
+            <a:off x="406301" y="1586954"/>
+            <a:ext cx="8498026" cy="639812"/>
+          </a:xfrm>
+          <a:prstGeom prst="rect">
+            <a:avLst/>
+          </a:prstGeom>
+          <a:noFill/>
+          <a:ln/>
+        </p:spPr>
+        <p:txBody>
+          <a:bodyPr wrap="square" lIns="0" tIns="0" rIns="0" bIns="0" rtlCol="0" anchor="t"/>
+          <a:lstStyle/>
+          <a:p>
+            <a:pPr algn="l" indent="0" marL="0">
+              <a:lnSpc>
+                <a:spcPts val="1680"/>
+              </a:lnSpc>
+              <a:spcBef>
+                <a:spcPts val="300"/>
+              </a:spcBef>
+              <a:spcAft>
+                <a:spcPts val="300"/>
+              </a:spcAft>
+              <a:buNone/>
+            </a:pPr>
+            <a:r>
+              <a:rPr lang="en-US" sz="1200" i="1" dirty="0">
+                <a:solidFill>
+                  <a:srgbClr val="1C2833"/>
+                </a:solidFill>
+                <a:latin typeface="Arial" pitchFamily="34" charset="0"/>
+                <a:ea typeface="Arial" pitchFamily="34" charset="-122"/>
+                <a:cs typeface="Arial" pitchFamily="34" charset="-120"/>
+              </a:rPr>
+              <a:t>"Anyone here ever heard a relative say 'neem is good for you, eat the leaves'? Does anyone want to chew a neem leaf right now?"</a:t>
+            </a:r>
+            <a:pPr algn="l" indent="0" marL="0">
+              <a:lnSpc>
+                <a:spcPts val="1680"/>
+              </a:lnSpc>
+              <a:spcBef>
+                <a:spcPts val="300"/>
+              </a:spcBef>
+              <a:spcAft>
+                <a:spcPts val="300"/>
+              </a:spcAft>
+              <a:buNone/>
+            </a:pPr>
+            <a:r>
+              <a:rPr lang="en-US" sz="1200" dirty="0">
+                <a:solidFill>
+                  <a:srgbClr val="1C2833"/>
+                </a:solidFill>
+                <a:latin typeface="Arial" pitchFamily="34" charset="0"/>
+                <a:ea typeface="Arial" pitchFamily="34" charset="-122"/>
+                <a:cs typeface="Arial" pitchFamily="34" charset="-120"/>
+              </a:rPr>
+              <a:t> (They will. Don't let them.) </a:t>
+            </a:r>
+            <a:pPr algn="l" indent="0" marL="0">
+              <a:lnSpc>
+                <a:spcPts val="1680"/>
+              </a:lnSpc>
+              <a:spcBef>
+                <a:spcPts val="300"/>
+              </a:spcBef>
+              <a:spcAft>
+                <a:spcPts val="300"/>
+              </a:spcAft>
+              <a:buNone/>
+            </a:pPr>
+            <a:r>
+              <a:rPr lang="en-US" sz="1200" i="1" dirty="0">
+                <a:solidFill>
+                  <a:srgbClr val="1C2833"/>
+                </a:solidFill>
+                <a:latin typeface="Arial" pitchFamily="34" charset="0"/>
+                <a:ea typeface="Arial" pitchFamily="34" charset="-122"/>
+                <a:cs typeface="Arial" pitchFamily="34" charset="-120"/>
+              </a:rPr>
+              <a:t>"Neem in concentrated form can damage the liver — and pure neem leaf is so bitter you'd spit it out anyway. So we'll smell it. We won't eat it."</a:t>
+            </a:r>
+            <a:endParaRPr lang="en-US" sz="1200" dirty="0"/>
+          </a:p>
+        </p:txBody>
+      </p:sp>
+      <p:sp>
+        <p:nvSpPr>
+          <p:cNvPr id="6" name="Text 4"/>
+          <p:cNvSpPr/>
+          <p:nvPr/>
+        </p:nvSpPr>
+        <p:spPr>
+          <a:xfrm>
+            <a:off x="406301" y="4434929"/>
+            <a:ext cx="8498026" cy="213271"/>
+          </a:xfrm>
+          <a:prstGeom prst="rect">
+            <a:avLst/>
+          </a:prstGeom>
+          <a:noFill/>
+          <a:ln/>
+        </p:spPr>
+        <p:txBody>
+          <a:bodyPr wrap="square" lIns="0" tIns="0" rIns="0" bIns="0" rtlCol="0" anchor="t"/>
+          <a:lstStyle/>
+          <a:p>
+            <a:pPr algn="l" indent="0" marL="0">
+              <a:lnSpc>
+                <a:spcPts val="1680"/>
+              </a:lnSpc>
+              <a:spcBef>
+                <a:spcPts val="300"/>
+              </a:spcBef>
+              <a:spcAft>
+                <a:spcPts val="300"/>
+              </a:spcAft>
+              <a:buNone/>
+            </a:pPr>
+            <a:r>
+              <a:rPr lang="en-US" sz="1200" dirty="0">
+                <a:solidFill>
+                  <a:srgbClr val="1C2833"/>
+                </a:solidFill>
+                <a:latin typeface="Arial" pitchFamily="34" charset="0"/>
+                <a:ea typeface="Arial" pitchFamily="34" charset="-122"/>
+                <a:cs typeface="Arial" pitchFamily="34" charset="-120"/>
+              </a:rPr>
+              <a:t>Middle ·  · IKS Curriculum</a:t>
+            </a:r>
+            <a:endParaRPr lang="en-US" sz="1200" dirty="0"/>
+          </a:p>
+        </p:txBody>
+      </p:sp>
+    </p:spTree>
+  </p:cSld>
+  <p:clrMapOvr>
+    <a:masterClrMapping/>
+  </p:clrMapOvr>
+</p:sld>
+</file>
+
+<file path=ppt/slides/slide13.xml><?xml version="1.0" encoding="utf-8"?>
+<p:sld xmlns:a="http://schemas.openxmlformats.org/drawingml/2006/main" xmlns:r="http://schemas.openxmlformats.org/officeDocument/2006/relationships" xmlns:p="http://schemas.openxmlformats.org/presentationml/2006/main">
+  <p:cSld name="Slide 13">
+    <p:bg>
+      <p:bgPr>
+        <a:solidFill>
+          <a:srgbClr val="FFFFFF"/>
+        </a:solidFill>
+      </p:bgPr>
+    </p:bg>
+    <p:spTree>
+      <p:nvGrpSpPr>
+        <p:cNvPr id="1" name=""/>
+        <p:cNvGrpSpPr/>
+        <p:nvPr/>
+      </p:nvGrpSpPr>
+      <p:grpSpPr>
+        <a:xfrm>
+          <a:off x="0" y="0"/>
+          <a:ext cx="0" cy="0"/>
+          <a:chOff x="0" y="0"/>
+          <a:chExt cx="0" cy="0"/>
+        </a:xfrm>
+      </p:grpSpPr>
+      <p:sp>
+        <p:nvSpPr>
+          <p:cNvPr id="2" name="Text 0"/>
+          <p:cNvSpPr/>
+          <p:nvPr/>
+        </p:nvSpPr>
+        <p:spPr>
+          <a:xfrm>
+            <a:off x="0" y="0"/>
+            <a:ext cx="9144000" cy="101501"/>
+          </a:xfrm>
+          <a:prstGeom prst="rect">
+            <a:avLst/>
+          </a:prstGeom>
+          <a:solidFill>
+            <a:srgbClr val="277884"/>
+          </a:solidFill>
+          <a:ln/>
+        </p:spPr>
+        <p:txBody>
+          <a:bodyPr wrap="square" rtlCol="0" anchor="ctr"/>
+          <a:lstStyle/>
+          <a:p>
+            <a:pPr indent="0" marL="0">
+              <a:buNone/>
+            </a:pPr>
+            <a:endParaRPr lang="en-US" dirty="0"/>
+          </a:p>
+        </p:txBody>
+      </p:sp>
+      <p:sp>
+        <p:nvSpPr>
+          <p:cNvPr id="3" name="Text 1"/>
+          <p:cNvSpPr/>
+          <p:nvPr/>
+        </p:nvSpPr>
+        <p:spPr>
+          <a:xfrm>
+            <a:off x="406301" y="457051"/>
+            <a:ext cx="8498026" cy="274290"/>
+          </a:xfrm>
+          <a:prstGeom prst="rect">
+            <a:avLst/>
+          </a:prstGeom>
+          <a:noFill/>
+          <a:ln/>
+        </p:spPr>
+        <p:txBody>
+          <a:bodyPr wrap="square" lIns="0" tIns="0" rIns="0" bIns="0" rtlCol="0" anchor="t"/>
+          <a:lstStyle/>
+          <a:p>
+            <a:pPr algn="l" indent="0" marL="0">
+              <a:lnSpc>
+                <a:spcPts val="2160"/>
+              </a:lnSpc>
+              <a:spcBef>
+                <a:spcPts val="600"/>
+              </a:spcBef>
+              <a:spcAft>
+                <a:spcPts val="800"/>
+              </a:spcAft>
+              <a:buNone/>
+            </a:pPr>
+            <a:r>
+              <a:rPr lang="en-US" sz="1800" b="1" dirty="0">
+                <a:solidFill>
+                  <a:srgbClr val="FE4447"/>
+                </a:solidFill>
+                <a:latin typeface="Georgia" pitchFamily="34" charset="0"/>
+                <a:ea typeface="Georgia" pitchFamily="34" charset="-122"/>
+                <a:cs typeface="Georgia" pitchFamily="34" charset="-120"/>
+              </a:rPr>
+              <a:t>Activity (15 min) — Six-herb walkaround</a:t>
+            </a:r>
+            <a:endParaRPr lang="en-US" sz="1800" dirty="0"/>
+          </a:p>
+        </p:txBody>
+      </p:sp>
+      <p:sp>
+        <p:nvSpPr>
+          <p:cNvPr id="4" name="Text 2"/>
+          <p:cNvSpPr/>
+          <p:nvPr/>
+        </p:nvSpPr>
+        <p:spPr>
+          <a:xfrm>
+            <a:off x="406301" y="870942"/>
+            <a:ext cx="8498026" cy="213271"/>
+          </a:xfrm>
+          <a:prstGeom prst="rect">
+            <a:avLst/>
+          </a:prstGeom>
+          <a:noFill/>
+          <a:ln/>
+        </p:spPr>
+        <p:txBody>
+          <a:bodyPr wrap="square" lIns="0" tIns="0" rIns="0" bIns="0" rtlCol="0" anchor="t"/>
+          <a:lstStyle/>
+          <a:p>
+            <a:pPr algn="l" indent="0" marL="0">
+              <a:lnSpc>
+                <a:spcPts val="1680"/>
+              </a:lnSpc>
+              <a:spcBef>
+                <a:spcPts val="300"/>
+              </a:spcBef>
+              <a:spcAft>
+                <a:spcPts val="300"/>
+              </a:spcAft>
+              <a:buNone/>
+            </a:pPr>
+            <a:r>
+              <a:rPr lang="en-US" sz="1200" dirty="0">
+                <a:solidFill>
+                  <a:srgbClr val="1C2833"/>
+                </a:solidFill>
+                <a:latin typeface="Arial" pitchFamily="34" charset="0"/>
+                <a:ea typeface="Arial" pitchFamily="34" charset="-122"/>
+                <a:cs typeface="Arial" pitchFamily="34" charset="-120"/>
+              </a:rPr>
+              <a:t>Set up six "stations" — one per herb. Pairs of students rotate through, 1.5 minutes per station. At each:</a:t>
+            </a:r>
+            <a:endParaRPr lang="en-US" sz="1200" dirty="0"/>
+          </a:p>
+        </p:txBody>
+      </p:sp>
+      <p:sp>
+        <p:nvSpPr>
+          <p:cNvPr id="5" name="Text 3"/>
+          <p:cNvSpPr/>
+          <p:nvPr/>
+        </p:nvSpPr>
+        <p:spPr>
+          <a:xfrm>
+            <a:off x="634901" y="1173063"/>
+            <a:ext cx="8102798" cy="975122"/>
+          </a:xfrm>
+          <a:prstGeom prst="rect">
+            <a:avLst/>
+          </a:prstGeom>
+          <a:noFill/>
+          <a:ln/>
+        </p:spPr>
+        <p:txBody>
+          <a:bodyPr wrap="square" lIns="0" tIns="0" rIns="0" bIns="0" rtlCol="0" anchor="t"/>
+          <a:lstStyle/>
+          <a:p>
             <a:pPr algn="l" marL="342900" indent="-342900">
               <a:lnSpc>
                 <a:spcPts val="1620"/>
@@ -3156,15 +4485,15 @@
               <a:buChar char="•"/>
             </a:pPr>
             <a:r>
-              <a:rPr lang="en-US" sz="1200" i="1" dirty="0">
-                <a:solidFill>
-                  <a:srgbClr val="1C2833"/>
-                </a:solidFill>
-                <a:latin typeface="Arial" pitchFamily="34" charset="0"/>
-                <a:ea typeface="Arial" pitchFamily="34" charset="-122"/>
-                <a:cs typeface="Arial" pitchFamily="34" charset="-120"/>
-              </a:rPr>
-              <a:t>Ṛgveda 10.97</a:t>
+              <a:rPr lang="en-US" sz="1200" b="1" dirty="0">
+                <a:solidFill>
+                  <a:srgbClr val="1C2833"/>
+                </a:solidFill>
+                <a:latin typeface="Arial" pitchFamily="34" charset="0"/>
+                <a:ea typeface="Arial" pitchFamily="34" charset="-122"/>
+                <a:cs typeface="Arial" pitchFamily="34" charset="-120"/>
+              </a:rPr>
+              <a:t>Look.</a:t>
             </a:r>
             <a:pPr algn="l" indent="0" marL="0">
               <a:lnSpc>
@@ -3184,47 +4513,7 @@
                 <a:ea typeface="Arial" pitchFamily="34" charset="-122"/>
                 <a:cs typeface="Arial" pitchFamily="34" charset="-120"/>
               </a:rPr>
-              <a:t> — the </a:t>
-            </a:r>
-            <a:pPr algn="l" indent="0" marL="0">
-              <a:lnSpc>
-                <a:spcPts val="1620"/>
-              </a:lnSpc>
-              <a:spcAft>
-                <a:spcPts val="300"/>
-              </a:spcAft>
-              <a:buNone/>
-            </a:pPr>
-            <a:r>
-              <a:rPr lang="en-US" sz="1200" i="1" dirty="0">
-                <a:solidFill>
-                  <a:srgbClr val="1C2833"/>
-                </a:solidFill>
-                <a:latin typeface="Arial" pitchFamily="34" charset="0"/>
-                <a:ea typeface="Arial" pitchFamily="34" charset="-122"/>
-                <a:cs typeface="Arial" pitchFamily="34" charset="-120"/>
-              </a:rPr>
-              <a:t>Auṣadhi-sūkta</a:t>
-            </a:r>
-            <a:pPr algn="l" indent="0" marL="0">
-              <a:lnSpc>
-                <a:spcPts val="1620"/>
-              </a:lnSpc>
-              <a:spcAft>
-                <a:spcPts val="300"/>
-              </a:spcAft>
-              <a:buNone/>
-            </a:pPr>
-            <a:r>
-              <a:rPr lang="en-US" sz="1200" dirty="0">
-                <a:solidFill>
-                  <a:srgbClr val="1C2833"/>
-                </a:solidFill>
-                <a:latin typeface="Arial" pitchFamily="34" charset="0"/>
-                <a:ea typeface="Arial" pitchFamily="34" charset="-122"/>
-                <a:cs typeface="Arial" pitchFamily="34" charset="-120"/>
-              </a:rPr>
-              <a:t>. Referenced by sūkta number. Real public-domain Vedic source.</a:t>
+              <a:t> What shape is the leaf or root?</a:t>
             </a:r>
             <a:endParaRPr lang="en-US" sz="1200" dirty="0"/>
           </a:p>
@@ -3240,6 +4529,1975 @@
               <a:buChar char="•"/>
             </a:pPr>
             <a:r>
+              <a:rPr lang="en-US" sz="1200" b="1" dirty="0">
+                <a:solidFill>
+                  <a:srgbClr val="1C2833"/>
+                </a:solidFill>
+                <a:latin typeface="Arial" pitchFamily="34" charset="0"/>
+                <a:ea typeface="Arial" pitchFamily="34" charset="-122"/>
+                <a:cs typeface="Arial" pitchFamily="34" charset="-120"/>
+              </a:rPr>
+              <a:t>Smell.</a:t>
+            </a:r>
+            <a:pPr algn="l" indent="0" marL="0">
+              <a:lnSpc>
+                <a:spcPts val="1620"/>
+              </a:lnSpc>
+              <a:spcAft>
+                <a:spcPts val="300"/>
+              </a:spcAft>
+              <a:buNone/>
+            </a:pPr>
+            <a:r>
+              <a:rPr lang="en-US" sz="1200" dirty="0">
+                <a:solidFill>
+                  <a:srgbClr val="1C2833"/>
+                </a:solidFill>
+                <a:latin typeface="Arial" pitchFamily="34" charset="0"/>
+                <a:ea typeface="Arial" pitchFamily="34" charset="-122"/>
+                <a:cs typeface="Arial" pitchFamily="34" charset="-120"/>
+              </a:rPr>
+              <a:t> Crush a tiny piece (where safe — not neem) and inhale gently from a distance. Don't put it under anyone else's nose.</a:t>
+            </a:r>
+            <a:endParaRPr lang="en-US" sz="1200" dirty="0"/>
+          </a:p>
+          <a:p>
+            <a:pPr algn="l" marL="342900" indent="-342900">
+              <a:lnSpc>
+                <a:spcPts val="1620"/>
+              </a:lnSpc>
+              <a:spcAft>
+                <a:spcPts val="300"/>
+              </a:spcAft>
+              <a:buSzPct val="100000"/>
+              <a:buChar char="•"/>
+            </a:pPr>
+            <a:r>
+              <a:rPr lang="en-US" sz="1200" b="1" dirty="0">
+                <a:solidFill>
+                  <a:srgbClr val="1C2833"/>
+                </a:solidFill>
+                <a:latin typeface="Arial" pitchFamily="34" charset="0"/>
+                <a:ea typeface="Arial" pitchFamily="34" charset="-122"/>
+                <a:cs typeface="Arial" pitchFamily="34" charset="-120"/>
+              </a:rPr>
+              <a:t>Record</a:t>
+            </a:r>
+            <a:pPr algn="l" indent="0" marL="0">
+              <a:lnSpc>
+                <a:spcPts val="1620"/>
+              </a:lnSpc>
+              <a:spcAft>
+                <a:spcPts val="300"/>
+              </a:spcAft>
+              <a:buNone/>
+            </a:pPr>
+            <a:r>
+              <a:rPr lang="en-US" sz="1200" dirty="0">
+                <a:solidFill>
+                  <a:srgbClr val="1C2833"/>
+                </a:solidFill>
+                <a:latin typeface="Arial" pitchFamily="34" charset="0"/>
+                <a:ea typeface="Arial" pitchFamily="34" charset="-122"/>
+                <a:cs typeface="Arial" pitchFamily="34" charset="-120"/>
+              </a:rPr>
+              <a:t> one identifying feature on their workbook page.</a:t>
+            </a:r>
+            <a:endParaRPr lang="en-US" sz="1200" dirty="0"/>
+          </a:p>
+        </p:txBody>
+      </p:sp>
+      <p:sp>
+        <p:nvSpPr>
+          <p:cNvPr id="6" name="Text 4"/>
+          <p:cNvSpPr/>
+          <p:nvPr/>
+        </p:nvSpPr>
+        <p:spPr>
+          <a:xfrm>
+            <a:off x="406301" y="4434929"/>
+            <a:ext cx="8498026" cy="213271"/>
+          </a:xfrm>
+          <a:prstGeom prst="rect">
+            <a:avLst/>
+          </a:prstGeom>
+          <a:noFill/>
+          <a:ln/>
+        </p:spPr>
+        <p:txBody>
+          <a:bodyPr wrap="square" lIns="0" tIns="0" rIns="0" bIns="0" rtlCol="0" anchor="t"/>
+          <a:lstStyle/>
+          <a:p>
+            <a:pPr algn="l" indent="0" marL="0">
+              <a:lnSpc>
+                <a:spcPts val="1680"/>
+              </a:lnSpc>
+              <a:spcBef>
+                <a:spcPts val="300"/>
+              </a:spcBef>
+              <a:spcAft>
+                <a:spcPts val="300"/>
+              </a:spcAft>
+              <a:buNone/>
+            </a:pPr>
+            <a:r>
+              <a:rPr lang="en-US" sz="1200" dirty="0">
+                <a:solidFill>
+                  <a:srgbClr val="1C2833"/>
+                </a:solidFill>
+                <a:latin typeface="Arial" pitchFamily="34" charset="0"/>
+                <a:ea typeface="Arial" pitchFamily="34" charset="-122"/>
+                <a:cs typeface="Arial" pitchFamily="34" charset="-120"/>
+              </a:rPr>
+              <a:t>Middle ·  · IKS Curriculum</a:t>
+            </a:r>
+            <a:endParaRPr lang="en-US" sz="1200" dirty="0"/>
+          </a:p>
+        </p:txBody>
+      </p:sp>
+    </p:spTree>
+  </p:cSld>
+  <p:clrMapOvr>
+    <a:masterClrMapping/>
+  </p:clrMapOvr>
+</p:sld>
+</file>
+
+<file path=ppt/slides/slide14.xml><?xml version="1.0" encoding="utf-8"?>
+<p:sld xmlns:a="http://schemas.openxmlformats.org/drawingml/2006/main" xmlns:r="http://schemas.openxmlformats.org/officeDocument/2006/relationships" xmlns:p="http://schemas.openxmlformats.org/presentationml/2006/main">
+  <p:cSld name="Slide 14">
+    <p:bg>
+      <p:bgPr>
+        <a:solidFill>
+          <a:srgbClr val="FFFFFF"/>
+        </a:solidFill>
+      </p:bgPr>
+    </p:bg>
+    <p:spTree>
+      <p:nvGrpSpPr>
+        <p:cNvPr id="1" name=""/>
+        <p:cNvGrpSpPr/>
+        <p:nvPr/>
+      </p:nvGrpSpPr>
+      <p:grpSpPr>
+        <a:xfrm>
+          <a:off x="0" y="0"/>
+          <a:ext cx="0" cy="0"/>
+          <a:chOff x="0" y="0"/>
+          <a:chExt cx="0" cy="0"/>
+        </a:xfrm>
+      </p:grpSpPr>
+      <p:sp>
+        <p:nvSpPr>
+          <p:cNvPr id="2" name="Text 0"/>
+          <p:cNvSpPr/>
+          <p:nvPr/>
+        </p:nvSpPr>
+        <p:spPr>
+          <a:xfrm>
+            <a:off x="0" y="0"/>
+            <a:ext cx="9144000" cy="101501"/>
+          </a:xfrm>
+          <a:prstGeom prst="rect">
+            <a:avLst/>
+          </a:prstGeom>
+          <a:solidFill>
+            <a:srgbClr val="277884"/>
+          </a:solidFill>
+          <a:ln/>
+        </p:spPr>
+        <p:txBody>
+          <a:bodyPr wrap="square" rtlCol="0" anchor="ctr"/>
+          <a:lstStyle/>
+          <a:p>
+            <a:pPr indent="0" marL="0">
+              <a:buNone/>
+            </a:pPr>
+            <a:endParaRPr lang="en-US" dirty="0"/>
+          </a:p>
+        </p:txBody>
+      </p:sp>
+      <p:sp>
+        <p:nvSpPr>
+          <p:cNvPr id="3" name="Text 1"/>
+          <p:cNvSpPr/>
+          <p:nvPr/>
+        </p:nvSpPr>
+        <p:spPr>
+          <a:xfrm>
+            <a:off x="406301" y="457051"/>
+            <a:ext cx="8498026" cy="274290"/>
+          </a:xfrm>
+          <a:prstGeom prst="rect">
+            <a:avLst/>
+          </a:prstGeom>
+          <a:noFill/>
+          <a:ln/>
+        </p:spPr>
+        <p:txBody>
+          <a:bodyPr wrap="square" lIns="0" tIns="0" rIns="0" bIns="0" rtlCol="0" anchor="t"/>
+          <a:lstStyle/>
+          <a:p>
+            <a:pPr algn="l" indent="0" marL="0">
+              <a:lnSpc>
+                <a:spcPts val="2160"/>
+              </a:lnSpc>
+              <a:spcBef>
+                <a:spcPts val="600"/>
+              </a:spcBef>
+              <a:spcAft>
+                <a:spcPts val="800"/>
+              </a:spcAft>
+              <a:buNone/>
+            </a:pPr>
+            <a:r>
+              <a:rPr lang="en-US" sz="1800" b="1" dirty="0">
+                <a:solidFill>
+                  <a:srgbClr val="FE4447"/>
+                </a:solidFill>
+                <a:latin typeface="Georgia" pitchFamily="34" charset="0"/>
+                <a:ea typeface="Georgia" pitchFamily="34" charset="-122"/>
+                <a:cs typeface="Georgia" pitchFamily="34" charset="-120"/>
+              </a:rPr>
+              <a:t>Activity (15 min) — Six-herb walkaround (cont.)</a:t>
+            </a:r>
+            <a:endParaRPr lang="en-US" sz="1800" dirty="0"/>
+          </a:p>
+        </p:txBody>
+      </p:sp>
+      <p:sp>
+        <p:nvSpPr>
+          <p:cNvPr id="4" name="Text 2"/>
+          <p:cNvSpPr/>
+          <p:nvPr/>
+        </p:nvSpPr>
+        <p:spPr>
+          <a:xfrm>
+            <a:off x="406301" y="870942"/>
+            <a:ext cx="8498026" cy="213271"/>
+          </a:xfrm>
+          <a:prstGeom prst="rect">
+            <a:avLst/>
+          </a:prstGeom>
+          <a:noFill/>
+          <a:ln/>
+        </p:spPr>
+        <p:txBody>
+          <a:bodyPr wrap="square" lIns="0" tIns="0" rIns="0" bIns="0" rtlCol="0" anchor="t"/>
+          <a:lstStyle/>
+          <a:p>
+            <a:pPr algn="l" indent="0" marL="0">
+              <a:lnSpc>
+                <a:spcPts val="1680"/>
+              </a:lnSpc>
+              <a:spcBef>
+                <a:spcPts val="300"/>
+              </a:spcBef>
+              <a:spcAft>
+                <a:spcPts val="300"/>
+              </a:spcAft>
+              <a:buNone/>
+            </a:pPr>
+            <a:r>
+              <a:rPr lang="en-US" sz="1200" dirty="0">
+                <a:solidFill>
+                  <a:srgbClr val="1C2833"/>
+                </a:solidFill>
+                <a:latin typeface="Arial" pitchFamily="34" charset="0"/>
+                <a:ea typeface="Arial" pitchFamily="34" charset="-122"/>
+                <a:cs typeface="Arial" pitchFamily="34" charset="-120"/>
+              </a:rPr>
+              <a:t>At the neem station, leaves are dried and in a sealed bag. </a:t>
+            </a:r>
+            <a:pPr algn="l" indent="0" marL="0">
+              <a:lnSpc>
+                <a:spcPts val="1680"/>
+              </a:lnSpc>
+              <a:spcBef>
+                <a:spcPts val="300"/>
+              </a:spcBef>
+              <a:spcAft>
+                <a:spcPts val="300"/>
+              </a:spcAft>
+              <a:buNone/>
+            </a:pPr>
+            <a:r>
+              <a:rPr lang="en-US" sz="1200" b="1" dirty="0">
+                <a:solidFill>
+                  <a:srgbClr val="1C2833"/>
+                </a:solidFill>
+                <a:latin typeface="Arial" pitchFamily="34" charset="0"/>
+                <a:ea typeface="Arial" pitchFamily="34" charset="-122"/>
+                <a:cs typeface="Arial" pitchFamily="34" charset="-120"/>
+              </a:rPr>
+              <a:t>Smell from outside the bag.</a:t>
+            </a:r>
+            <a:pPr algn="l" indent="0" marL="0">
+              <a:lnSpc>
+                <a:spcPts val="1680"/>
+              </a:lnSpc>
+              <a:spcBef>
+                <a:spcPts val="300"/>
+              </a:spcBef>
+              <a:spcAft>
+                <a:spcPts val="300"/>
+              </a:spcAft>
+              <a:buNone/>
+            </a:pPr>
+            <a:r>
+              <a:rPr lang="en-US" sz="1200" dirty="0">
+                <a:solidFill>
+                  <a:srgbClr val="1C2833"/>
+                </a:solidFill>
+                <a:latin typeface="Arial" pitchFamily="34" charset="0"/>
+                <a:ea typeface="Arial" pitchFamily="34" charset="-122"/>
+                <a:cs typeface="Arial" pitchFamily="34" charset="-120"/>
+              </a:rPr>
+              <a:t> No touching the inside.</a:t>
+            </a:r>
+            <a:endParaRPr lang="en-US" sz="1200" dirty="0"/>
+          </a:p>
+        </p:txBody>
+      </p:sp>
+      <p:sp>
+        <p:nvSpPr>
+          <p:cNvPr id="5" name="Text 3"/>
+          <p:cNvSpPr/>
+          <p:nvPr/>
+        </p:nvSpPr>
+        <p:spPr>
+          <a:xfrm>
+            <a:off x="406301" y="1160413"/>
+            <a:ext cx="8498026" cy="213271"/>
+          </a:xfrm>
+          <a:prstGeom prst="rect">
+            <a:avLst/>
+          </a:prstGeom>
+          <a:noFill/>
+          <a:ln/>
+        </p:spPr>
+        <p:txBody>
+          <a:bodyPr wrap="square" lIns="0" tIns="0" rIns="0" bIns="0" rtlCol="0" anchor="t"/>
+          <a:lstStyle/>
+          <a:p>
+            <a:pPr algn="l" indent="0" marL="0">
+              <a:lnSpc>
+                <a:spcPts val="1680"/>
+              </a:lnSpc>
+              <a:spcBef>
+                <a:spcPts val="300"/>
+              </a:spcBef>
+              <a:spcAft>
+                <a:spcPts val="300"/>
+              </a:spcAft>
+              <a:buNone/>
+            </a:pPr>
+            <a:r>
+              <a:rPr lang="en-US" sz="1200" dirty="0">
+                <a:solidFill>
+                  <a:srgbClr val="1C2833"/>
+                </a:solidFill>
+                <a:latin typeface="Arial" pitchFamily="34" charset="0"/>
+                <a:ea typeface="Arial" pitchFamily="34" charset="-122"/>
+                <a:cs typeface="Arial" pitchFamily="34" charset="-120"/>
+              </a:rPr>
+              <a:t>Last 3 min: pairs report one feature back to the group. Build a quick "first impression" word-cloud on the board.</a:t>
+            </a:r>
+            <a:endParaRPr lang="en-US" sz="1200" dirty="0"/>
+          </a:p>
+        </p:txBody>
+      </p:sp>
+      <p:sp>
+        <p:nvSpPr>
+          <p:cNvPr id="6" name="Text 4"/>
+          <p:cNvSpPr/>
+          <p:nvPr/>
+        </p:nvSpPr>
+        <p:spPr>
+          <a:xfrm>
+            <a:off x="406301" y="4434929"/>
+            <a:ext cx="8498026" cy="213271"/>
+          </a:xfrm>
+          <a:prstGeom prst="rect">
+            <a:avLst/>
+          </a:prstGeom>
+          <a:noFill/>
+          <a:ln/>
+        </p:spPr>
+        <p:txBody>
+          <a:bodyPr wrap="square" lIns="0" tIns="0" rIns="0" bIns="0" rtlCol="0" anchor="t"/>
+          <a:lstStyle/>
+          <a:p>
+            <a:pPr algn="l" indent="0" marL="0">
+              <a:lnSpc>
+                <a:spcPts val="1680"/>
+              </a:lnSpc>
+              <a:spcBef>
+                <a:spcPts val="300"/>
+              </a:spcBef>
+              <a:spcAft>
+                <a:spcPts val="300"/>
+              </a:spcAft>
+              <a:buNone/>
+            </a:pPr>
+            <a:r>
+              <a:rPr lang="en-US" sz="1200" dirty="0">
+                <a:solidFill>
+                  <a:srgbClr val="1C2833"/>
+                </a:solidFill>
+                <a:latin typeface="Arial" pitchFamily="34" charset="0"/>
+                <a:ea typeface="Arial" pitchFamily="34" charset="-122"/>
+                <a:cs typeface="Arial" pitchFamily="34" charset="-120"/>
+              </a:rPr>
+              <a:t>Middle ·  · IKS Curriculum</a:t>
+            </a:r>
+            <a:endParaRPr lang="en-US" sz="1200" dirty="0"/>
+          </a:p>
+        </p:txBody>
+      </p:sp>
+    </p:spTree>
+  </p:cSld>
+  <p:clrMapOvr>
+    <a:masterClrMapping/>
+  </p:clrMapOvr>
+</p:sld>
+</file>
+
+<file path=ppt/slides/slide15.xml><?xml version="1.0" encoding="utf-8"?>
+<p:sld xmlns:a="http://schemas.openxmlformats.org/drawingml/2006/main" xmlns:r="http://schemas.openxmlformats.org/officeDocument/2006/relationships" xmlns:p="http://schemas.openxmlformats.org/presentationml/2006/main">
+  <p:cSld name="Slide 15">
+    <p:bg>
+      <p:bgPr>
+        <a:solidFill>
+          <a:srgbClr val="FFFFFF"/>
+        </a:solidFill>
+      </p:bgPr>
+    </p:bg>
+    <p:spTree>
+      <p:nvGrpSpPr>
+        <p:cNvPr id="1" name=""/>
+        <p:cNvGrpSpPr/>
+        <p:nvPr/>
+      </p:nvGrpSpPr>
+      <p:grpSpPr>
+        <a:xfrm>
+          <a:off x="0" y="0"/>
+          <a:ext cx="0" cy="0"/>
+          <a:chOff x="0" y="0"/>
+          <a:chExt cx="0" cy="0"/>
+        </a:xfrm>
+      </p:grpSpPr>
+      <p:sp>
+        <p:nvSpPr>
+          <p:cNvPr id="2" name="Text 0"/>
+          <p:cNvSpPr/>
+          <p:nvPr/>
+        </p:nvSpPr>
+        <p:spPr>
+          <a:xfrm>
+            <a:off x="0" y="0"/>
+            <a:ext cx="9144000" cy="101501"/>
+          </a:xfrm>
+          <a:prstGeom prst="rect">
+            <a:avLst/>
+          </a:prstGeom>
+          <a:solidFill>
+            <a:srgbClr val="277884"/>
+          </a:solidFill>
+          <a:ln/>
+        </p:spPr>
+        <p:txBody>
+          <a:bodyPr wrap="square" rtlCol="0" anchor="ctr"/>
+          <a:lstStyle/>
+          <a:p>
+            <a:pPr indent="0" marL="0">
+              <a:buNone/>
+            </a:pPr>
+            <a:endParaRPr lang="en-US" dirty="0"/>
+          </a:p>
+        </p:txBody>
+      </p:sp>
+      <p:sp>
+        <p:nvSpPr>
+          <p:cNvPr id="3" name="Text 1"/>
+          <p:cNvSpPr/>
+          <p:nvPr/>
+        </p:nvSpPr>
+        <p:spPr>
+          <a:xfrm>
+            <a:off x="406301" y="457051"/>
+            <a:ext cx="8498026" cy="274290"/>
+          </a:xfrm>
+          <a:prstGeom prst="rect">
+            <a:avLst/>
+          </a:prstGeom>
+          <a:noFill/>
+          <a:ln/>
+        </p:spPr>
+        <p:txBody>
+          <a:bodyPr wrap="square" lIns="0" tIns="0" rIns="0" bIns="0" rtlCol="0" anchor="t"/>
+          <a:lstStyle/>
+          <a:p>
+            <a:pPr algn="l" indent="0" marL="0">
+              <a:lnSpc>
+                <a:spcPts val="2160"/>
+              </a:lnSpc>
+              <a:spcBef>
+                <a:spcPts val="600"/>
+              </a:spcBef>
+              <a:spcAft>
+                <a:spcPts val="800"/>
+              </a:spcAft>
+              <a:buNone/>
+            </a:pPr>
+            <a:r>
+              <a:rPr lang="en-US" sz="1800" b="1" dirty="0">
+                <a:solidFill>
+                  <a:srgbClr val="FE4447"/>
+                </a:solidFill>
+                <a:latin typeface="Georgia" pitchFamily="34" charset="0"/>
+                <a:ea typeface="Georgia" pitchFamily="34" charset="-122"/>
+                <a:cs typeface="Georgia" pitchFamily="34" charset="-120"/>
+              </a:rPr>
+              <a:t>Wrap-up (5 min)</a:t>
+            </a:r>
+            <a:endParaRPr lang="en-US" sz="1800" dirty="0"/>
+          </a:p>
+        </p:txBody>
+      </p:sp>
+      <p:sp>
+        <p:nvSpPr>
+          <p:cNvPr id="4" name="Text 2"/>
+          <p:cNvSpPr/>
+          <p:nvPr/>
+        </p:nvSpPr>
+        <p:spPr>
+          <a:xfrm>
+            <a:off x="634901" y="883593"/>
+            <a:ext cx="8102798" cy="769441"/>
+          </a:xfrm>
+          <a:prstGeom prst="rect">
+            <a:avLst/>
+          </a:prstGeom>
+          <a:noFill/>
+          <a:ln/>
+        </p:spPr>
+        <p:txBody>
+          <a:bodyPr wrap="square" lIns="0" tIns="0" rIns="0" bIns="0" rtlCol="0" anchor="t"/>
+          <a:lstStyle/>
+          <a:p>
+            <a:pPr algn="l" marL="342900" indent="-342900">
+              <a:lnSpc>
+                <a:spcPts val="1620"/>
+              </a:lnSpc>
+              <a:spcAft>
+                <a:spcPts val="300"/>
+              </a:spcAft>
+              <a:buSzPct val="100000"/>
+              <a:buChar char="•"/>
+            </a:pPr>
+            <a:r>
+              <a:rPr lang="en-US" sz="1200" dirty="0">
+                <a:solidFill>
+                  <a:srgbClr val="1C2833"/>
+                </a:solidFill>
+                <a:latin typeface="Arial" pitchFamily="34" charset="0"/>
+                <a:ea typeface="Arial" pitchFamily="34" charset="-122"/>
+                <a:cs typeface="Arial" pitchFamily="34" charset="-120"/>
+              </a:rPr>
+              <a:t>Restate the safety rule chorally — the whole class.</a:t>
+            </a:r>
+            <a:endParaRPr lang="en-US" sz="1200" dirty="0"/>
+          </a:p>
+          <a:p>
+            <a:pPr algn="l" marL="342900" indent="-342900">
+              <a:lnSpc>
+                <a:spcPts val="1620"/>
+              </a:lnSpc>
+              <a:spcAft>
+                <a:spcPts val="300"/>
+              </a:spcAft>
+              <a:buSzPct val="100000"/>
+              <a:buChar char="•"/>
+            </a:pPr>
+            <a:r>
+              <a:rPr lang="en-US" sz="1200" dirty="0">
+                <a:solidFill>
+                  <a:srgbClr val="1C2833"/>
+                </a:solidFill>
+                <a:latin typeface="Arial" pitchFamily="34" charset="0"/>
+                <a:ea typeface="Arial" pitchFamily="34" charset="-122"/>
+                <a:cs typeface="Arial" pitchFamily="34" charset="-120"/>
+              </a:rPr>
+              <a:t>Exit ticket on a slip: write the </a:t>
+            </a:r>
+            <a:pPr algn="l" indent="0" marL="0">
+              <a:lnSpc>
+                <a:spcPts val="1620"/>
+              </a:lnSpc>
+              <a:spcAft>
+                <a:spcPts val="300"/>
+              </a:spcAft>
+              <a:buNone/>
+            </a:pPr>
+            <a:r>
+              <a:rPr lang="en-US" sz="1200" b="1" dirty="0">
+                <a:solidFill>
+                  <a:srgbClr val="1C2833"/>
+                </a:solidFill>
+                <a:latin typeface="Arial" pitchFamily="34" charset="0"/>
+                <a:ea typeface="Arial" pitchFamily="34" charset="-122"/>
+                <a:cs typeface="Arial" pitchFamily="34" charset="-120"/>
+              </a:rPr>
+              <a:t>Sanskrit name and one identifying feature</a:t>
+            </a:r>
+            <a:pPr algn="l" indent="0" marL="0">
+              <a:lnSpc>
+                <a:spcPts val="1620"/>
+              </a:lnSpc>
+              <a:spcAft>
+                <a:spcPts val="300"/>
+              </a:spcAft>
+              <a:buNone/>
+            </a:pPr>
+            <a:r>
+              <a:rPr lang="en-US" sz="1200" dirty="0">
+                <a:solidFill>
+                  <a:srgbClr val="1C2833"/>
+                </a:solidFill>
+                <a:latin typeface="Arial" pitchFamily="34" charset="0"/>
+                <a:ea typeface="Arial" pitchFamily="34" charset="-122"/>
+                <a:cs typeface="Arial" pitchFamily="34" charset="-120"/>
+              </a:rPr>
+              <a:t> for any two herbs you remember.</a:t>
+            </a:r>
+            <a:endParaRPr lang="en-US" sz="1200" dirty="0"/>
+          </a:p>
+          <a:p>
+            <a:pPr algn="l" marL="342900" indent="-342900">
+              <a:lnSpc>
+                <a:spcPts val="1620"/>
+              </a:lnSpc>
+              <a:spcAft>
+                <a:spcPts val="300"/>
+              </a:spcAft>
+              <a:buSzPct val="100000"/>
+              <a:buChar char="•"/>
+            </a:pPr>
+            <a:r>
+              <a:rPr lang="en-US" sz="1200" dirty="0">
+                <a:solidFill>
+                  <a:srgbClr val="1C2833"/>
+                </a:solidFill>
+                <a:latin typeface="Arial" pitchFamily="34" charset="0"/>
+                <a:ea typeface="Arial" pitchFamily="34" charset="-122"/>
+                <a:cs typeface="Arial" pitchFamily="34" charset="-120"/>
+              </a:rPr>
+              <a:t>Homework: tonight, find as many of the six herbs as you can in your kitchen or balcony. List them.</a:t>
+            </a:r>
+            <a:endParaRPr lang="en-US" sz="1200" dirty="0"/>
+          </a:p>
+        </p:txBody>
+      </p:sp>
+      <p:sp>
+        <p:nvSpPr>
+          <p:cNvPr id="5" name="Text 3"/>
+          <p:cNvSpPr/>
+          <p:nvPr/>
+        </p:nvSpPr>
+        <p:spPr>
+          <a:xfrm>
+            <a:off x="406301" y="4434929"/>
+            <a:ext cx="8498026" cy="213271"/>
+          </a:xfrm>
+          <a:prstGeom prst="rect">
+            <a:avLst/>
+          </a:prstGeom>
+          <a:noFill/>
+          <a:ln/>
+        </p:spPr>
+        <p:txBody>
+          <a:bodyPr wrap="square" lIns="0" tIns="0" rIns="0" bIns="0" rtlCol="0" anchor="t"/>
+          <a:lstStyle/>
+          <a:p>
+            <a:pPr algn="l" indent="0" marL="0">
+              <a:lnSpc>
+                <a:spcPts val="1680"/>
+              </a:lnSpc>
+              <a:spcBef>
+                <a:spcPts val="300"/>
+              </a:spcBef>
+              <a:spcAft>
+                <a:spcPts val="300"/>
+              </a:spcAft>
+              <a:buNone/>
+            </a:pPr>
+            <a:r>
+              <a:rPr lang="en-US" sz="1200" dirty="0">
+                <a:solidFill>
+                  <a:srgbClr val="1C2833"/>
+                </a:solidFill>
+                <a:latin typeface="Arial" pitchFamily="34" charset="0"/>
+                <a:ea typeface="Arial" pitchFamily="34" charset="-122"/>
+                <a:cs typeface="Arial" pitchFamily="34" charset="-120"/>
+              </a:rPr>
+              <a:t>Middle ·  · IKS Curriculum</a:t>
+            </a:r>
+            <a:endParaRPr lang="en-US" sz="1200" dirty="0"/>
+          </a:p>
+        </p:txBody>
+      </p:sp>
+    </p:spTree>
+  </p:cSld>
+  <p:clrMapOvr>
+    <a:masterClrMapping/>
+  </p:clrMapOvr>
+</p:sld>
+</file>
+
+<file path=ppt/slides/slide16.xml><?xml version="1.0" encoding="utf-8"?>
+<p:sld xmlns:a="http://schemas.openxmlformats.org/drawingml/2006/main" xmlns:r="http://schemas.openxmlformats.org/officeDocument/2006/relationships" xmlns:p="http://schemas.openxmlformats.org/presentationml/2006/main">
+  <p:cSld name="Slide 16">
+    <p:bg>
+      <p:bgPr>
+        <a:solidFill>
+          <a:srgbClr val="FFFFFF"/>
+        </a:solidFill>
+      </p:bgPr>
+    </p:bg>
+    <p:spTree>
+      <p:nvGrpSpPr>
+        <p:cNvPr id="1" name=""/>
+        <p:cNvGrpSpPr/>
+        <p:nvPr/>
+      </p:nvGrpSpPr>
+      <p:grpSpPr>
+        <a:xfrm>
+          <a:off x="0" y="0"/>
+          <a:ext cx="0" cy="0"/>
+          <a:chOff x="0" y="0"/>
+          <a:chExt cx="0" cy="0"/>
+        </a:xfrm>
+      </p:grpSpPr>
+      <p:sp>
+        <p:nvSpPr>
+          <p:cNvPr id="2" name="Text 0"/>
+          <p:cNvSpPr/>
+          <p:nvPr/>
+        </p:nvSpPr>
+        <p:spPr>
+          <a:xfrm>
+            <a:off x="0" y="0"/>
+            <a:ext cx="9144000" cy="101501"/>
+          </a:xfrm>
+          <a:prstGeom prst="rect">
+            <a:avLst/>
+          </a:prstGeom>
+          <a:solidFill>
+            <a:srgbClr val="277884"/>
+          </a:solidFill>
+          <a:ln/>
+        </p:spPr>
+        <p:txBody>
+          <a:bodyPr wrap="square" rtlCol="0" anchor="ctr"/>
+          <a:lstStyle/>
+          <a:p>
+            <a:pPr indent="0" marL="0">
+              <a:buNone/>
+            </a:pPr>
+            <a:endParaRPr lang="en-US" dirty="0"/>
+          </a:p>
+        </p:txBody>
+      </p:sp>
+      <p:sp>
+        <p:nvSpPr>
+          <p:cNvPr id="3" name="Text 1"/>
+          <p:cNvSpPr/>
+          <p:nvPr/>
+        </p:nvSpPr>
+        <p:spPr>
+          <a:xfrm>
+            <a:off x="406301" y="457051"/>
+            <a:ext cx="8498026" cy="274290"/>
+          </a:xfrm>
+          <a:prstGeom prst="rect">
+            <a:avLst/>
+          </a:prstGeom>
+          <a:noFill/>
+          <a:ln/>
+        </p:spPr>
+        <p:txBody>
+          <a:bodyPr wrap="square" lIns="0" tIns="0" rIns="0" bIns="0" rtlCol="0" anchor="t"/>
+          <a:lstStyle/>
+          <a:p>
+            <a:pPr algn="l" indent="0" marL="0">
+              <a:lnSpc>
+                <a:spcPts val="2160"/>
+              </a:lnSpc>
+              <a:spcBef>
+                <a:spcPts val="600"/>
+              </a:spcBef>
+              <a:spcAft>
+                <a:spcPts val="800"/>
+              </a:spcAft>
+              <a:buNone/>
+            </a:pPr>
+            <a:r>
+              <a:rPr lang="en-US" sz="1800" b="1" dirty="0">
+                <a:solidFill>
+                  <a:srgbClr val="FE4447"/>
+                </a:solidFill>
+                <a:latin typeface="Georgia" pitchFamily="34" charset="0"/>
+                <a:ea typeface="Georgia" pitchFamily="34" charset="-122"/>
+                <a:cs typeface="Georgia" pitchFamily="34" charset="-120"/>
+              </a:rPr>
+              <a:t>Student-facing content</a:t>
+            </a:r>
+            <a:endParaRPr lang="en-US" sz="1800" dirty="0"/>
+          </a:p>
+        </p:txBody>
+      </p:sp>
+      <p:sp>
+        <p:nvSpPr>
+          <p:cNvPr id="4" name="Text 2"/>
+          <p:cNvSpPr/>
+          <p:nvPr/>
+        </p:nvSpPr>
+        <p:spPr>
+          <a:xfrm>
+            <a:off x="406301" y="883593"/>
+            <a:ext cx="8331398" cy="2381250"/>
+          </a:xfrm>
+          <a:prstGeom prst="rect">
+            <a:avLst/>
+          </a:prstGeom>
+          <a:solidFill>
+            <a:srgbClr val="F4F8F9"/>
+          </a:solidFill>
+          <a:ln/>
+        </p:spPr>
+        <p:txBody>
+          <a:bodyPr wrap="square" rtlCol="0" anchor="ctr"/>
+          <a:lstStyle/>
+          <a:p>
+            <a:pPr indent="0" marL="0">
+              <a:buNone/>
+            </a:pPr>
+            <a:endParaRPr lang="en-US" dirty="0"/>
+          </a:p>
+        </p:txBody>
+      </p:sp>
+      <p:sp>
+        <p:nvSpPr>
+          <p:cNvPr id="5" name="Shape 3"/>
+          <p:cNvSpPr/>
+          <p:nvPr/>
+        </p:nvSpPr>
+        <p:spPr>
+          <a:xfrm>
+            <a:off x="434876" y="883593"/>
+            <a:ext cx="0" cy="2381250"/>
+          </a:xfrm>
+          <a:prstGeom prst="line">
+            <a:avLst/>
+          </a:prstGeom>
+          <a:noFill/>
+          <a:ln w="57150">
+            <a:solidFill>
+              <a:srgbClr val="FE4447"/>
+            </a:solidFill>
+            <a:prstDash val="solid"/>
+          </a:ln>
+        </p:spPr>
+      </p:sp>
+      <p:sp>
+        <p:nvSpPr>
+          <p:cNvPr id="6" name="Text 4"/>
+          <p:cNvSpPr/>
+          <p:nvPr/>
+        </p:nvSpPr>
+        <p:spPr>
+          <a:xfrm>
+            <a:off x="692051" y="1074093"/>
+            <a:ext cx="7973389" cy="230981"/>
+          </a:xfrm>
+          <a:prstGeom prst="rect">
+            <a:avLst/>
+          </a:prstGeom>
+          <a:noFill/>
+          <a:ln/>
+        </p:spPr>
+        <p:txBody>
+          <a:bodyPr wrap="square" lIns="0" tIns="0" rIns="0" bIns="0" rtlCol="0" anchor="t"/>
+          <a:lstStyle/>
+          <a:p>
+            <a:pPr algn="l" indent="0" marL="0">
+              <a:lnSpc>
+                <a:spcPts val="1820"/>
+              </a:lnSpc>
+              <a:spcBef>
+                <a:spcPts val="300"/>
+              </a:spcBef>
+              <a:spcAft>
+                <a:spcPts val="300"/>
+              </a:spcAft>
+              <a:buNone/>
+            </a:pPr>
+            <a:r>
+              <a:rPr lang="en-US" sz="1300" dirty="0">
+                <a:solidFill>
+                  <a:srgbClr val="1C2833"/>
+                </a:solidFill>
+                <a:latin typeface="Georgia" pitchFamily="34" charset="0"/>
+                <a:ea typeface="Georgia" pitchFamily="34" charset="-122"/>
+                <a:cs typeface="Georgia" pitchFamily="34" charset="-120"/>
+              </a:rPr>
+              <a:t>An </a:t>
+            </a:r>
+            <a:pPr algn="l" indent="0" marL="0">
+              <a:lnSpc>
+                <a:spcPts val="1820"/>
+              </a:lnSpc>
+              <a:spcBef>
+                <a:spcPts val="300"/>
+              </a:spcBef>
+              <a:spcAft>
+                <a:spcPts val="300"/>
+              </a:spcAft>
+              <a:buNone/>
+            </a:pPr>
+            <a:r>
+              <a:rPr lang="en-US" sz="1300" b="1" i="1" dirty="0">
+                <a:solidFill>
+                  <a:srgbClr val="1C2833"/>
+                </a:solidFill>
+                <a:latin typeface="Georgia" pitchFamily="34" charset="0"/>
+                <a:ea typeface="Georgia" pitchFamily="34" charset="-122"/>
+                <a:cs typeface="Georgia" pitchFamily="34" charset="-120"/>
+              </a:rPr>
+              <a:t>auṣadhi</a:t>
+            </a:r>
+            <a:pPr algn="l" indent="0" marL="0">
+              <a:lnSpc>
+                <a:spcPts val="1820"/>
+              </a:lnSpc>
+              <a:spcBef>
+                <a:spcPts val="300"/>
+              </a:spcBef>
+              <a:spcAft>
+                <a:spcPts val="300"/>
+              </a:spcAft>
+              <a:buNone/>
+            </a:pPr>
+            <a:r>
+              <a:rPr lang="en-US" sz="1300" dirty="0">
+                <a:solidFill>
+                  <a:srgbClr val="1C2833"/>
+                </a:solidFill>
+                <a:latin typeface="Georgia" pitchFamily="34" charset="0"/>
+                <a:ea typeface="Georgia" pitchFamily="34" charset="-122"/>
+                <a:cs typeface="Georgia" pitchFamily="34" charset="-120"/>
+              </a:rPr>
+              <a:t> is a plant used for healing.</a:t>
+            </a:r>
+            <a:endParaRPr lang="en-US" sz="1300" dirty="0"/>
+          </a:p>
+        </p:txBody>
+      </p:sp>
+      <p:sp>
+        <p:nvSpPr>
+          <p:cNvPr id="7" name="Text 5"/>
+          <p:cNvSpPr/>
+          <p:nvPr/>
+        </p:nvSpPr>
+        <p:spPr>
+          <a:xfrm>
+            <a:off x="692051" y="1343174"/>
+            <a:ext cx="7973389" cy="230981"/>
+          </a:xfrm>
+          <a:prstGeom prst="rect">
+            <a:avLst/>
+          </a:prstGeom>
+          <a:noFill/>
+          <a:ln/>
+        </p:spPr>
+        <p:txBody>
+          <a:bodyPr wrap="square" lIns="0" tIns="0" rIns="0" bIns="0" rtlCol="0" anchor="t"/>
+          <a:lstStyle/>
+          <a:p>
+            <a:pPr algn="l" indent="0" marL="0">
+              <a:lnSpc>
+                <a:spcPts val="1820"/>
+              </a:lnSpc>
+              <a:spcBef>
+                <a:spcPts val="300"/>
+              </a:spcBef>
+              <a:spcAft>
+                <a:spcPts val="300"/>
+              </a:spcAft>
+              <a:buNone/>
+            </a:pPr>
+            <a:r>
+              <a:rPr lang="en-US" sz="1300" i="1" dirty="0">
+                <a:solidFill>
+                  <a:srgbClr val="1C2833"/>
+                </a:solidFill>
+                <a:latin typeface="Georgia" pitchFamily="34" charset="0"/>
+                <a:ea typeface="Georgia" pitchFamily="34" charset="-122"/>
+                <a:cs typeface="Georgia" pitchFamily="34" charset="-120"/>
+              </a:rPr>
+              <a:t>We're going to study six of them — every one is already in most Indian kitchens or gardens:</a:t>
+            </a:r>
+            <a:endParaRPr lang="en-US" sz="1300" dirty="0"/>
+          </a:p>
+        </p:txBody>
+      </p:sp>
+      <p:sp>
+        <p:nvSpPr>
+          <p:cNvPr id="8" name="Text 6"/>
+          <p:cNvSpPr/>
+          <p:nvPr/>
+        </p:nvSpPr>
+        <p:spPr>
+          <a:xfrm>
+            <a:off x="692051" y="1612255"/>
+            <a:ext cx="7973389" cy="230981"/>
+          </a:xfrm>
+          <a:prstGeom prst="rect">
+            <a:avLst/>
+          </a:prstGeom>
+          <a:noFill/>
+          <a:ln/>
+        </p:spPr>
+        <p:txBody>
+          <a:bodyPr wrap="square" lIns="0" tIns="0" rIns="0" bIns="0" rtlCol="0" anchor="t"/>
+          <a:lstStyle/>
+          <a:p>
+            <a:pPr algn="l" indent="0" marL="0">
+              <a:lnSpc>
+                <a:spcPts val="1820"/>
+              </a:lnSpc>
+              <a:spcBef>
+                <a:spcPts val="300"/>
+              </a:spcBef>
+              <a:spcAft>
+                <a:spcPts val="300"/>
+              </a:spcAft>
+              <a:buNone/>
+            </a:pPr>
+            <a:r>
+              <a:rPr lang="en-US" sz="1300" i="1" dirty="0">
+                <a:solidFill>
+                  <a:srgbClr val="1C2833"/>
+                </a:solidFill>
+                <a:latin typeface="Georgia" pitchFamily="34" charset="0"/>
+                <a:ea typeface="Georgia" pitchFamily="34" charset="-122"/>
+                <a:cs typeface="Georgia" pitchFamily="34" charset="-120"/>
+              </a:rPr>
+              <a:t>tulasī</a:t>
+            </a:r>
+            <a:pPr algn="l" indent="0" marL="0">
+              <a:lnSpc>
+                <a:spcPts val="1820"/>
+              </a:lnSpc>
+              <a:spcBef>
+                <a:spcPts val="300"/>
+              </a:spcBef>
+              <a:spcAft>
+                <a:spcPts val="300"/>
+              </a:spcAft>
+              <a:buNone/>
+            </a:pPr>
+            <a:r>
+              <a:rPr lang="en-US" sz="1300" dirty="0">
+                <a:solidFill>
+                  <a:srgbClr val="1C2833"/>
+                </a:solidFill>
+                <a:latin typeface="Georgia" pitchFamily="34" charset="0"/>
+                <a:ea typeface="Georgia" pitchFamily="34" charset="-122"/>
+                <a:cs typeface="Georgia" pitchFamily="34" charset="-120"/>
+              </a:rPr>
+              <a:t>, </a:t>
+            </a:r>
+            <a:pPr algn="l" indent="0" marL="0">
+              <a:lnSpc>
+                <a:spcPts val="1820"/>
+              </a:lnSpc>
+              <a:spcBef>
+                <a:spcPts val="300"/>
+              </a:spcBef>
+              <a:spcAft>
+                <a:spcPts val="300"/>
+              </a:spcAft>
+              <a:buNone/>
+            </a:pPr>
+            <a:r>
+              <a:rPr lang="en-US" sz="1300" i="1" dirty="0">
+                <a:solidFill>
+                  <a:srgbClr val="1C2833"/>
+                </a:solidFill>
+                <a:latin typeface="Georgia" pitchFamily="34" charset="0"/>
+                <a:ea typeface="Georgia" pitchFamily="34" charset="-122"/>
+                <a:cs typeface="Georgia" pitchFamily="34" charset="-120"/>
+              </a:rPr>
+              <a:t>nimba</a:t>
+            </a:r>
+            <a:pPr algn="l" indent="0" marL="0">
+              <a:lnSpc>
+                <a:spcPts val="1820"/>
+              </a:lnSpc>
+              <a:spcBef>
+                <a:spcPts val="300"/>
+              </a:spcBef>
+              <a:spcAft>
+                <a:spcPts val="300"/>
+              </a:spcAft>
+              <a:buNone/>
+            </a:pPr>
+            <a:r>
+              <a:rPr lang="en-US" sz="1300" dirty="0">
+                <a:solidFill>
+                  <a:srgbClr val="1C2833"/>
+                </a:solidFill>
+                <a:latin typeface="Georgia" pitchFamily="34" charset="0"/>
+                <a:ea typeface="Georgia" pitchFamily="34" charset="-122"/>
+                <a:cs typeface="Georgia" pitchFamily="34" charset="-120"/>
+              </a:rPr>
+              <a:t>, </a:t>
+            </a:r>
+            <a:pPr algn="l" indent="0" marL="0">
+              <a:lnSpc>
+                <a:spcPts val="1820"/>
+              </a:lnSpc>
+              <a:spcBef>
+                <a:spcPts val="300"/>
+              </a:spcBef>
+              <a:spcAft>
+                <a:spcPts val="300"/>
+              </a:spcAft>
+              <a:buNone/>
+            </a:pPr>
+            <a:r>
+              <a:rPr lang="en-US" sz="1300" i="1" dirty="0">
+                <a:solidFill>
+                  <a:srgbClr val="1C2833"/>
+                </a:solidFill>
+                <a:latin typeface="Georgia" pitchFamily="34" charset="0"/>
+                <a:ea typeface="Georgia" pitchFamily="34" charset="-122"/>
+                <a:cs typeface="Georgia" pitchFamily="34" charset="-120"/>
+              </a:rPr>
+              <a:t>haridrā</a:t>
+            </a:r>
+            <a:pPr algn="l" indent="0" marL="0">
+              <a:lnSpc>
+                <a:spcPts val="1820"/>
+              </a:lnSpc>
+              <a:spcBef>
+                <a:spcPts val="300"/>
+              </a:spcBef>
+              <a:spcAft>
+                <a:spcPts val="300"/>
+              </a:spcAft>
+              <a:buNone/>
+            </a:pPr>
+            <a:r>
+              <a:rPr lang="en-US" sz="1300" dirty="0">
+                <a:solidFill>
+                  <a:srgbClr val="1C2833"/>
+                </a:solidFill>
+                <a:latin typeface="Georgia" pitchFamily="34" charset="0"/>
+                <a:ea typeface="Georgia" pitchFamily="34" charset="-122"/>
+                <a:cs typeface="Georgia" pitchFamily="34" charset="-120"/>
+              </a:rPr>
+              <a:t>, </a:t>
+            </a:r>
+            <a:pPr algn="l" indent="0" marL="0">
+              <a:lnSpc>
+                <a:spcPts val="1820"/>
+              </a:lnSpc>
+              <a:spcBef>
+                <a:spcPts val="300"/>
+              </a:spcBef>
+              <a:spcAft>
+                <a:spcPts val="300"/>
+              </a:spcAft>
+              <a:buNone/>
+            </a:pPr>
+            <a:r>
+              <a:rPr lang="en-US" sz="1300" i="1" dirty="0">
+                <a:solidFill>
+                  <a:srgbClr val="1C2833"/>
+                </a:solidFill>
+                <a:latin typeface="Georgia" pitchFamily="34" charset="0"/>
+                <a:ea typeface="Georgia" pitchFamily="34" charset="-122"/>
+                <a:cs typeface="Georgia" pitchFamily="34" charset="-120"/>
+              </a:rPr>
+              <a:t>adraka</a:t>
+            </a:r>
+            <a:pPr algn="l" indent="0" marL="0">
+              <a:lnSpc>
+                <a:spcPts val="1820"/>
+              </a:lnSpc>
+              <a:spcBef>
+                <a:spcPts val="300"/>
+              </a:spcBef>
+              <a:spcAft>
+                <a:spcPts val="300"/>
+              </a:spcAft>
+              <a:buNone/>
+            </a:pPr>
+            <a:r>
+              <a:rPr lang="en-US" sz="1300" dirty="0">
+                <a:solidFill>
+                  <a:srgbClr val="1C2833"/>
+                </a:solidFill>
+                <a:latin typeface="Georgia" pitchFamily="34" charset="0"/>
+                <a:ea typeface="Georgia" pitchFamily="34" charset="-122"/>
+                <a:cs typeface="Georgia" pitchFamily="34" charset="-120"/>
+              </a:rPr>
+              <a:t>, </a:t>
+            </a:r>
+            <a:pPr algn="l" indent="0" marL="0">
+              <a:lnSpc>
+                <a:spcPts val="1820"/>
+              </a:lnSpc>
+              <a:spcBef>
+                <a:spcPts val="300"/>
+              </a:spcBef>
+              <a:spcAft>
+                <a:spcPts val="300"/>
+              </a:spcAft>
+              <a:buNone/>
+            </a:pPr>
+            <a:r>
+              <a:rPr lang="en-US" sz="1300" i="1" dirty="0">
+                <a:solidFill>
+                  <a:srgbClr val="1C2833"/>
+                </a:solidFill>
+                <a:latin typeface="Georgia" pitchFamily="34" charset="0"/>
+                <a:ea typeface="Georgia" pitchFamily="34" charset="-122"/>
+                <a:cs typeface="Georgia" pitchFamily="34" charset="-120"/>
+              </a:rPr>
+              <a:t>yavānī</a:t>
+            </a:r>
+            <a:pPr algn="l" indent="0" marL="0">
+              <a:lnSpc>
+                <a:spcPts val="1820"/>
+              </a:lnSpc>
+              <a:spcBef>
+                <a:spcPts val="300"/>
+              </a:spcBef>
+              <a:spcAft>
+                <a:spcPts val="300"/>
+              </a:spcAft>
+              <a:buNone/>
+            </a:pPr>
+            <a:r>
+              <a:rPr lang="en-US" sz="1300" dirty="0">
+                <a:solidFill>
+                  <a:srgbClr val="1C2833"/>
+                </a:solidFill>
+                <a:latin typeface="Georgia" pitchFamily="34" charset="0"/>
+                <a:ea typeface="Georgia" pitchFamily="34" charset="-122"/>
+                <a:cs typeface="Georgia" pitchFamily="34" charset="-120"/>
+              </a:rPr>
+              <a:t>, </a:t>
+            </a:r>
+            <a:pPr algn="l" indent="0" marL="0">
+              <a:lnSpc>
+                <a:spcPts val="1820"/>
+              </a:lnSpc>
+              <a:spcBef>
+                <a:spcPts val="300"/>
+              </a:spcBef>
+              <a:spcAft>
+                <a:spcPts val="300"/>
+              </a:spcAft>
+              <a:buNone/>
+            </a:pPr>
+            <a:r>
+              <a:rPr lang="en-US" sz="1300" i="1" dirty="0">
+                <a:solidFill>
+                  <a:srgbClr val="1C2833"/>
+                </a:solidFill>
+                <a:latin typeface="Georgia" pitchFamily="34" charset="0"/>
+                <a:ea typeface="Georgia" pitchFamily="34" charset="-122"/>
+                <a:cs typeface="Georgia" pitchFamily="34" charset="-120"/>
+              </a:rPr>
+              <a:t>pudīnā</a:t>
+            </a:r>
+            <a:pPr algn="l" indent="0" marL="0">
+              <a:lnSpc>
+                <a:spcPts val="1820"/>
+              </a:lnSpc>
+              <a:spcBef>
+                <a:spcPts val="300"/>
+              </a:spcBef>
+              <a:spcAft>
+                <a:spcPts val="300"/>
+              </a:spcAft>
+              <a:buNone/>
+            </a:pPr>
+            <a:r>
+              <a:rPr lang="en-US" sz="1300" dirty="0">
+                <a:solidFill>
+                  <a:srgbClr val="1C2833"/>
+                </a:solidFill>
+                <a:latin typeface="Georgia" pitchFamily="34" charset="0"/>
+                <a:ea typeface="Georgia" pitchFamily="34" charset="-122"/>
+                <a:cs typeface="Georgia" pitchFamily="34" charset="-120"/>
+              </a:rPr>
+              <a:t>.</a:t>
+            </a:r>
+            <a:endParaRPr lang="en-US" sz="1300" dirty="0"/>
+          </a:p>
+        </p:txBody>
+      </p:sp>
+      <p:sp>
+        <p:nvSpPr>
+          <p:cNvPr id="9" name="Text 7"/>
+          <p:cNvSpPr/>
+          <p:nvPr/>
+        </p:nvSpPr>
+        <p:spPr>
+          <a:xfrm>
+            <a:off x="692051" y="1881336"/>
+            <a:ext cx="7973389" cy="461963"/>
+          </a:xfrm>
+          <a:prstGeom prst="rect">
+            <a:avLst/>
+          </a:prstGeom>
+          <a:noFill/>
+          <a:ln/>
+        </p:spPr>
+        <p:txBody>
+          <a:bodyPr wrap="square" lIns="0" tIns="0" rIns="0" bIns="0" rtlCol="0" anchor="t"/>
+          <a:lstStyle/>
+          <a:p>
+            <a:pPr algn="l" indent="0" marL="0">
+              <a:lnSpc>
+                <a:spcPts val="1820"/>
+              </a:lnSpc>
+              <a:spcBef>
+                <a:spcPts val="300"/>
+              </a:spcBef>
+              <a:spcAft>
+                <a:spcPts val="300"/>
+              </a:spcAft>
+              <a:buNone/>
+            </a:pPr>
+            <a:r>
+              <a:rPr lang="en-US" sz="1300" b="1" i="1" dirty="0">
+                <a:solidFill>
+                  <a:srgbClr val="1C2833"/>
+                </a:solidFill>
+                <a:latin typeface="Georgia" pitchFamily="34" charset="0"/>
+                <a:ea typeface="Georgia" pitchFamily="34" charset="-122"/>
+                <a:cs typeface="Georgia" pitchFamily="34" charset="-120"/>
+              </a:rPr>
+              <a:t>The rule:</a:t>
+            </a:r>
+            <a:pPr algn="l" indent="0" marL="0">
+              <a:lnSpc>
+                <a:spcPts val="1820"/>
+              </a:lnSpc>
+              <a:spcBef>
+                <a:spcPts val="300"/>
+              </a:spcBef>
+              <a:spcAft>
+                <a:spcPts val="300"/>
+              </a:spcAft>
+              <a:buNone/>
+            </a:pPr>
+            <a:r>
+              <a:rPr lang="en-US" sz="1300" dirty="0">
+                <a:solidFill>
+                  <a:srgbClr val="1C2833"/>
+                </a:solidFill>
+                <a:latin typeface="Georgia" pitchFamily="34" charset="0"/>
+                <a:ea typeface="Georgia" pitchFamily="34" charset="-122"/>
+                <a:cs typeface="Georgia" pitchFamily="34" charset="-120"/>
+              </a:rPr>
+              <a:t> food amounts are safe. Therapeutic doses (capsules, powders, oils) are for trained practitioners, not for us.</a:t>
+            </a:r>
+            <a:endParaRPr lang="en-US" sz="1300" dirty="0"/>
+          </a:p>
+        </p:txBody>
+      </p:sp>
+      <p:sp>
+        <p:nvSpPr>
+          <p:cNvPr id="10" name="Text 8"/>
+          <p:cNvSpPr/>
+          <p:nvPr/>
+        </p:nvSpPr>
+        <p:spPr>
+          <a:xfrm>
+            <a:off x="692051" y="2381399"/>
+            <a:ext cx="7973389" cy="692944"/>
+          </a:xfrm>
+          <a:prstGeom prst="rect">
+            <a:avLst/>
+          </a:prstGeom>
+          <a:noFill/>
+          <a:ln/>
+        </p:spPr>
+        <p:txBody>
+          <a:bodyPr wrap="square" lIns="0" tIns="0" rIns="0" bIns="0" rtlCol="0" anchor="t"/>
+          <a:lstStyle/>
+          <a:p>
+            <a:pPr algn="l" indent="0" marL="0">
+              <a:lnSpc>
+                <a:spcPts val="1820"/>
+              </a:lnSpc>
+              <a:spcBef>
+                <a:spcPts val="300"/>
+              </a:spcBef>
+              <a:spcAft>
+                <a:spcPts val="300"/>
+              </a:spcAft>
+              <a:buNone/>
+            </a:pPr>
+            <a:r>
+              <a:rPr lang="en-US" sz="1300" dirty="0">
+                <a:solidFill>
+                  <a:srgbClr val="1C2833"/>
+                </a:solidFill>
+                <a:latin typeface="Georgia" pitchFamily="34" charset="0"/>
+                <a:ea typeface="Georgia" pitchFamily="34" charset="-122"/>
+                <a:cs typeface="Georgia" pitchFamily="34" charset="-120"/>
+              </a:rPr>
+              <a:t>The early Indian tradition addressed these plants directly in a hymn called the </a:t>
+            </a:r>
+            <a:pPr algn="l" indent="0" marL="0">
+              <a:lnSpc>
+                <a:spcPts val="1820"/>
+              </a:lnSpc>
+              <a:spcBef>
+                <a:spcPts val="300"/>
+              </a:spcBef>
+              <a:spcAft>
+                <a:spcPts val="300"/>
+              </a:spcAft>
+              <a:buNone/>
+            </a:pPr>
+            <a:r>
+              <a:rPr lang="en-US" sz="1300" i="1" dirty="0">
+                <a:solidFill>
+                  <a:srgbClr val="1C2833"/>
+                </a:solidFill>
+                <a:latin typeface="Georgia" pitchFamily="34" charset="0"/>
+                <a:ea typeface="Georgia" pitchFamily="34" charset="-122"/>
+                <a:cs typeface="Georgia" pitchFamily="34" charset="-120"/>
+              </a:rPr>
+              <a:t>Auṣadhi-sūkta</a:t>
+            </a:r>
+            <a:pPr algn="l" indent="0" marL="0">
+              <a:lnSpc>
+                <a:spcPts val="1820"/>
+              </a:lnSpc>
+              <a:spcBef>
+                <a:spcPts val="300"/>
+              </a:spcBef>
+              <a:spcAft>
+                <a:spcPts val="300"/>
+              </a:spcAft>
+              <a:buNone/>
+            </a:pPr>
+            <a:r>
+              <a:rPr lang="en-US" sz="1300" dirty="0">
+                <a:solidFill>
+                  <a:srgbClr val="1C2833"/>
+                </a:solidFill>
+                <a:latin typeface="Georgia" pitchFamily="34" charset="0"/>
+                <a:ea typeface="Georgia" pitchFamily="34" charset="-122"/>
+                <a:cs typeface="Georgia" pitchFamily="34" charset="-120"/>
+              </a:rPr>
+              <a:t> (Ṛgveda 10.97). Later, the </a:t>
+            </a:r>
+            <a:pPr algn="l" indent="0" marL="0">
+              <a:lnSpc>
+                <a:spcPts val="1820"/>
+              </a:lnSpc>
+              <a:spcBef>
+                <a:spcPts val="300"/>
+              </a:spcBef>
+              <a:spcAft>
+                <a:spcPts val="300"/>
+              </a:spcAft>
+              <a:buNone/>
+            </a:pPr>
+            <a:r>
+              <a:rPr lang="en-US" sz="1300" i="1" dirty="0">
+                <a:solidFill>
+                  <a:srgbClr val="1C2833"/>
+                </a:solidFill>
+                <a:latin typeface="Georgia" pitchFamily="34" charset="0"/>
+                <a:ea typeface="Georgia" pitchFamily="34" charset="-122"/>
+                <a:cs typeface="Georgia" pitchFamily="34" charset="-120"/>
+              </a:rPr>
+              <a:t>Caraka Saṁhitā</a:t>
+            </a:r>
+            <a:pPr algn="l" indent="0" marL="0">
+              <a:lnSpc>
+                <a:spcPts val="1820"/>
+              </a:lnSpc>
+              <a:spcBef>
+                <a:spcPts val="300"/>
+              </a:spcBef>
+              <a:spcAft>
+                <a:spcPts val="300"/>
+              </a:spcAft>
+              <a:buNone/>
+            </a:pPr>
+            <a:r>
+              <a:rPr lang="en-US" sz="1300" dirty="0">
+                <a:solidFill>
+                  <a:srgbClr val="1C2833"/>
+                </a:solidFill>
+                <a:latin typeface="Georgia" pitchFamily="34" charset="0"/>
+                <a:ea typeface="Georgia" pitchFamily="34" charset="-122"/>
+                <a:cs typeface="Georgia" pitchFamily="34" charset="-120"/>
+              </a:rPr>
+              <a:t> (one of the foundational Ayurvedic texts) sorted them by their tastes, qualities, and heating/cooling effect. We'll meet both these ideas over the next two weeks.</a:t>
+            </a:r>
+            <a:endParaRPr lang="en-US" sz="1300" dirty="0"/>
+          </a:p>
+        </p:txBody>
+      </p:sp>
+      <p:sp>
+        <p:nvSpPr>
+          <p:cNvPr id="11" name="Text 9"/>
+          <p:cNvSpPr/>
+          <p:nvPr/>
+        </p:nvSpPr>
+        <p:spPr>
+          <a:xfrm>
+            <a:off x="406301" y="4434929"/>
+            <a:ext cx="8498026" cy="213271"/>
+          </a:xfrm>
+          <a:prstGeom prst="rect">
+            <a:avLst/>
+          </a:prstGeom>
+          <a:noFill/>
+          <a:ln/>
+        </p:spPr>
+        <p:txBody>
+          <a:bodyPr wrap="square" lIns="0" tIns="0" rIns="0" bIns="0" rtlCol="0" anchor="t"/>
+          <a:lstStyle/>
+          <a:p>
+            <a:pPr algn="l" indent="0" marL="0">
+              <a:lnSpc>
+                <a:spcPts val="1680"/>
+              </a:lnSpc>
+              <a:spcBef>
+                <a:spcPts val="300"/>
+              </a:spcBef>
+              <a:spcAft>
+                <a:spcPts val="300"/>
+              </a:spcAft>
+              <a:buNone/>
+            </a:pPr>
+            <a:r>
+              <a:rPr lang="en-US" sz="1200" dirty="0">
+                <a:solidFill>
+                  <a:srgbClr val="1C2833"/>
+                </a:solidFill>
+                <a:latin typeface="Arial" pitchFamily="34" charset="0"/>
+                <a:ea typeface="Arial" pitchFamily="34" charset="-122"/>
+                <a:cs typeface="Arial" pitchFamily="34" charset="-120"/>
+              </a:rPr>
+              <a:t>Middle ·  · IKS Curriculum</a:t>
+            </a:r>
+            <a:endParaRPr lang="en-US" sz="1200" dirty="0"/>
+          </a:p>
+        </p:txBody>
+      </p:sp>
+    </p:spTree>
+  </p:cSld>
+  <p:clrMapOvr>
+    <a:masterClrMapping/>
+  </p:clrMapOvr>
+</p:sld>
+</file>
+
+<file path=ppt/slides/slide17.xml><?xml version="1.0" encoding="utf-8"?>
+<p:sld xmlns:a="http://schemas.openxmlformats.org/drawingml/2006/main" xmlns:r="http://schemas.openxmlformats.org/officeDocument/2006/relationships" xmlns:p="http://schemas.openxmlformats.org/presentationml/2006/main">
+  <p:cSld name="Slide 17">
+    <p:bg>
+      <p:bgPr>
+        <a:solidFill>
+          <a:srgbClr val="FFFFFF"/>
+        </a:solidFill>
+      </p:bgPr>
+    </p:bg>
+    <p:spTree>
+      <p:nvGrpSpPr>
+        <p:cNvPr id="1" name=""/>
+        <p:cNvGrpSpPr/>
+        <p:nvPr/>
+      </p:nvGrpSpPr>
+      <p:grpSpPr>
+        <a:xfrm>
+          <a:off x="0" y="0"/>
+          <a:ext cx="0" cy="0"/>
+          <a:chOff x="0" y="0"/>
+          <a:chExt cx="0" cy="0"/>
+        </a:xfrm>
+      </p:grpSpPr>
+      <p:sp>
+        <p:nvSpPr>
+          <p:cNvPr id="2" name="Text 0"/>
+          <p:cNvSpPr/>
+          <p:nvPr/>
+        </p:nvSpPr>
+        <p:spPr>
+          <a:xfrm>
+            <a:off x="0" y="0"/>
+            <a:ext cx="9144000" cy="101501"/>
+          </a:xfrm>
+          <a:prstGeom prst="rect">
+            <a:avLst/>
+          </a:prstGeom>
+          <a:solidFill>
+            <a:srgbClr val="277884"/>
+          </a:solidFill>
+          <a:ln/>
+        </p:spPr>
+        <p:txBody>
+          <a:bodyPr wrap="square" rtlCol="0" anchor="ctr"/>
+          <a:lstStyle/>
+          <a:p>
+            <a:pPr indent="0" marL="0">
+              <a:buNone/>
+            </a:pPr>
+            <a:endParaRPr lang="en-US" dirty="0"/>
+          </a:p>
+        </p:txBody>
+      </p:sp>
+      <p:sp>
+        <p:nvSpPr>
+          <p:cNvPr id="3" name="Text 1"/>
+          <p:cNvSpPr/>
+          <p:nvPr/>
+        </p:nvSpPr>
+        <p:spPr>
+          <a:xfrm>
+            <a:off x="406301" y="457051"/>
+            <a:ext cx="8498026" cy="274290"/>
+          </a:xfrm>
+          <a:prstGeom prst="rect">
+            <a:avLst/>
+          </a:prstGeom>
+          <a:noFill/>
+          <a:ln/>
+        </p:spPr>
+        <p:txBody>
+          <a:bodyPr wrap="square" lIns="0" tIns="0" rIns="0" bIns="0" rtlCol="0" anchor="t"/>
+          <a:lstStyle/>
+          <a:p>
+            <a:pPr algn="l" indent="0" marL="0">
+              <a:lnSpc>
+                <a:spcPts val="2160"/>
+              </a:lnSpc>
+              <a:spcBef>
+                <a:spcPts val="600"/>
+              </a:spcBef>
+              <a:spcAft>
+                <a:spcPts val="800"/>
+              </a:spcAft>
+              <a:buNone/>
+            </a:pPr>
+            <a:r>
+              <a:rPr lang="en-US" sz="1800" b="1" dirty="0">
+                <a:solidFill>
+                  <a:srgbClr val="FE4447"/>
+                </a:solidFill>
+                <a:latin typeface="Georgia" pitchFamily="34" charset="0"/>
+                <a:ea typeface="Georgia" pitchFamily="34" charset="-122"/>
+                <a:cs typeface="Georgia" pitchFamily="34" charset="-120"/>
+              </a:rPr>
+              <a:t>Homework</a:t>
+            </a:r>
+            <a:endParaRPr lang="en-US" sz="1800" dirty="0"/>
+          </a:p>
+        </p:txBody>
+      </p:sp>
+      <p:sp>
+        <p:nvSpPr>
+          <p:cNvPr id="4" name="Text 2"/>
+          <p:cNvSpPr/>
+          <p:nvPr/>
+        </p:nvSpPr>
+        <p:spPr>
+          <a:xfrm>
+            <a:off x="634901" y="883593"/>
+            <a:ext cx="8102798" cy="487561"/>
+          </a:xfrm>
+          <a:prstGeom prst="rect">
+            <a:avLst/>
+          </a:prstGeom>
+          <a:noFill/>
+          <a:ln/>
+        </p:spPr>
+        <p:txBody>
+          <a:bodyPr wrap="square" lIns="0" tIns="0" rIns="0" bIns="0" rtlCol="0" anchor="t"/>
+          <a:lstStyle/>
+          <a:p>
+            <a:pPr algn="l" marL="342900" indent="-342900">
+              <a:lnSpc>
+                <a:spcPts val="1620"/>
+              </a:lnSpc>
+              <a:spcAft>
+                <a:spcPts val="300"/>
+              </a:spcAft>
+              <a:buSzPct val="100000"/>
+              <a:buChar char="•"/>
+            </a:pPr>
+            <a:r>
+              <a:rPr lang="en-US" sz="1200" dirty="0">
+                <a:solidFill>
+                  <a:srgbClr val="1C2833"/>
+                </a:solidFill>
+                <a:latin typeface="Arial" pitchFamily="34" charset="0"/>
+                <a:ea typeface="Arial" pitchFamily="34" charset="-122"/>
+                <a:cs typeface="Arial" pitchFamily="34" charset="-120"/>
+              </a:rPr>
+              <a:t>List which of the six herbs are in your kitchen tonight. Bonus: bring a leaf or a piece (with a parent's permission) to class tomorrow for the tulsi day.</a:t>
+            </a:r>
+            <a:endParaRPr lang="en-US" sz="1200" dirty="0"/>
+          </a:p>
+        </p:txBody>
+      </p:sp>
+      <p:sp>
+        <p:nvSpPr>
+          <p:cNvPr id="5" name="Text 3"/>
+          <p:cNvSpPr/>
+          <p:nvPr/>
+        </p:nvSpPr>
+        <p:spPr>
+          <a:xfrm>
+            <a:off x="406301" y="4434929"/>
+            <a:ext cx="8498026" cy="213271"/>
+          </a:xfrm>
+          <a:prstGeom prst="rect">
+            <a:avLst/>
+          </a:prstGeom>
+          <a:noFill/>
+          <a:ln/>
+        </p:spPr>
+        <p:txBody>
+          <a:bodyPr wrap="square" lIns="0" tIns="0" rIns="0" bIns="0" rtlCol="0" anchor="t"/>
+          <a:lstStyle/>
+          <a:p>
+            <a:pPr algn="l" indent="0" marL="0">
+              <a:lnSpc>
+                <a:spcPts val="1680"/>
+              </a:lnSpc>
+              <a:spcBef>
+                <a:spcPts val="300"/>
+              </a:spcBef>
+              <a:spcAft>
+                <a:spcPts val="300"/>
+              </a:spcAft>
+              <a:buNone/>
+            </a:pPr>
+            <a:r>
+              <a:rPr lang="en-US" sz="1200" dirty="0">
+                <a:solidFill>
+                  <a:srgbClr val="1C2833"/>
+                </a:solidFill>
+                <a:latin typeface="Arial" pitchFamily="34" charset="0"/>
+                <a:ea typeface="Arial" pitchFamily="34" charset="-122"/>
+                <a:cs typeface="Arial" pitchFamily="34" charset="-120"/>
+              </a:rPr>
+              <a:t>Middle ·  · IKS Curriculum</a:t>
+            </a:r>
+            <a:endParaRPr lang="en-US" sz="1200" dirty="0"/>
+          </a:p>
+        </p:txBody>
+      </p:sp>
+    </p:spTree>
+  </p:cSld>
+  <p:clrMapOvr>
+    <a:masterClrMapping/>
+  </p:clrMapOvr>
+</p:sld>
+</file>
+
+<file path=ppt/slides/slide18.xml><?xml version="1.0" encoding="utf-8"?>
+<p:sld xmlns:a="http://schemas.openxmlformats.org/drawingml/2006/main" xmlns:r="http://schemas.openxmlformats.org/officeDocument/2006/relationships" xmlns:p="http://schemas.openxmlformats.org/presentationml/2006/main">
+  <p:cSld name="Slide 18">
+    <p:bg>
+      <p:bgPr>
+        <a:solidFill>
+          <a:srgbClr val="FFFFFF"/>
+        </a:solidFill>
+      </p:bgPr>
+    </p:bg>
+    <p:spTree>
+      <p:nvGrpSpPr>
+        <p:cNvPr id="1" name=""/>
+        <p:cNvGrpSpPr/>
+        <p:nvPr/>
+      </p:nvGrpSpPr>
+      <p:grpSpPr>
+        <a:xfrm>
+          <a:off x="0" y="0"/>
+          <a:ext cx="0" cy="0"/>
+          <a:chOff x="0" y="0"/>
+          <a:chExt cx="0" cy="0"/>
+        </a:xfrm>
+      </p:grpSpPr>
+      <p:sp>
+        <p:nvSpPr>
+          <p:cNvPr id="2" name="Text 0"/>
+          <p:cNvSpPr/>
+          <p:nvPr/>
+        </p:nvSpPr>
+        <p:spPr>
+          <a:xfrm>
+            <a:off x="0" y="0"/>
+            <a:ext cx="9144000" cy="101501"/>
+          </a:xfrm>
+          <a:prstGeom prst="rect">
+            <a:avLst/>
+          </a:prstGeom>
+          <a:solidFill>
+            <a:srgbClr val="277884"/>
+          </a:solidFill>
+          <a:ln/>
+        </p:spPr>
+        <p:txBody>
+          <a:bodyPr wrap="square" rtlCol="0" anchor="ctr"/>
+          <a:lstStyle/>
+          <a:p>
+            <a:pPr indent="0" marL="0">
+              <a:buNone/>
+            </a:pPr>
+            <a:endParaRPr lang="en-US" dirty="0"/>
+          </a:p>
+        </p:txBody>
+      </p:sp>
+      <p:sp>
+        <p:nvSpPr>
+          <p:cNvPr id="3" name="Text 1"/>
+          <p:cNvSpPr/>
+          <p:nvPr/>
+        </p:nvSpPr>
+        <p:spPr>
+          <a:xfrm>
+            <a:off x="406301" y="457051"/>
+            <a:ext cx="8498026" cy="274290"/>
+          </a:xfrm>
+          <a:prstGeom prst="rect">
+            <a:avLst/>
+          </a:prstGeom>
+          <a:noFill/>
+          <a:ln/>
+        </p:spPr>
+        <p:txBody>
+          <a:bodyPr wrap="square" lIns="0" tIns="0" rIns="0" bIns="0" rtlCol="0" anchor="t"/>
+          <a:lstStyle/>
+          <a:p>
+            <a:pPr algn="l" indent="0" marL="0">
+              <a:lnSpc>
+                <a:spcPts val="2160"/>
+              </a:lnSpc>
+              <a:spcBef>
+                <a:spcPts val="600"/>
+              </a:spcBef>
+              <a:spcAft>
+                <a:spcPts val="800"/>
+              </a:spcAft>
+              <a:buNone/>
+            </a:pPr>
+            <a:r>
+              <a:rPr lang="en-US" sz="1800" b="1" dirty="0">
+                <a:solidFill>
+                  <a:srgbClr val="FE4447"/>
+                </a:solidFill>
+                <a:latin typeface="Georgia" pitchFamily="34" charset="0"/>
+                <a:ea typeface="Georgia" pitchFamily="34" charset="-122"/>
+                <a:cs typeface="Georgia" pitchFamily="34" charset="-120"/>
+              </a:rPr>
+              <a:t>Differentiation</a:t>
+            </a:r>
+            <a:endParaRPr lang="en-US" sz="1800" dirty="0"/>
+          </a:p>
+        </p:txBody>
+      </p:sp>
+      <p:sp>
+        <p:nvSpPr>
+          <p:cNvPr id="4" name="Text 2"/>
+          <p:cNvSpPr/>
+          <p:nvPr/>
+        </p:nvSpPr>
+        <p:spPr>
+          <a:xfrm>
+            <a:off x="634901" y="883593"/>
+            <a:ext cx="8102798" cy="937022"/>
+          </a:xfrm>
+          <a:prstGeom prst="rect">
+            <a:avLst/>
+          </a:prstGeom>
+          <a:noFill/>
+          <a:ln/>
+        </p:spPr>
+        <p:txBody>
+          <a:bodyPr wrap="square" lIns="0" tIns="0" rIns="0" bIns="0" rtlCol="0" anchor="t"/>
+          <a:lstStyle/>
+          <a:p>
+            <a:pPr algn="l" marL="342900" indent="-342900">
+              <a:lnSpc>
+                <a:spcPts val="1620"/>
+              </a:lnSpc>
+              <a:spcAft>
+                <a:spcPts val="300"/>
+              </a:spcAft>
+              <a:buSzPct val="100000"/>
+              <a:buChar char="•"/>
+            </a:pPr>
+            <a:r>
+              <a:rPr lang="en-US" sz="1200" b="1" dirty="0">
+                <a:solidFill>
+                  <a:srgbClr val="1C2833"/>
+                </a:solidFill>
+                <a:latin typeface="Arial" pitchFamily="34" charset="0"/>
+                <a:ea typeface="Arial" pitchFamily="34" charset="-122"/>
+                <a:cs typeface="Arial" pitchFamily="34" charset="-120"/>
+              </a:rPr>
+              <a:t>One tier up:</a:t>
+            </a:r>
+            <a:pPr algn="l" indent="0" marL="0">
+              <a:lnSpc>
+                <a:spcPts val="1620"/>
+              </a:lnSpc>
+              <a:spcAft>
+                <a:spcPts val="300"/>
+              </a:spcAft>
+              <a:buNone/>
+            </a:pPr>
+            <a:r>
+              <a:rPr lang="en-US" sz="1200" dirty="0">
+                <a:solidFill>
+                  <a:srgbClr val="1C2833"/>
+                </a:solidFill>
+                <a:latin typeface="Arial" pitchFamily="34" charset="0"/>
+                <a:ea typeface="Arial" pitchFamily="34" charset="-122"/>
+                <a:cs typeface="Arial" pitchFamily="34" charset="-120"/>
+              </a:rPr>
+              <a:t> Find a </a:t>
+            </a:r>
+            <a:pPr algn="l" indent="0" marL="0">
+              <a:lnSpc>
+                <a:spcPts val="1620"/>
+              </a:lnSpc>
+              <a:spcAft>
+                <a:spcPts val="300"/>
+              </a:spcAft>
+              <a:buNone/>
+            </a:pPr>
+            <a:r>
               <a:rPr lang="en-US" sz="1200" i="1" dirty="0">
                 <a:solidFill>
                   <a:srgbClr val="1C2833"/>
@@ -3248,7 +6506,7 @@
                 <a:ea typeface="Arial" pitchFamily="34" charset="-122"/>
                 <a:cs typeface="Arial" pitchFamily="34" charset="-120"/>
               </a:rPr>
-              <a:t>Caraka Saṁhitā, Sūtrasthāna</a:t>
+              <a:t>seventh</a:t>
             </a:r>
             <a:pPr algn="l" indent="0" marL="0">
               <a:lnSpc>
@@ -3268,7 +6526,423 @@
                 <a:ea typeface="Arial" pitchFamily="34" charset="-122"/>
                 <a:cs typeface="Arial" pitchFamily="34" charset="-120"/>
               </a:rPr>
-              <a:t> 1. Referenced at chapter level. Real foundational Ayurvedic source.</a:t>
+              <a:t> herb in your kitchen we haven't named (cilantro, fennel, fenugreek, curry leaf, etc.). What might its Sanskrit name be? (Hint: look up </a:t>
+            </a:r>
+            <a:pPr algn="l" indent="0" marL="0">
+              <a:lnSpc>
+                <a:spcPts val="1620"/>
+              </a:lnSpc>
+              <a:spcAft>
+                <a:spcPts val="300"/>
+              </a:spcAft>
+              <a:buNone/>
+            </a:pPr>
+            <a:r>
+              <a:rPr lang="en-US" sz="1200" i="1" dirty="0">
+                <a:solidFill>
+                  <a:srgbClr val="1C2833"/>
+                </a:solidFill>
+                <a:latin typeface="Arial" pitchFamily="34" charset="0"/>
+                <a:ea typeface="Arial" pitchFamily="34" charset="-122"/>
+                <a:cs typeface="Arial" pitchFamily="34" charset="-120"/>
+              </a:rPr>
+              <a:t>dhānyaka, methi, kariveppilai</a:t>
+            </a:r>
+            <a:pPr algn="l" indent="0" marL="0">
+              <a:lnSpc>
+                <a:spcPts val="1620"/>
+              </a:lnSpc>
+              <a:spcAft>
+                <a:spcPts val="300"/>
+              </a:spcAft>
+              <a:buNone/>
+            </a:pPr>
+            <a:r>
+              <a:rPr lang="en-US" sz="1200" dirty="0">
+                <a:solidFill>
+                  <a:srgbClr val="1C2833"/>
+                </a:solidFill>
+                <a:latin typeface="Arial" pitchFamily="34" charset="0"/>
+                <a:ea typeface="Arial" pitchFamily="34" charset="-122"/>
+                <a:cs typeface="Arial" pitchFamily="34" charset="-120"/>
+              </a:rPr>
+              <a:t>.)</a:t>
+            </a:r>
+            <a:endParaRPr lang="en-US" sz="1200" dirty="0"/>
+          </a:p>
+          <a:p>
+            <a:pPr algn="l" marL="342900" indent="-342900">
+              <a:lnSpc>
+                <a:spcPts val="1620"/>
+              </a:lnSpc>
+              <a:spcAft>
+                <a:spcPts val="300"/>
+              </a:spcAft>
+              <a:buSzPct val="100000"/>
+              <a:buChar char="•"/>
+            </a:pPr>
+            <a:r>
+              <a:rPr lang="en-US" sz="1200" b="1" dirty="0">
+                <a:solidFill>
+                  <a:srgbClr val="1C2833"/>
+                </a:solidFill>
+                <a:latin typeface="Arial" pitchFamily="34" charset="0"/>
+                <a:ea typeface="Arial" pitchFamily="34" charset="-122"/>
+                <a:cs typeface="Arial" pitchFamily="34" charset="-120"/>
+              </a:rPr>
+              <a:t>One tier down:</a:t>
+            </a:r>
+            <a:pPr algn="l" indent="0" marL="0">
+              <a:lnSpc>
+                <a:spcPts val="1620"/>
+              </a:lnSpc>
+              <a:spcAft>
+                <a:spcPts val="300"/>
+              </a:spcAft>
+              <a:buNone/>
+            </a:pPr>
+            <a:r>
+              <a:rPr lang="en-US" sz="1200" dirty="0">
+                <a:solidFill>
+                  <a:srgbClr val="1C2833"/>
+                </a:solidFill>
+                <a:latin typeface="Arial" pitchFamily="34" charset="0"/>
+                <a:ea typeface="Arial" pitchFamily="34" charset="-122"/>
+                <a:cs typeface="Arial" pitchFamily="34" charset="-120"/>
+              </a:rPr>
+              <a:t> Just remember three herbs by Friday — tulsi, turmeric, ginger. The other three can come over the next week.</a:t>
+            </a:r>
+            <a:endParaRPr lang="en-US" sz="1200" dirty="0"/>
+          </a:p>
+        </p:txBody>
+      </p:sp>
+      <p:sp>
+        <p:nvSpPr>
+          <p:cNvPr id="5" name="Text 3"/>
+          <p:cNvSpPr/>
+          <p:nvPr/>
+        </p:nvSpPr>
+        <p:spPr>
+          <a:xfrm>
+            <a:off x="406301" y="4434929"/>
+            <a:ext cx="8498026" cy="213271"/>
+          </a:xfrm>
+          <a:prstGeom prst="rect">
+            <a:avLst/>
+          </a:prstGeom>
+          <a:noFill/>
+          <a:ln/>
+        </p:spPr>
+        <p:txBody>
+          <a:bodyPr wrap="square" lIns="0" tIns="0" rIns="0" bIns="0" rtlCol="0" anchor="t"/>
+          <a:lstStyle/>
+          <a:p>
+            <a:pPr algn="l" indent="0" marL="0">
+              <a:lnSpc>
+                <a:spcPts val="1680"/>
+              </a:lnSpc>
+              <a:spcBef>
+                <a:spcPts val="300"/>
+              </a:spcBef>
+              <a:spcAft>
+                <a:spcPts val="300"/>
+              </a:spcAft>
+              <a:buNone/>
+            </a:pPr>
+            <a:r>
+              <a:rPr lang="en-US" sz="1200" dirty="0">
+                <a:solidFill>
+                  <a:srgbClr val="1C2833"/>
+                </a:solidFill>
+                <a:latin typeface="Arial" pitchFamily="34" charset="0"/>
+                <a:ea typeface="Arial" pitchFamily="34" charset="-122"/>
+                <a:cs typeface="Arial" pitchFamily="34" charset="-120"/>
+              </a:rPr>
+              <a:t>Middle ·  · IKS Curriculum</a:t>
+            </a:r>
+            <a:endParaRPr lang="en-US" sz="1200" dirty="0"/>
+          </a:p>
+        </p:txBody>
+      </p:sp>
+    </p:spTree>
+  </p:cSld>
+  <p:clrMapOvr>
+    <a:masterClrMapping/>
+  </p:clrMapOvr>
+</p:sld>
+</file>
+
+<file path=ppt/slides/slide19.xml><?xml version="1.0" encoding="utf-8"?>
+<p:sld xmlns:a="http://schemas.openxmlformats.org/drawingml/2006/main" xmlns:r="http://schemas.openxmlformats.org/officeDocument/2006/relationships" xmlns:p="http://schemas.openxmlformats.org/presentationml/2006/main">
+  <p:cSld name="Slide 19">
+    <p:bg>
+      <p:bgPr>
+        <a:solidFill>
+          <a:srgbClr val="FFFFFF"/>
+        </a:solidFill>
+      </p:bgPr>
+    </p:bg>
+    <p:spTree>
+      <p:nvGrpSpPr>
+        <p:cNvPr id="1" name=""/>
+        <p:cNvGrpSpPr/>
+        <p:nvPr/>
+      </p:nvGrpSpPr>
+      <p:grpSpPr>
+        <a:xfrm>
+          <a:off x="0" y="0"/>
+          <a:ext cx="0" cy="0"/>
+          <a:chOff x="0" y="0"/>
+          <a:chExt cx="0" cy="0"/>
+        </a:xfrm>
+      </p:grpSpPr>
+      <p:sp>
+        <p:nvSpPr>
+          <p:cNvPr id="2" name="Text 0"/>
+          <p:cNvSpPr/>
+          <p:nvPr/>
+        </p:nvSpPr>
+        <p:spPr>
+          <a:xfrm>
+            <a:off x="0" y="0"/>
+            <a:ext cx="9144000" cy="101501"/>
+          </a:xfrm>
+          <a:prstGeom prst="rect">
+            <a:avLst/>
+          </a:prstGeom>
+          <a:solidFill>
+            <a:srgbClr val="277884"/>
+          </a:solidFill>
+          <a:ln/>
+        </p:spPr>
+        <p:txBody>
+          <a:bodyPr wrap="square" rtlCol="0" anchor="ctr"/>
+          <a:lstStyle/>
+          <a:p>
+            <a:pPr indent="0" marL="0">
+              <a:buNone/>
+            </a:pPr>
+            <a:endParaRPr lang="en-US" dirty="0"/>
+          </a:p>
+        </p:txBody>
+      </p:sp>
+      <p:sp>
+        <p:nvSpPr>
+          <p:cNvPr id="3" name="Text 1"/>
+          <p:cNvSpPr/>
+          <p:nvPr/>
+        </p:nvSpPr>
+        <p:spPr>
+          <a:xfrm>
+            <a:off x="406301" y="457051"/>
+            <a:ext cx="8498026" cy="274290"/>
+          </a:xfrm>
+          <a:prstGeom prst="rect">
+            <a:avLst/>
+          </a:prstGeom>
+          <a:noFill/>
+          <a:ln/>
+        </p:spPr>
+        <p:txBody>
+          <a:bodyPr wrap="square" lIns="0" tIns="0" rIns="0" bIns="0" rtlCol="0" anchor="t"/>
+          <a:lstStyle/>
+          <a:p>
+            <a:pPr algn="l" indent="0" marL="0">
+              <a:lnSpc>
+                <a:spcPts val="2160"/>
+              </a:lnSpc>
+              <a:spcBef>
+                <a:spcPts val="600"/>
+              </a:spcBef>
+              <a:spcAft>
+                <a:spcPts val="800"/>
+              </a:spcAft>
+              <a:buNone/>
+            </a:pPr>
+            <a:r>
+              <a:rPr lang="en-US" sz="1800" b="1" dirty="0">
+                <a:solidFill>
+                  <a:srgbClr val="FE4447"/>
+                </a:solidFill>
+                <a:latin typeface="Georgia" pitchFamily="34" charset="0"/>
+                <a:ea typeface="Georgia" pitchFamily="34" charset="-122"/>
+                <a:cs typeface="Georgia" pitchFamily="34" charset="-120"/>
+              </a:rPr>
+              <a:t>Teacher notes</a:t>
+            </a:r>
+            <a:endParaRPr lang="en-US" sz="1800" dirty="0"/>
+          </a:p>
+        </p:txBody>
+      </p:sp>
+      <p:sp>
+        <p:nvSpPr>
+          <p:cNvPr id="4" name="Text 2"/>
+          <p:cNvSpPr/>
+          <p:nvPr/>
+        </p:nvSpPr>
+        <p:spPr>
+          <a:xfrm>
+            <a:off x="634901" y="883593"/>
+            <a:ext cx="8102798" cy="975122"/>
+          </a:xfrm>
+          <a:prstGeom prst="rect">
+            <a:avLst/>
+          </a:prstGeom>
+          <a:noFill/>
+          <a:ln/>
+        </p:spPr>
+        <p:txBody>
+          <a:bodyPr wrap="square" lIns="0" tIns="0" rIns="0" bIns="0" rtlCol="0" anchor="t"/>
+          <a:lstStyle/>
+          <a:p>
+            <a:pPr algn="l" marL="342900" indent="-342900">
+              <a:lnSpc>
+                <a:spcPts val="1620"/>
+              </a:lnSpc>
+              <a:spcAft>
+                <a:spcPts val="300"/>
+              </a:spcAft>
+              <a:buSzPct val="100000"/>
+              <a:buChar char="•"/>
+            </a:pPr>
+            <a:r>
+              <a:rPr lang="en-US" sz="1200" dirty="0">
+                <a:solidFill>
+                  <a:srgbClr val="1C2833"/>
+                </a:solidFill>
+                <a:latin typeface="Arial" pitchFamily="34" charset="0"/>
+                <a:ea typeface="Arial" pitchFamily="34" charset="-122"/>
+                <a:cs typeface="Arial" pitchFamily="34" charset="-120"/>
+              </a:rPr>
+              <a:t>Have the safety rule visible on the board for </a:t>
+            </a:r>
+            <a:pPr algn="l" indent="0" marL="0">
+              <a:lnSpc>
+                <a:spcPts val="1620"/>
+              </a:lnSpc>
+              <a:spcAft>
+                <a:spcPts val="300"/>
+              </a:spcAft>
+              <a:buNone/>
+            </a:pPr>
+            <a:r>
+              <a:rPr lang="en-US" sz="1200" b="1" dirty="0">
+                <a:solidFill>
+                  <a:srgbClr val="1C2833"/>
+                </a:solidFill>
+                <a:latin typeface="Arial" pitchFamily="34" charset="0"/>
+                <a:ea typeface="Arial" pitchFamily="34" charset="-122"/>
+                <a:cs typeface="Arial" pitchFamily="34" charset="-120"/>
+              </a:rPr>
+              <a:t>every class</a:t>
+            </a:r>
+            <a:pPr algn="l" indent="0" marL="0">
+              <a:lnSpc>
+                <a:spcPts val="1620"/>
+              </a:lnSpc>
+              <a:spcAft>
+                <a:spcPts val="300"/>
+              </a:spcAft>
+              <a:buNone/>
+            </a:pPr>
+            <a:r>
+              <a:rPr lang="en-US" sz="1200" dirty="0">
+                <a:solidFill>
+                  <a:srgbClr val="1C2833"/>
+                </a:solidFill>
+                <a:latin typeface="Arial" pitchFamily="34" charset="0"/>
+                <a:ea typeface="Arial" pitchFamily="34" charset="-122"/>
+                <a:cs typeface="Arial" pitchFamily="34" charset="-120"/>
+              </a:rPr>
+              <a:t> in this module, not just today.</a:t>
+            </a:r>
+            <a:endParaRPr lang="en-US" sz="1200" dirty="0"/>
+          </a:p>
+          <a:p>
+            <a:pPr algn="l" marL="342900" indent="-342900">
+              <a:lnSpc>
+                <a:spcPts val="1620"/>
+              </a:lnSpc>
+              <a:spcAft>
+                <a:spcPts val="300"/>
+              </a:spcAft>
+              <a:buSzPct val="100000"/>
+              <a:buChar char="•"/>
+            </a:pPr>
+            <a:r>
+              <a:rPr lang="en-US" sz="1200" dirty="0">
+                <a:solidFill>
+                  <a:srgbClr val="1C2833"/>
+                </a:solidFill>
+                <a:latin typeface="Arial" pitchFamily="34" charset="0"/>
+                <a:ea typeface="Arial" pitchFamily="34" charset="-122"/>
+                <a:cs typeface="Arial" pitchFamily="34" charset="-120"/>
+              </a:rPr>
+              <a:t>A few students will laugh at "addressed the herbs as if they were beings." Use this. It's a glimpse of a world where you talked to plants. We don't have to take the metaphysics literally to take the </a:t>
+            </a:r>
+            <a:pPr algn="l" indent="0" marL="0">
+              <a:lnSpc>
+                <a:spcPts val="1620"/>
+              </a:lnSpc>
+              <a:spcAft>
+                <a:spcPts val="300"/>
+              </a:spcAft>
+              <a:buNone/>
+            </a:pPr>
+            <a:r>
+              <a:rPr lang="en-US" sz="1200" i="1" dirty="0">
+                <a:solidFill>
+                  <a:srgbClr val="1C2833"/>
+                </a:solidFill>
+                <a:latin typeface="Arial" pitchFamily="34" charset="0"/>
+                <a:ea typeface="Arial" pitchFamily="34" charset="-122"/>
+                <a:cs typeface="Arial" pitchFamily="34" charset="-120"/>
+              </a:rPr>
+              <a:t>attention</a:t>
+            </a:r>
+            <a:pPr algn="l" indent="0" marL="0">
+              <a:lnSpc>
+                <a:spcPts val="1620"/>
+              </a:lnSpc>
+              <a:spcAft>
+                <a:spcPts val="300"/>
+              </a:spcAft>
+              <a:buNone/>
+            </a:pPr>
+            <a:r>
+              <a:rPr lang="en-US" sz="1200" dirty="0">
+                <a:solidFill>
+                  <a:srgbClr val="1C2833"/>
+                </a:solidFill>
+                <a:latin typeface="Arial" pitchFamily="34" charset="0"/>
+                <a:ea typeface="Arial" pitchFamily="34" charset="-122"/>
+                <a:cs typeface="Arial" pitchFamily="34" charset="-120"/>
+              </a:rPr>
+              <a:t> seriously.</a:t>
+            </a:r>
+            <a:endParaRPr lang="en-US" sz="1200" dirty="0"/>
+          </a:p>
+          <a:p>
+            <a:pPr algn="l" marL="342900" indent="-342900">
+              <a:lnSpc>
+                <a:spcPts val="1620"/>
+              </a:lnSpc>
+              <a:spcAft>
+                <a:spcPts val="300"/>
+              </a:spcAft>
+              <a:buSzPct val="100000"/>
+              <a:buChar char="•"/>
+            </a:pPr>
+            <a:r>
+              <a:rPr lang="en-US" sz="1200" dirty="0">
+                <a:solidFill>
+                  <a:srgbClr val="1C2833"/>
+                </a:solidFill>
+                <a:latin typeface="Arial" pitchFamily="34" charset="0"/>
+                <a:ea typeface="Arial" pitchFamily="34" charset="-122"/>
+                <a:cs typeface="Arial" pitchFamily="34" charset="-120"/>
+              </a:rPr>
+              <a:t>The class word-cloud from the walkaround is your fastest read on who already knows what. Use it to plan Days 2–7.</a:t>
             </a:r>
             <a:endParaRPr lang="en-US" sz="1200" dirty="0"/>
           </a:p>
@@ -3426,7 +7100,7 @@
                 <a:ea typeface="Georgia" pitchFamily="34" charset="-122"/>
                 <a:cs typeface="Georgia" pitchFamily="34" charset="-120"/>
               </a:rPr>
-              <a:t>Materials</a:t>
+              <a:t>Learning objective</a:t>
             </a:r>
             <a:endParaRPr lang="en-US" sz="1800" dirty="0"/>
           </a:p>
@@ -3441,7 +7115,7 @@
         <p:spPr>
           <a:xfrm>
             <a:off x="406301" y="870942"/>
-            <a:ext cx="8498026" cy="639812"/>
+            <a:ext cx="8498026" cy="426541"/>
           </a:xfrm>
           <a:prstGeom prst="rect">
             <a:avLst/>
@@ -3474,7 +7148,407 @@
                 <a:ea typeface="Arial" pitchFamily="34" charset="-122"/>
                 <a:cs typeface="Arial" pitchFamily="34" charset="-120"/>
               </a:rPr>
-              <a:t>– Six labelled samples laid out at the front of the class: tulsi sprig, neem leaf (dried, no chewing), turmeric root or powder, ginger root, ajwain seeds in a small jar, mint sprig – Whiteboard – Six index cards, one per herb, with the Sanskrit + English + botanical name pre-printed</a:t>
+              <a:t>By the end of this lesson, students can define </a:t>
+            </a:r>
+            <a:pPr algn="l" indent="0" marL="0">
+              <a:lnSpc>
+                <a:spcPts val="1680"/>
+              </a:lnSpc>
+              <a:spcBef>
+                <a:spcPts val="300"/>
+              </a:spcBef>
+              <a:spcAft>
+                <a:spcPts val="300"/>
+              </a:spcAft>
+              <a:buNone/>
+            </a:pPr>
+            <a:r>
+              <a:rPr lang="en-US" sz="1200" i="1" dirty="0">
+                <a:solidFill>
+                  <a:srgbClr val="1C2833"/>
+                </a:solidFill>
+                <a:latin typeface="Arial" pitchFamily="34" charset="0"/>
+                <a:ea typeface="Arial" pitchFamily="34" charset="-122"/>
+                <a:cs typeface="Arial" pitchFamily="34" charset="-120"/>
+              </a:rPr>
+              <a:t>auṣadhi</a:t>
+            </a:r>
+            <a:pPr algn="l" indent="0" marL="0">
+              <a:lnSpc>
+                <a:spcPts val="1680"/>
+              </a:lnSpc>
+              <a:spcBef>
+                <a:spcPts val="300"/>
+              </a:spcBef>
+              <a:spcAft>
+                <a:spcPts val="300"/>
+              </a:spcAft>
+              <a:buNone/>
+            </a:pPr>
+            <a:r>
+              <a:rPr lang="en-US" sz="1200" dirty="0">
+                <a:solidFill>
+                  <a:srgbClr val="1C2833"/>
+                </a:solidFill>
+                <a:latin typeface="Arial" pitchFamily="34" charset="0"/>
+                <a:ea typeface="Arial" pitchFamily="34" charset="-122"/>
+                <a:cs typeface="Arial" pitchFamily="34" charset="-120"/>
+              </a:rPr>
+              <a:t>, name at least four of the six herbs the module will cover, and articulate the core safety rule: </a:t>
+            </a:r>
+            <a:pPr algn="l" indent="0" marL="0">
+              <a:lnSpc>
+                <a:spcPts val="1680"/>
+              </a:lnSpc>
+              <a:spcBef>
+                <a:spcPts val="300"/>
+              </a:spcBef>
+              <a:spcAft>
+                <a:spcPts val="300"/>
+              </a:spcAft>
+              <a:buNone/>
+            </a:pPr>
+            <a:r>
+              <a:rPr lang="en-US" sz="1200" b="1" dirty="0">
+                <a:solidFill>
+                  <a:srgbClr val="1C2833"/>
+                </a:solidFill>
+                <a:latin typeface="Arial" pitchFamily="34" charset="0"/>
+                <a:ea typeface="Arial" pitchFamily="34" charset="-122"/>
+                <a:cs typeface="Arial" pitchFamily="34" charset="-120"/>
+              </a:rPr>
+              <a:t>food amounts are safe; therapeutic doses are a clinical question</a:t>
+            </a:r>
+            <a:pPr algn="l" indent="0" marL="0">
+              <a:lnSpc>
+                <a:spcPts val="1680"/>
+              </a:lnSpc>
+              <a:spcBef>
+                <a:spcPts val="300"/>
+              </a:spcBef>
+              <a:spcAft>
+                <a:spcPts val="300"/>
+              </a:spcAft>
+              <a:buNone/>
+            </a:pPr>
+            <a:r>
+              <a:rPr lang="en-US" sz="1200" dirty="0">
+                <a:solidFill>
+                  <a:srgbClr val="1C2833"/>
+                </a:solidFill>
+                <a:latin typeface="Arial" pitchFamily="34" charset="0"/>
+                <a:ea typeface="Arial" pitchFamily="34" charset="-122"/>
+                <a:cs typeface="Arial" pitchFamily="34" charset="-120"/>
+              </a:rPr>
+              <a:t>.</a:t>
+            </a:r>
+            <a:endParaRPr lang="en-US" sz="1200" dirty="0"/>
+          </a:p>
+        </p:txBody>
+      </p:sp>
+      <p:sp>
+        <p:nvSpPr>
+          <p:cNvPr id="5" name="Text 3"/>
+          <p:cNvSpPr/>
+          <p:nvPr/>
+        </p:nvSpPr>
+        <p:spPr>
+          <a:xfrm>
+            <a:off x="406301" y="4434929"/>
+            <a:ext cx="8498026" cy="213271"/>
+          </a:xfrm>
+          <a:prstGeom prst="rect">
+            <a:avLst/>
+          </a:prstGeom>
+          <a:noFill/>
+          <a:ln/>
+        </p:spPr>
+        <p:txBody>
+          <a:bodyPr wrap="square" lIns="0" tIns="0" rIns="0" bIns="0" rtlCol="0" anchor="t"/>
+          <a:lstStyle/>
+          <a:p>
+            <a:pPr algn="l" indent="0" marL="0">
+              <a:lnSpc>
+                <a:spcPts val="1680"/>
+              </a:lnSpc>
+              <a:spcBef>
+                <a:spcPts val="300"/>
+              </a:spcBef>
+              <a:spcAft>
+                <a:spcPts val="300"/>
+              </a:spcAft>
+              <a:buNone/>
+            </a:pPr>
+            <a:r>
+              <a:rPr lang="en-US" sz="1200" dirty="0">
+                <a:solidFill>
+                  <a:srgbClr val="1C2833"/>
+                </a:solidFill>
+                <a:latin typeface="Arial" pitchFamily="34" charset="0"/>
+                <a:ea typeface="Arial" pitchFamily="34" charset="-122"/>
+                <a:cs typeface="Arial" pitchFamily="34" charset="-120"/>
+              </a:rPr>
+              <a:t>Middle ·  · IKS Curriculum</a:t>
+            </a:r>
+            <a:endParaRPr lang="en-US" sz="1200" dirty="0"/>
+          </a:p>
+        </p:txBody>
+      </p:sp>
+    </p:spTree>
+  </p:cSld>
+  <p:clrMapOvr>
+    <a:masterClrMapping/>
+  </p:clrMapOvr>
+</p:sld>
+</file>
+
+<file path=ppt/slides/slide20.xml><?xml version="1.0" encoding="utf-8"?>
+<p:sld xmlns:a="http://schemas.openxmlformats.org/drawingml/2006/main" xmlns:r="http://schemas.openxmlformats.org/officeDocument/2006/relationships" xmlns:p="http://schemas.openxmlformats.org/presentationml/2006/main">
+  <p:cSld name="Slide 20">
+    <p:bg>
+      <p:bgPr>
+        <a:solidFill>
+          <a:srgbClr val="FFFFFF"/>
+        </a:solidFill>
+      </p:bgPr>
+    </p:bg>
+    <p:spTree>
+      <p:nvGrpSpPr>
+        <p:cNvPr id="1" name=""/>
+        <p:cNvGrpSpPr/>
+        <p:nvPr/>
+      </p:nvGrpSpPr>
+      <p:grpSpPr>
+        <a:xfrm>
+          <a:off x="0" y="0"/>
+          <a:ext cx="0" cy="0"/>
+          <a:chOff x="0" y="0"/>
+          <a:chExt cx="0" cy="0"/>
+        </a:xfrm>
+      </p:grpSpPr>
+      <p:sp>
+        <p:nvSpPr>
+          <p:cNvPr id="2" name="Text 0"/>
+          <p:cNvSpPr/>
+          <p:nvPr/>
+        </p:nvSpPr>
+        <p:spPr>
+          <a:xfrm>
+            <a:off x="0" y="0"/>
+            <a:ext cx="9144000" cy="101501"/>
+          </a:xfrm>
+          <a:prstGeom prst="rect">
+            <a:avLst/>
+          </a:prstGeom>
+          <a:solidFill>
+            <a:srgbClr val="277884"/>
+          </a:solidFill>
+          <a:ln/>
+        </p:spPr>
+        <p:txBody>
+          <a:bodyPr wrap="square" rtlCol="0" anchor="ctr"/>
+          <a:lstStyle/>
+          <a:p>
+            <a:pPr indent="0" marL="0">
+              <a:buNone/>
+            </a:pPr>
+            <a:endParaRPr lang="en-US" dirty="0"/>
+          </a:p>
+        </p:txBody>
+      </p:sp>
+      <p:sp>
+        <p:nvSpPr>
+          <p:cNvPr id="3" name="Text 1"/>
+          <p:cNvSpPr/>
+          <p:nvPr/>
+        </p:nvSpPr>
+        <p:spPr>
+          <a:xfrm>
+            <a:off x="406301" y="457051"/>
+            <a:ext cx="8498026" cy="274290"/>
+          </a:xfrm>
+          <a:prstGeom prst="rect">
+            <a:avLst/>
+          </a:prstGeom>
+          <a:noFill/>
+          <a:ln/>
+        </p:spPr>
+        <p:txBody>
+          <a:bodyPr wrap="square" lIns="0" tIns="0" rIns="0" bIns="0" rtlCol="0" anchor="t"/>
+          <a:lstStyle/>
+          <a:p>
+            <a:pPr algn="l" indent="0" marL="0">
+              <a:lnSpc>
+                <a:spcPts val="2160"/>
+              </a:lnSpc>
+              <a:spcBef>
+                <a:spcPts val="600"/>
+              </a:spcBef>
+              <a:spcAft>
+                <a:spcPts val="800"/>
+              </a:spcAft>
+              <a:buNone/>
+            </a:pPr>
+            <a:r>
+              <a:rPr lang="en-US" sz="1800" b="1" dirty="0">
+                <a:solidFill>
+                  <a:srgbClr val="FE4447"/>
+                </a:solidFill>
+                <a:latin typeface="Georgia" pitchFamily="34" charset="0"/>
+                <a:ea typeface="Georgia" pitchFamily="34" charset="-122"/>
+                <a:cs typeface="Georgia" pitchFamily="34" charset="-120"/>
+              </a:rPr>
+              <a:t>Citation(s) used in this lesson</a:t>
+            </a:r>
+            <a:endParaRPr lang="en-US" sz="1800" dirty="0"/>
+          </a:p>
+        </p:txBody>
+      </p:sp>
+      <p:sp>
+        <p:nvSpPr>
+          <p:cNvPr id="4" name="Text 2"/>
+          <p:cNvSpPr/>
+          <p:nvPr/>
+        </p:nvSpPr>
+        <p:spPr>
+          <a:xfrm>
+            <a:off x="634901" y="883593"/>
+            <a:ext cx="8102798" cy="525661"/>
+          </a:xfrm>
+          <a:prstGeom prst="rect">
+            <a:avLst/>
+          </a:prstGeom>
+          <a:noFill/>
+          <a:ln/>
+        </p:spPr>
+        <p:txBody>
+          <a:bodyPr wrap="square" lIns="0" tIns="0" rIns="0" bIns="0" rtlCol="0" anchor="t"/>
+          <a:lstStyle/>
+          <a:p>
+            <a:pPr algn="l" marL="342900" indent="-342900">
+              <a:lnSpc>
+                <a:spcPts val="1620"/>
+              </a:lnSpc>
+              <a:spcAft>
+                <a:spcPts val="300"/>
+              </a:spcAft>
+              <a:buSzPct val="100000"/>
+              <a:buChar char="•"/>
+            </a:pPr>
+            <a:r>
+              <a:rPr lang="en-US" sz="1200" i="1" dirty="0">
+                <a:solidFill>
+                  <a:srgbClr val="1C2833"/>
+                </a:solidFill>
+                <a:latin typeface="Arial" pitchFamily="34" charset="0"/>
+                <a:ea typeface="Arial" pitchFamily="34" charset="-122"/>
+                <a:cs typeface="Arial" pitchFamily="34" charset="-120"/>
+              </a:rPr>
+              <a:t>Ṛgveda 10.97</a:t>
+            </a:r>
+            <a:pPr algn="l" indent="0" marL="0">
+              <a:lnSpc>
+                <a:spcPts val="1620"/>
+              </a:lnSpc>
+              <a:spcAft>
+                <a:spcPts val="300"/>
+              </a:spcAft>
+              <a:buNone/>
+            </a:pPr>
+            <a:r>
+              <a:rPr lang="en-US" sz="1200" dirty="0">
+                <a:solidFill>
+                  <a:srgbClr val="1C2833"/>
+                </a:solidFill>
+                <a:latin typeface="Arial" pitchFamily="34" charset="0"/>
+                <a:ea typeface="Arial" pitchFamily="34" charset="-122"/>
+                <a:cs typeface="Arial" pitchFamily="34" charset="-120"/>
+              </a:rPr>
+              <a:t> — the </a:t>
+            </a:r>
+            <a:pPr algn="l" indent="0" marL="0">
+              <a:lnSpc>
+                <a:spcPts val="1620"/>
+              </a:lnSpc>
+              <a:spcAft>
+                <a:spcPts val="300"/>
+              </a:spcAft>
+              <a:buNone/>
+            </a:pPr>
+            <a:r>
+              <a:rPr lang="en-US" sz="1200" i="1" dirty="0">
+                <a:solidFill>
+                  <a:srgbClr val="1C2833"/>
+                </a:solidFill>
+                <a:latin typeface="Arial" pitchFamily="34" charset="0"/>
+                <a:ea typeface="Arial" pitchFamily="34" charset="-122"/>
+                <a:cs typeface="Arial" pitchFamily="34" charset="-120"/>
+              </a:rPr>
+              <a:t>Auṣadhi-sūkta</a:t>
+            </a:r>
+            <a:pPr algn="l" indent="0" marL="0">
+              <a:lnSpc>
+                <a:spcPts val="1620"/>
+              </a:lnSpc>
+              <a:spcAft>
+                <a:spcPts val="300"/>
+              </a:spcAft>
+              <a:buNone/>
+            </a:pPr>
+            <a:r>
+              <a:rPr lang="en-US" sz="1200" dirty="0">
+                <a:solidFill>
+                  <a:srgbClr val="1C2833"/>
+                </a:solidFill>
+                <a:latin typeface="Arial" pitchFamily="34" charset="0"/>
+                <a:ea typeface="Arial" pitchFamily="34" charset="-122"/>
+                <a:cs typeface="Arial" pitchFamily="34" charset="-120"/>
+              </a:rPr>
+              <a:t>. Referenced by sūkta number. Real public-domain Vedic source.</a:t>
+            </a:r>
+            <a:endParaRPr lang="en-US" sz="1200" dirty="0"/>
+          </a:p>
+          <a:p>
+            <a:pPr algn="l" marL="342900" indent="-342900">
+              <a:lnSpc>
+                <a:spcPts val="1620"/>
+              </a:lnSpc>
+              <a:spcAft>
+                <a:spcPts val="300"/>
+              </a:spcAft>
+              <a:buSzPct val="100000"/>
+              <a:buChar char="•"/>
+            </a:pPr>
+            <a:r>
+              <a:rPr lang="en-US" sz="1200" i="1" dirty="0">
+                <a:solidFill>
+                  <a:srgbClr val="1C2833"/>
+                </a:solidFill>
+                <a:latin typeface="Arial" pitchFamily="34" charset="0"/>
+                <a:ea typeface="Arial" pitchFamily="34" charset="-122"/>
+                <a:cs typeface="Arial" pitchFamily="34" charset="-120"/>
+              </a:rPr>
+              <a:t>Caraka Saṁhitā, Sūtrasthāna</a:t>
+            </a:r>
+            <a:pPr algn="l" indent="0" marL="0">
+              <a:lnSpc>
+                <a:spcPts val="1620"/>
+              </a:lnSpc>
+              <a:spcAft>
+                <a:spcPts val="300"/>
+              </a:spcAft>
+              <a:buNone/>
+            </a:pPr>
+            <a:r>
+              <a:rPr lang="en-US" sz="1200" dirty="0">
+                <a:solidFill>
+                  <a:srgbClr val="1C2833"/>
+                </a:solidFill>
+                <a:latin typeface="Arial" pitchFamily="34" charset="0"/>
+                <a:ea typeface="Arial" pitchFamily="34" charset="-122"/>
+                <a:cs typeface="Arial" pitchFamily="34" charset="-120"/>
+              </a:rPr>
+              <a:t> 1. Referenced at chapter level. Real foundational Ayurvedic source.</a:t>
             </a:r>
             <a:endParaRPr lang="en-US" sz="1200" dirty="0"/>
           </a:p>
@@ -3632,7 +7706,7 @@
                 <a:ea typeface="Georgia" pitchFamily="34" charset="-122"/>
                 <a:cs typeface="Georgia" pitchFamily="34" charset="-120"/>
               </a:rPr>
-              <a:t>Vocabulary introduced today</a:t>
+              <a:t>Materials</a:t>
             </a:r>
             <a:endParaRPr lang="en-US" sz="1800" dirty="0"/>
           </a:p>
@@ -3647,7 +7721,7 @@
         <p:spPr>
           <a:xfrm>
             <a:off x="634901" y="883593"/>
-            <a:ext cx="8102798" cy="731341"/>
+            <a:ext cx="8102798" cy="975122"/>
           </a:xfrm>
           <a:prstGeom prst="rect">
             <a:avLst/>
@@ -3670,26 +7744,6 @@
               <a:buChar char="•"/>
             </a:pPr>
             <a:r>
-              <a:rPr lang="en-US" sz="1200" i="1" dirty="0">
-                <a:solidFill>
-                  <a:srgbClr val="1C2833"/>
-                </a:solidFill>
-                <a:latin typeface="Arial" pitchFamily="34" charset="0"/>
-                <a:ea typeface="Arial" pitchFamily="34" charset="-122"/>
-                <a:cs typeface="Arial" pitchFamily="34" charset="-120"/>
-              </a:rPr>
-              <a:t>auṣadhi</a:t>
-            </a:r>
-            <a:pPr algn="l" indent="0" marL="0">
-              <a:lnSpc>
-                <a:spcPts val="1620"/>
-              </a:lnSpc>
-              <a:spcAft>
-                <a:spcPts val="300"/>
-              </a:spcAft>
-              <a:buNone/>
-            </a:pPr>
-            <a:r>
               <a:rPr lang="en-US" sz="1200" dirty="0">
                 <a:solidFill>
                   <a:srgbClr val="1C2833"/>
@@ -3698,7 +7752,7 @@
                 <a:ea typeface="Arial" pitchFamily="34" charset="-122"/>
                 <a:cs typeface="Arial" pitchFamily="34" charset="-120"/>
               </a:rPr>
-              <a:t> (IAST: auṣadhi; lit. "herb, plant used as medicine") — the general term, in Vedic and Ayurvedic Sanskrit, for any plant valued for healing.</a:t>
+              <a:t>Six labelled samples laid out at the front of the class: tulsi sprig, neem leaf (dried, no chewing), turmeric root or powder, ginger root, ajwain seeds in a small jar, mint sprig</a:t>
             </a:r>
             <a:endParaRPr lang="en-US" sz="1200" dirty="0"/>
           </a:p>
@@ -3714,24 +7768,28 @@
               <a:buChar char="•"/>
             </a:pPr>
             <a:r>
-              <a:rPr lang="en-US" sz="1200" i="1" dirty="0">
-                <a:solidFill>
-                  <a:srgbClr val="1C2833"/>
-                </a:solidFill>
-                <a:latin typeface="Arial" pitchFamily="34" charset="0"/>
-                <a:ea typeface="Arial" pitchFamily="34" charset="-122"/>
-                <a:cs typeface="Arial" pitchFamily="34" charset="-120"/>
-              </a:rPr>
-              <a:t>tulasī, nimba, haridrā, adraka, yavānī, pudīnā</a:t>
-            </a:r>
-            <a:pPr algn="l" indent="0" marL="0">
+              <a:rPr lang="en-US" sz="1200" dirty="0">
+                <a:solidFill>
+                  <a:srgbClr val="1C2833"/>
+                </a:solidFill>
+                <a:latin typeface="Arial" pitchFamily="34" charset="0"/>
+                <a:ea typeface="Arial" pitchFamily="34" charset="-122"/>
+                <a:cs typeface="Arial" pitchFamily="34" charset="-120"/>
+              </a:rPr>
+              <a:t>Whiteboard</a:t>
+            </a:r>
+            <a:endParaRPr lang="en-US" sz="1200" dirty="0"/>
+          </a:p>
+          <a:p>
+            <a:pPr algn="l" marL="342900" indent="-342900">
               <a:lnSpc>
                 <a:spcPts val="1620"/>
               </a:lnSpc>
               <a:spcAft>
                 <a:spcPts val="300"/>
               </a:spcAft>
-              <a:buNone/>
+              <a:buSzPct val="100000"/>
+              <a:buChar char="•"/>
             </a:pPr>
             <a:r>
               <a:rPr lang="en-US" sz="1200" dirty="0">
@@ -3742,7 +7800,7 @@
                 <a:ea typeface="Arial" pitchFamily="34" charset="-122"/>
                 <a:cs typeface="Arial" pitchFamily="34" charset="-120"/>
               </a:rPr>
-              <a:t> — the six herbs in this module.</a:t>
+              <a:t>Six index cards, one per herb, with the Sanskrit + English + botanical name pre-printed</a:t>
             </a:r>
             <a:endParaRPr lang="en-US" sz="1200" dirty="0"/>
           </a:p>
@@ -3900,7 +7958,7 @@
                 <a:ea typeface="Georgia" pitchFamily="34" charset="-122"/>
                 <a:cs typeface="Georgia" pitchFamily="34" charset="-120"/>
               </a:rPr>
-              <a:t>Lesson flow</a:t>
+              <a:t>Vocabulary introduced today</a:t>
             </a:r>
             <a:endParaRPr lang="en-US" sz="1800" dirty="0"/>
           </a:p>
@@ -3909,6 +7967,116 @@
       <p:sp>
         <p:nvSpPr>
           <p:cNvPr id="4" name="Text 2"/>
+          <p:cNvSpPr/>
+          <p:nvPr/>
+        </p:nvSpPr>
+        <p:spPr>
+          <a:xfrm>
+            <a:off x="634901" y="883593"/>
+            <a:ext cx="8102798" cy="731341"/>
+          </a:xfrm>
+          <a:prstGeom prst="rect">
+            <a:avLst/>
+          </a:prstGeom>
+          <a:noFill/>
+          <a:ln/>
+        </p:spPr>
+        <p:txBody>
+          <a:bodyPr wrap="square" lIns="0" tIns="0" rIns="0" bIns="0" rtlCol="0" anchor="t"/>
+          <a:lstStyle/>
+          <a:p>
+            <a:pPr algn="l" marL="342900" indent="-342900">
+              <a:lnSpc>
+                <a:spcPts val="1620"/>
+              </a:lnSpc>
+              <a:spcAft>
+                <a:spcPts val="300"/>
+              </a:spcAft>
+              <a:buSzPct val="100000"/>
+              <a:buChar char="•"/>
+            </a:pPr>
+            <a:r>
+              <a:rPr lang="en-US" sz="1200" i="1" dirty="0">
+                <a:solidFill>
+                  <a:srgbClr val="1C2833"/>
+                </a:solidFill>
+                <a:latin typeface="Arial" pitchFamily="34" charset="0"/>
+                <a:ea typeface="Arial" pitchFamily="34" charset="-122"/>
+                <a:cs typeface="Arial" pitchFamily="34" charset="-120"/>
+              </a:rPr>
+              <a:t>auṣadhi</a:t>
+            </a:r>
+            <a:pPr algn="l" indent="0" marL="0">
+              <a:lnSpc>
+                <a:spcPts val="1620"/>
+              </a:lnSpc>
+              <a:spcAft>
+                <a:spcPts val="300"/>
+              </a:spcAft>
+              <a:buNone/>
+            </a:pPr>
+            <a:r>
+              <a:rPr lang="en-US" sz="1200" dirty="0">
+                <a:solidFill>
+                  <a:srgbClr val="1C2833"/>
+                </a:solidFill>
+                <a:latin typeface="Arial" pitchFamily="34" charset="0"/>
+                <a:ea typeface="Arial" pitchFamily="34" charset="-122"/>
+                <a:cs typeface="Arial" pitchFamily="34" charset="-120"/>
+              </a:rPr>
+              <a:t> (IAST: auṣadhi; lit. "herb, plant used as medicine") — the general term, in Vedic and Ayurvedic Sanskrit, for any plant valued for healing.</a:t>
+            </a:r>
+            <a:endParaRPr lang="en-US" sz="1200" dirty="0"/>
+          </a:p>
+          <a:p>
+            <a:pPr algn="l" marL="342900" indent="-342900">
+              <a:lnSpc>
+                <a:spcPts val="1620"/>
+              </a:lnSpc>
+              <a:spcAft>
+                <a:spcPts val="300"/>
+              </a:spcAft>
+              <a:buSzPct val="100000"/>
+              <a:buChar char="•"/>
+            </a:pPr>
+            <a:r>
+              <a:rPr lang="en-US" sz="1200" i="1" dirty="0">
+                <a:solidFill>
+                  <a:srgbClr val="1C2833"/>
+                </a:solidFill>
+                <a:latin typeface="Arial" pitchFamily="34" charset="0"/>
+                <a:ea typeface="Arial" pitchFamily="34" charset="-122"/>
+                <a:cs typeface="Arial" pitchFamily="34" charset="-120"/>
+              </a:rPr>
+              <a:t>tulasī, nimba, haridrā, adraka, yavānī, pudīnā</a:t>
+            </a:r>
+            <a:pPr algn="l" indent="0" marL="0">
+              <a:lnSpc>
+                <a:spcPts val="1620"/>
+              </a:lnSpc>
+              <a:spcAft>
+                <a:spcPts val="300"/>
+              </a:spcAft>
+              <a:buNone/>
+            </a:pPr>
+            <a:r>
+              <a:rPr lang="en-US" sz="1200" dirty="0">
+                <a:solidFill>
+                  <a:srgbClr val="1C2833"/>
+                </a:solidFill>
+                <a:latin typeface="Arial" pitchFamily="34" charset="0"/>
+                <a:ea typeface="Arial" pitchFamily="34" charset="-122"/>
+                <a:cs typeface="Arial" pitchFamily="34" charset="-120"/>
+              </a:rPr>
+              <a:t> — the six herbs in this module.</a:t>
+            </a:r>
+            <a:endParaRPr lang="en-US" sz="1200" dirty="0"/>
+          </a:p>
+        </p:txBody>
+      </p:sp>
+      <p:sp>
+        <p:nvSpPr>
+          <p:cNvPr id="5" name="Text 3"/>
           <p:cNvSpPr/>
           <p:nvPr/>
         </p:nvSpPr>
@@ -4058,7 +8226,7 @@
                 <a:ea typeface="Georgia" pitchFamily="34" charset="-122"/>
                 <a:cs typeface="Georgia" pitchFamily="34" charset="-120"/>
               </a:rPr>
-              <a:t>Warm-up (5 min)</a:t>
+              <a:t>Lesson flow</a:t>
             </a:r>
             <a:endParaRPr lang="en-US" sz="1800" dirty="0"/>
           </a:p>
@@ -4067,219 +8235,6 @@
       <p:sp>
         <p:nvSpPr>
           <p:cNvPr id="4" name="Text 2"/>
-          <p:cNvSpPr/>
-          <p:nvPr/>
-        </p:nvSpPr>
-        <p:spPr>
-          <a:xfrm>
-            <a:off x="406301" y="870942"/>
-            <a:ext cx="8498026" cy="213271"/>
-          </a:xfrm>
-          <a:prstGeom prst="rect">
-            <a:avLst/>
-          </a:prstGeom>
-          <a:noFill/>
-          <a:ln/>
-        </p:spPr>
-        <p:txBody>
-          <a:bodyPr wrap="square" lIns="0" tIns="0" rIns="0" bIns="0" rtlCol="0" anchor="t"/>
-          <a:lstStyle/>
-          <a:p>
-            <a:pPr algn="l" indent="0" marL="0">
-              <a:lnSpc>
-                <a:spcPts val="1680"/>
-              </a:lnSpc>
-              <a:spcBef>
-                <a:spcPts val="300"/>
-              </a:spcBef>
-              <a:spcAft>
-                <a:spcPts val="300"/>
-              </a:spcAft>
-              <a:buNone/>
-            </a:pPr>
-            <a:r>
-              <a:rPr lang="en-US" sz="1200" dirty="0">
-                <a:solidFill>
-                  <a:srgbClr val="1C2833"/>
-                </a:solidFill>
-                <a:latin typeface="Arial" pitchFamily="34" charset="0"/>
-                <a:ea typeface="Arial" pitchFamily="34" charset="-122"/>
-                <a:cs typeface="Arial" pitchFamily="34" charset="-120"/>
-              </a:rPr>
-              <a:t>Hold up the tulsi sprig. </a:t>
-            </a:r>
-            <a:pPr algn="l" indent="0" marL="0">
-              <a:lnSpc>
-                <a:spcPts val="1680"/>
-              </a:lnSpc>
-              <a:spcBef>
-                <a:spcPts val="300"/>
-              </a:spcBef>
-              <a:spcAft>
-                <a:spcPts val="300"/>
-              </a:spcAft>
-              <a:buNone/>
-            </a:pPr>
-            <a:r>
-              <a:rPr lang="en-US" sz="1200" i="1" dirty="0">
-                <a:solidFill>
-                  <a:srgbClr val="1C2833"/>
-                </a:solidFill>
-                <a:latin typeface="Arial" pitchFamily="34" charset="0"/>
-                <a:ea typeface="Arial" pitchFamily="34" charset="-122"/>
-                <a:cs typeface="Arial" pitchFamily="34" charset="-120"/>
-              </a:rPr>
-              <a:t>"How many of you have seen this plant at home?"</a:t>
-            </a:r>
-            <a:pPr algn="l" indent="0" marL="0">
-              <a:lnSpc>
-                <a:spcPts val="1680"/>
-              </a:lnSpc>
-              <a:spcBef>
-                <a:spcPts val="300"/>
-              </a:spcBef>
-              <a:spcAft>
-                <a:spcPts val="300"/>
-              </a:spcAft>
-              <a:buNone/>
-            </a:pPr>
-            <a:r>
-              <a:rPr lang="en-US" sz="1200" dirty="0">
-                <a:solidFill>
-                  <a:srgbClr val="1C2833"/>
-                </a:solidFill>
-                <a:latin typeface="Arial" pitchFamily="34" charset="0"/>
-                <a:ea typeface="Arial" pitchFamily="34" charset="-122"/>
-                <a:cs typeface="Arial" pitchFamily="34" charset="-120"/>
-              </a:rPr>
-              <a:t> Hands.</a:t>
-            </a:r>
-            <a:endParaRPr lang="en-US" sz="1200" dirty="0"/>
-          </a:p>
-        </p:txBody>
-      </p:sp>
-      <p:sp>
-        <p:nvSpPr>
-          <p:cNvPr id="5" name="Text 3"/>
-          <p:cNvSpPr/>
-          <p:nvPr/>
-        </p:nvSpPr>
-        <p:spPr>
-          <a:xfrm>
-            <a:off x="406301" y="1160413"/>
-            <a:ext cx="8498026" cy="213271"/>
-          </a:xfrm>
-          <a:prstGeom prst="rect">
-            <a:avLst/>
-          </a:prstGeom>
-          <a:noFill/>
-          <a:ln/>
-        </p:spPr>
-        <p:txBody>
-          <a:bodyPr wrap="square" lIns="0" tIns="0" rIns="0" bIns="0" rtlCol="0" anchor="t"/>
-          <a:lstStyle/>
-          <a:p>
-            <a:pPr algn="l" indent="0" marL="0">
-              <a:lnSpc>
-                <a:spcPts val="1680"/>
-              </a:lnSpc>
-              <a:spcBef>
-                <a:spcPts val="300"/>
-              </a:spcBef>
-              <a:spcAft>
-                <a:spcPts val="300"/>
-              </a:spcAft>
-              <a:buNone/>
-            </a:pPr>
-            <a:r>
-              <a:rPr lang="en-US" sz="1200" i="1" dirty="0">
-                <a:solidFill>
-                  <a:srgbClr val="1C2833"/>
-                </a:solidFill>
-                <a:latin typeface="Arial" pitchFamily="34" charset="0"/>
-                <a:ea typeface="Arial" pitchFamily="34" charset="-122"/>
-                <a:cs typeface="Arial" pitchFamily="34" charset="-120"/>
-              </a:rPr>
-              <a:t>"How many of you have eaten what's in this jar?"</a:t>
-            </a:r>
-            <a:pPr algn="l" indent="0" marL="0">
-              <a:lnSpc>
-                <a:spcPts val="1680"/>
-              </a:lnSpc>
-              <a:spcBef>
-                <a:spcPts val="300"/>
-              </a:spcBef>
-              <a:spcAft>
-                <a:spcPts val="300"/>
-              </a:spcAft>
-              <a:buNone/>
-            </a:pPr>
-            <a:r>
-              <a:rPr lang="en-US" sz="1200" dirty="0">
-                <a:solidFill>
-                  <a:srgbClr val="1C2833"/>
-                </a:solidFill>
-                <a:latin typeface="Arial" pitchFamily="34" charset="0"/>
-                <a:ea typeface="Arial" pitchFamily="34" charset="-122"/>
-                <a:cs typeface="Arial" pitchFamily="34" charset="-120"/>
-              </a:rPr>
-              <a:t> (Pull out ajwain.) Hands.</a:t>
-            </a:r>
-            <a:endParaRPr lang="en-US" sz="1200" dirty="0"/>
-          </a:p>
-        </p:txBody>
-      </p:sp>
-      <p:sp>
-        <p:nvSpPr>
-          <p:cNvPr id="6" name="Text 4"/>
-          <p:cNvSpPr/>
-          <p:nvPr/>
-        </p:nvSpPr>
-        <p:spPr>
-          <a:xfrm>
-            <a:off x="406301" y="1449884"/>
-            <a:ext cx="8498026" cy="426541"/>
-          </a:xfrm>
-          <a:prstGeom prst="rect">
-            <a:avLst/>
-          </a:prstGeom>
-          <a:noFill/>
-          <a:ln/>
-        </p:spPr>
-        <p:txBody>
-          <a:bodyPr wrap="square" lIns="0" tIns="0" rIns="0" bIns="0" rtlCol="0" anchor="t"/>
-          <a:lstStyle/>
-          <a:p>
-            <a:pPr algn="l" indent="0" marL="0">
-              <a:lnSpc>
-                <a:spcPts val="1680"/>
-              </a:lnSpc>
-              <a:spcBef>
-                <a:spcPts val="300"/>
-              </a:spcBef>
-              <a:spcAft>
-                <a:spcPts val="300"/>
-              </a:spcAft>
-              <a:buNone/>
-            </a:pPr>
-            <a:r>
-              <a:rPr lang="en-US" sz="1200" dirty="0">
-                <a:solidFill>
-                  <a:srgbClr val="1C2833"/>
-                </a:solidFill>
-                <a:latin typeface="Arial" pitchFamily="34" charset="0"/>
-                <a:ea typeface="Arial" pitchFamily="34" charset="-122"/>
-                <a:cs typeface="Arial" pitchFamily="34" charset="-120"/>
-              </a:rPr>
-              <a:t>Establish the premise: most of these are already in their kitchens. We're going to study what's actually in them — and how Indian tradition organised that knowledge.</a:t>
-            </a:r>
-            <a:endParaRPr lang="en-US" sz="1200" dirty="0"/>
-          </a:p>
-        </p:txBody>
-      </p:sp>
-      <p:sp>
-        <p:nvSpPr>
-          <p:cNvPr id="7" name="Text 5"/>
           <p:cNvSpPr/>
           <p:nvPr/>
         </p:nvSpPr>
@@ -4429,7 +8384,7 @@
                 <a:ea typeface="Georgia" pitchFamily="34" charset="-122"/>
                 <a:cs typeface="Georgia" pitchFamily="34" charset="-120"/>
               </a:rPr>
-              <a:t>Activity (15 min) — Six-herb walkaround</a:t>
+              <a:t>Warm-up (5 min)</a:t>
             </a:r>
             <a:endParaRPr lang="en-US" sz="1800" dirty="0"/>
           </a:p>
@@ -4477,7 +8432,53 @@
                 <a:ea typeface="Arial" pitchFamily="34" charset="-122"/>
                 <a:cs typeface="Arial" pitchFamily="34" charset="-120"/>
               </a:rPr>
-              <a:t>Set up six "stations" — one per herb. Pairs of students rotate through, 1.5 minutes per station. At each:</a:t>
+              <a:t>Hold up the tulsi sprig. </a:t>
+            </a:r>
+            <a:pPr algn="l" indent="0" marL="0">
+              <a:lnSpc>
+                <a:spcPts val="1680"/>
+              </a:lnSpc>
+              <a:spcBef>
+                <a:spcPts val="300"/>
+              </a:spcBef>
+              <a:spcAft>
+                <a:spcPts val="300"/>
+              </a:spcAft>
+              <a:buNone/>
+            </a:pPr>
+            <a:r>
+              <a:rPr lang="en-US" sz="1200" i="1" dirty="0">
+                <a:solidFill>
+                  <a:srgbClr val="1C2833"/>
+                </a:solidFill>
+                <a:latin typeface="Arial" pitchFamily="34" charset="0"/>
+                <a:ea typeface="Arial" pitchFamily="34" charset="-122"/>
+                <a:cs typeface="Arial" pitchFamily="34" charset="-120"/>
+              </a:rPr>
+              <a:t>"How many of you have seen this plant at home?"</a:t>
+            </a:r>
+            <a:pPr algn="l" indent="0" marL="0">
+              <a:lnSpc>
+                <a:spcPts val="1680"/>
+              </a:lnSpc>
+              <a:spcBef>
+                <a:spcPts val="300"/>
+              </a:spcBef>
+              <a:spcAft>
+                <a:spcPts val="300"/>
+              </a:spcAft>
+              <a:buNone/>
+            </a:pPr>
+            <a:r>
+              <a:rPr lang="en-US" sz="1200" dirty="0">
+                <a:solidFill>
+                  <a:srgbClr val="1C2833"/>
+                </a:solidFill>
+                <a:latin typeface="Arial" pitchFamily="34" charset="0"/>
+                <a:ea typeface="Arial" pitchFamily="34" charset="-122"/>
+                <a:cs typeface="Arial" pitchFamily="34" charset="-120"/>
+              </a:rPr>
+              <a:t> Hands.</a:t>
             </a:r>
             <a:endParaRPr lang="en-US" sz="1200" dirty="0"/>
           </a:p>
@@ -4491,161 +8492,7 @@
         </p:nvSpPr>
         <p:spPr>
           <a:xfrm>
-            <a:off x="634901" y="1173063"/>
-            <a:ext cx="8102798" cy="975122"/>
-          </a:xfrm>
-          <a:prstGeom prst="rect">
-            <a:avLst/>
-          </a:prstGeom>
-          <a:noFill/>
-          <a:ln/>
-        </p:spPr>
-        <p:txBody>
-          <a:bodyPr wrap="square" lIns="0" tIns="0" rIns="0" bIns="0" rtlCol="0" anchor="t"/>
-          <a:lstStyle/>
-          <a:p>
-            <a:pPr algn="l" marL="342900" indent="-342900">
-              <a:lnSpc>
-                <a:spcPts val="1620"/>
-              </a:lnSpc>
-              <a:spcAft>
-                <a:spcPts val="300"/>
-              </a:spcAft>
-              <a:buSzPct val="100000"/>
-              <a:buChar char="•"/>
-            </a:pPr>
-            <a:r>
-              <a:rPr lang="en-US" sz="1200" b="1" dirty="0">
-                <a:solidFill>
-                  <a:srgbClr val="1C2833"/>
-                </a:solidFill>
-                <a:latin typeface="Arial" pitchFamily="34" charset="0"/>
-                <a:ea typeface="Arial" pitchFamily="34" charset="-122"/>
-                <a:cs typeface="Arial" pitchFamily="34" charset="-120"/>
-              </a:rPr>
-              <a:t>Look.</a:t>
-            </a:r>
-            <a:pPr algn="l" indent="0" marL="0">
-              <a:lnSpc>
-                <a:spcPts val="1620"/>
-              </a:lnSpc>
-              <a:spcAft>
-                <a:spcPts val="300"/>
-              </a:spcAft>
-              <a:buNone/>
-            </a:pPr>
-            <a:r>
-              <a:rPr lang="en-US" sz="1200" dirty="0">
-                <a:solidFill>
-                  <a:srgbClr val="1C2833"/>
-                </a:solidFill>
-                <a:latin typeface="Arial" pitchFamily="34" charset="0"/>
-                <a:ea typeface="Arial" pitchFamily="34" charset="-122"/>
-                <a:cs typeface="Arial" pitchFamily="34" charset="-120"/>
-              </a:rPr>
-              <a:t> What shape is the leaf or root?</a:t>
-            </a:r>
-            <a:endParaRPr lang="en-US" sz="1200" dirty="0"/>
-          </a:p>
-          <a:p>
-            <a:pPr algn="l" marL="342900" indent="-342900">
-              <a:lnSpc>
-                <a:spcPts val="1620"/>
-              </a:lnSpc>
-              <a:spcAft>
-                <a:spcPts val="300"/>
-              </a:spcAft>
-              <a:buSzPct val="100000"/>
-              <a:buChar char="•"/>
-            </a:pPr>
-            <a:r>
-              <a:rPr lang="en-US" sz="1200" b="1" dirty="0">
-                <a:solidFill>
-                  <a:srgbClr val="1C2833"/>
-                </a:solidFill>
-                <a:latin typeface="Arial" pitchFamily="34" charset="0"/>
-                <a:ea typeface="Arial" pitchFamily="34" charset="-122"/>
-                <a:cs typeface="Arial" pitchFamily="34" charset="-120"/>
-              </a:rPr>
-              <a:t>Smell.</a:t>
-            </a:r>
-            <a:pPr algn="l" indent="0" marL="0">
-              <a:lnSpc>
-                <a:spcPts val="1620"/>
-              </a:lnSpc>
-              <a:spcAft>
-                <a:spcPts val="300"/>
-              </a:spcAft>
-              <a:buNone/>
-            </a:pPr>
-            <a:r>
-              <a:rPr lang="en-US" sz="1200" dirty="0">
-                <a:solidFill>
-                  <a:srgbClr val="1C2833"/>
-                </a:solidFill>
-                <a:latin typeface="Arial" pitchFamily="34" charset="0"/>
-                <a:ea typeface="Arial" pitchFamily="34" charset="-122"/>
-                <a:cs typeface="Arial" pitchFamily="34" charset="-120"/>
-              </a:rPr>
-              <a:t> Crush a tiny piece (where safe — not neem) and inhale gently from a distance. Don't put it under anyone else's nose.</a:t>
-            </a:r>
-            <a:endParaRPr lang="en-US" sz="1200" dirty="0"/>
-          </a:p>
-          <a:p>
-            <a:pPr algn="l" marL="342900" indent="-342900">
-              <a:lnSpc>
-                <a:spcPts val="1620"/>
-              </a:lnSpc>
-              <a:spcAft>
-                <a:spcPts val="300"/>
-              </a:spcAft>
-              <a:buSzPct val="100000"/>
-              <a:buChar char="•"/>
-            </a:pPr>
-            <a:r>
-              <a:rPr lang="en-US" sz="1200" b="1" dirty="0">
-                <a:solidFill>
-                  <a:srgbClr val="1C2833"/>
-                </a:solidFill>
-                <a:latin typeface="Arial" pitchFamily="34" charset="0"/>
-                <a:ea typeface="Arial" pitchFamily="34" charset="-122"/>
-                <a:cs typeface="Arial" pitchFamily="34" charset="-120"/>
-              </a:rPr>
-              <a:t>Record</a:t>
-            </a:r>
-            <a:pPr algn="l" indent="0" marL="0">
-              <a:lnSpc>
-                <a:spcPts val="1620"/>
-              </a:lnSpc>
-              <a:spcAft>
-                <a:spcPts val="300"/>
-              </a:spcAft>
-              <a:buNone/>
-            </a:pPr>
-            <a:r>
-              <a:rPr lang="en-US" sz="1200" dirty="0">
-                <a:solidFill>
-                  <a:srgbClr val="1C2833"/>
-                </a:solidFill>
-                <a:latin typeface="Arial" pitchFamily="34" charset="0"/>
-                <a:ea typeface="Arial" pitchFamily="34" charset="-122"/>
-                <a:cs typeface="Arial" pitchFamily="34" charset="-120"/>
-              </a:rPr>
-              <a:t> one identifying feature on their workbook page.</a:t>
-            </a:r>
-            <a:endParaRPr lang="en-US" sz="1200" dirty="0"/>
-          </a:p>
-        </p:txBody>
-      </p:sp>
-      <p:sp>
-        <p:nvSpPr>
-          <p:cNvPr id="6" name="Text 4"/>
-          <p:cNvSpPr/>
-          <p:nvPr/>
-        </p:nvSpPr>
-        <p:spPr>
-          <a:xfrm>
-            <a:off x="406301" y="2237036"/>
+            <a:off x="406301" y="1160413"/>
             <a:ext cx="8498026" cy="213271"/>
           </a:xfrm>
           <a:prstGeom prst="rect">
@@ -4671,6 +8518,29 @@
               <a:buNone/>
             </a:pPr>
             <a:r>
+              <a:rPr lang="en-US" sz="1200" i="1" dirty="0">
+                <a:solidFill>
+                  <a:srgbClr val="1C2833"/>
+                </a:solidFill>
+                <a:latin typeface="Arial" pitchFamily="34" charset="0"/>
+                <a:ea typeface="Arial" pitchFamily="34" charset="-122"/>
+                <a:cs typeface="Arial" pitchFamily="34" charset="-120"/>
+              </a:rPr>
+              <a:t>"How many of you have eaten what's in this jar?"</a:t>
+            </a:r>
+            <a:pPr algn="l" indent="0" marL="0">
+              <a:lnSpc>
+                <a:spcPts val="1680"/>
+              </a:lnSpc>
+              <a:spcBef>
+                <a:spcPts val="300"/>
+              </a:spcBef>
+              <a:spcAft>
+                <a:spcPts val="300"/>
+              </a:spcAft>
+              <a:buNone/>
+            </a:pPr>
+            <a:r>
               <a:rPr lang="en-US" sz="1200" dirty="0">
                 <a:solidFill>
                   <a:srgbClr val="1C2833"/>
@@ -4679,53 +8549,7 @@
                 <a:ea typeface="Arial" pitchFamily="34" charset="-122"/>
                 <a:cs typeface="Arial" pitchFamily="34" charset="-120"/>
               </a:rPr>
-              <a:t>At the neem station, leaves are dried and in a sealed bag. </a:t>
-            </a:r>
-            <a:pPr algn="l" indent="0" marL="0">
-              <a:lnSpc>
-                <a:spcPts val="1680"/>
-              </a:lnSpc>
-              <a:spcBef>
-                <a:spcPts val="300"/>
-              </a:spcBef>
-              <a:spcAft>
-                <a:spcPts val="300"/>
-              </a:spcAft>
-              <a:buNone/>
-            </a:pPr>
-            <a:r>
-              <a:rPr lang="en-US" sz="1200" b="1" dirty="0">
-                <a:solidFill>
-                  <a:srgbClr val="1C2833"/>
-                </a:solidFill>
-                <a:latin typeface="Arial" pitchFamily="34" charset="0"/>
-                <a:ea typeface="Arial" pitchFamily="34" charset="-122"/>
-                <a:cs typeface="Arial" pitchFamily="34" charset="-120"/>
-              </a:rPr>
-              <a:t>Smell from outside the bag.</a:t>
-            </a:r>
-            <a:pPr algn="l" indent="0" marL="0">
-              <a:lnSpc>
-                <a:spcPts val="1680"/>
-              </a:lnSpc>
-              <a:spcBef>
-                <a:spcPts val="300"/>
-              </a:spcBef>
-              <a:spcAft>
-                <a:spcPts val="300"/>
-              </a:spcAft>
-              <a:buNone/>
-            </a:pPr>
-            <a:r>
-              <a:rPr lang="en-US" sz="1200" dirty="0">
-                <a:solidFill>
-                  <a:srgbClr val="1C2833"/>
-                </a:solidFill>
-                <a:latin typeface="Arial" pitchFamily="34" charset="0"/>
-                <a:ea typeface="Arial" pitchFamily="34" charset="-122"/>
-                <a:cs typeface="Arial" pitchFamily="34" charset="-120"/>
-              </a:rPr>
-              <a:t> No touching the inside.</a:t>
+              <a:t> (Pull out ajwain.) Hands.</a:t>
             </a:r>
             <a:endParaRPr lang="en-US" sz="1200" dirty="0"/>
           </a:p>
@@ -4733,14 +8557,14 @@
       </p:sp>
       <p:sp>
         <p:nvSpPr>
-          <p:cNvPr id="7" name="Text 5"/>
+          <p:cNvPr id="6" name="Text 4"/>
           <p:cNvSpPr/>
           <p:nvPr/>
         </p:nvSpPr>
         <p:spPr>
           <a:xfrm>
-            <a:off x="406301" y="2526506"/>
-            <a:ext cx="8498026" cy="213271"/>
+            <a:off x="406301" y="1449884"/>
+            <a:ext cx="8498026" cy="426541"/>
           </a:xfrm>
           <a:prstGeom prst="rect">
             <a:avLst/>
@@ -4773,7 +8597,7 @@
                 <a:ea typeface="Arial" pitchFamily="34" charset="-122"/>
                 <a:cs typeface="Arial" pitchFamily="34" charset="-120"/>
               </a:rPr>
-              <a:t>Last 3 min: pairs report one feature back to the group. Build a quick "first impression" word-cloud on the board.</a:t>
+              <a:t>Establish the premise: most of these are already in their kitchens. We're going to study what's actually in them — and how Indian tradition organised that knowledge.</a:t>
             </a:r>
             <a:endParaRPr lang="en-US" sz="1200" dirty="0"/>
           </a:p>
@@ -4781,7 +8605,7 @@
       </p:sp>
       <p:sp>
         <p:nvSpPr>
-          <p:cNvPr id="8" name="Text 6"/>
+          <p:cNvPr id="7" name="Text 5"/>
           <p:cNvSpPr/>
           <p:nvPr/>
         </p:nvSpPr>
@@ -4931,7 +8755,7 @@
                 <a:ea typeface="Georgia" pitchFamily="34" charset="-122"/>
                 <a:cs typeface="Georgia" pitchFamily="34" charset="-120"/>
               </a:rPr>
-              <a:t>Wrap-up (5 min)</a:t>
+              <a:t>Core (20 min)</a:t>
             </a:r>
             <a:endParaRPr lang="en-US" sz="1800" dirty="0"/>
           </a:p>
@@ -4945,8 +8769,8 @@
         </p:nvSpPr>
         <p:spPr>
           <a:xfrm>
-            <a:off x="406301" y="870942"/>
-            <a:ext cx="8498026" cy="639812"/>
+            <a:off x="634901" y="883593"/>
+            <a:ext cx="8102798" cy="281880"/>
           </a:xfrm>
           <a:prstGeom prst="rect">
             <a:avLst/>
@@ -4958,13 +8782,40 @@
           <a:bodyPr wrap="square" lIns="0" tIns="0" rIns="0" bIns="0" rtlCol="0" anchor="t"/>
           <a:lstStyle/>
           <a:p>
-            <a:pPr algn="l" indent="0" marL="0">
-              <a:lnSpc>
-                <a:spcPts val="1680"/>
-              </a:lnSpc>
-              <a:spcBef>
-                <a:spcPts val="300"/>
-              </a:spcBef>
+            <a:pPr algn="l" marL="342900" indent="-342900">
+              <a:lnSpc>
+                <a:spcPts val="1620"/>
+              </a:lnSpc>
+              <a:spcAft>
+                <a:spcPts val="300"/>
+              </a:spcAft>
+              <a:buSzPct val="100000"/>
+              <a:buChar char="•"/>
+            </a:pPr>
+            <a:pPr algn="l" indent="0" marL="0">
+              <a:lnSpc>
+                <a:spcPts val="1620"/>
+              </a:lnSpc>
+              <a:spcAft>
+                <a:spcPts val="300"/>
+              </a:spcAft>
+              <a:buNone/>
+            </a:pPr>
+            <a:r>
+              <a:rPr lang="en-US" sz="1200" i="1" dirty="0">
+                <a:solidFill>
+                  <a:srgbClr val="1C2833"/>
+                </a:solidFill>
+                <a:latin typeface="Arial" pitchFamily="34" charset="0"/>
+                <a:ea typeface="Arial" pitchFamily="34" charset="-122"/>
+                <a:cs typeface="Arial" pitchFamily="34" charset="-120"/>
+              </a:rPr>
+              <a:t>What is an</a:t>
+            </a:r>
+            <a:pPr algn="l" indent="0" marL="0">
+              <a:lnSpc>
+                <a:spcPts val="1620"/>
+              </a:lnSpc>
               <a:spcAft>
                 <a:spcPts val="300"/>
               </a:spcAft>
@@ -4979,38 +8830,32 @@
                 <a:ea typeface="Arial" pitchFamily="34" charset="-122"/>
                 <a:cs typeface="Arial" pitchFamily="34" charset="-120"/>
               </a:rPr>
-              <a:t>– Restate the safety rule chorally — the whole class. – Exit ticket on a slip: write the </a:t>
-            </a:r>
-            <a:pPr algn="l" indent="0" marL="0">
-              <a:lnSpc>
-                <a:spcPts val="1680"/>
-              </a:lnSpc>
-              <a:spcBef>
-                <a:spcPts val="300"/>
-              </a:spcBef>
-              <a:spcAft>
-                <a:spcPts val="300"/>
-              </a:spcAft>
-              <a:buNone/>
-            </a:pPr>
-            <a:r>
-              <a:rPr lang="en-US" sz="1200" b="1" dirty="0">
-                <a:solidFill>
-                  <a:srgbClr val="1C2833"/>
-                </a:solidFill>
-                <a:latin typeface="Arial" pitchFamily="34" charset="0"/>
-                <a:ea typeface="Arial" pitchFamily="34" charset="-122"/>
-                <a:cs typeface="Arial" pitchFamily="34" charset="-120"/>
-              </a:rPr>
-              <a:t>Sanskrit name and one identifying feature</a:t>
-            </a:r>
-            <a:pPr algn="l" indent="0" marL="0">
-              <a:lnSpc>
-                <a:spcPts val="1680"/>
-              </a:lnSpc>
-              <a:spcBef>
-                <a:spcPts val="300"/>
-              </a:spcBef>
+              <a:t>auṣadhi</a:t>
+            </a:r>
+            <a:pPr algn="l" indent="0" marL="0">
+              <a:lnSpc>
+                <a:spcPts val="1620"/>
+              </a:lnSpc>
+              <a:spcAft>
+                <a:spcPts val="300"/>
+              </a:spcAft>
+              <a:buNone/>
+            </a:pPr>
+            <a:r>
+              <a:rPr lang="en-US" sz="1200" i="1" dirty="0">
+                <a:solidFill>
+                  <a:srgbClr val="1C2833"/>
+                </a:solidFill>
+                <a:latin typeface="Arial" pitchFamily="34" charset="0"/>
+                <a:ea typeface="Arial" pitchFamily="34" charset="-122"/>
+                <a:cs typeface="Arial" pitchFamily="34" charset="-120"/>
+              </a:rPr>
+              <a:t>?</a:t>
+            </a:r>
+            <a:pPr algn="l" indent="0" marL="0">
+              <a:lnSpc>
+                <a:spcPts val="1620"/>
+              </a:lnSpc>
               <a:spcAft>
                 <a:spcPts val="300"/>
               </a:spcAft>
@@ -5025,7 +8870,7 @@
                 <a:ea typeface="Arial" pitchFamily="34" charset="-122"/>
                 <a:cs typeface="Arial" pitchFamily="34" charset="-120"/>
               </a:rPr>
-              <a:t> for any two herbs you remember. – Homework: tonight, find as many of the six herbs as you can in your kitchen or balcony. List them.</a:t>
+              <a:t>* Write the word on the board.</a:t>
             </a:r>
             <a:endParaRPr lang="en-US" sz="1200" dirty="0"/>
           </a:p>
@@ -5183,7 +9028,7 @@
                 <a:ea typeface="Georgia" pitchFamily="34" charset="-122"/>
                 <a:cs typeface="Georgia" pitchFamily="34" charset="-120"/>
               </a:rPr>
-              <a:t>Student-facing content</a:t>
+              <a:t>Core (20 min) (cont.)</a:t>
             </a:r>
             <a:endParaRPr lang="en-US" sz="1800" dirty="0"/>
           </a:p>
@@ -5197,61 +9042,8 @@
         </p:nvSpPr>
         <p:spPr>
           <a:xfrm>
-            <a:off x="406301" y="883593"/>
-            <a:ext cx="8331398" cy="2381250"/>
-          </a:xfrm>
-          <a:prstGeom prst="rect">
-            <a:avLst/>
-          </a:prstGeom>
-          <a:solidFill>
-            <a:srgbClr val="F4F8F9"/>
-          </a:solidFill>
-          <a:ln/>
-        </p:spPr>
-        <p:txBody>
-          <a:bodyPr wrap="square" rtlCol="0" anchor="ctr"/>
-          <a:lstStyle/>
-          <a:p>
-            <a:pPr indent="0" marL="0">
-              <a:buNone/>
-            </a:pPr>
-            <a:endParaRPr lang="en-US" dirty="0"/>
-          </a:p>
-        </p:txBody>
-      </p:sp>
-      <p:sp>
-        <p:nvSpPr>
-          <p:cNvPr id="5" name="Shape 3"/>
-          <p:cNvSpPr/>
-          <p:nvPr/>
-        </p:nvSpPr>
-        <p:spPr>
-          <a:xfrm>
-            <a:off x="434876" y="883593"/>
-            <a:ext cx="0" cy="2381250"/>
-          </a:xfrm>
-          <a:prstGeom prst="line">
-            <a:avLst/>
-          </a:prstGeom>
-          <a:noFill/>
-          <a:ln w="57150">
-            <a:solidFill>
-              <a:srgbClr val="FE4447"/>
-            </a:solidFill>
-            <a:prstDash val="solid"/>
-          </a:ln>
-        </p:spPr>
-      </p:sp>
-      <p:sp>
-        <p:nvSpPr>
-          <p:cNvPr id="6" name="Text 4"/>
-          <p:cNvSpPr/>
-          <p:nvPr/>
-        </p:nvSpPr>
-        <p:spPr>
-          <a:xfrm>
-            <a:off x="692051" y="1074093"/>
-            <a:ext cx="7973389" cy="230981"/>
+            <a:off x="634901" y="883593"/>
+            <a:ext cx="8102798" cy="1348383"/>
           </a:xfrm>
           <a:prstGeom prst="rect">
             <a:avLst/>
@@ -5263,642 +9055,398 @@
           <a:bodyPr wrap="square" lIns="0" tIns="0" rIns="0" bIns="0" rtlCol="0" anchor="t"/>
           <a:lstStyle/>
           <a:p>
-            <a:pPr algn="l" indent="0" marL="0">
-              <a:lnSpc>
-                <a:spcPts val="1820"/>
-              </a:lnSpc>
-              <a:spcBef>
-                <a:spcPts val="300"/>
-              </a:spcBef>
-              <a:spcAft>
-                <a:spcPts val="300"/>
-              </a:spcAft>
-              <a:buNone/>
-            </a:pPr>
-            <a:r>
-              <a:rPr lang="en-US" sz="1300" dirty="0">
-                <a:solidFill>
-                  <a:srgbClr val="1C2833"/>
-                </a:solidFill>
-                <a:latin typeface="Georgia" pitchFamily="34" charset="0"/>
-                <a:ea typeface="Georgia" pitchFamily="34" charset="-122"/>
-                <a:cs typeface="Georgia" pitchFamily="34" charset="-120"/>
-              </a:rPr>
-              <a:t>An </a:t>
-            </a:r>
-            <a:pPr algn="l" indent="0" marL="0">
-              <a:lnSpc>
-                <a:spcPts val="1820"/>
-              </a:lnSpc>
-              <a:spcBef>
-                <a:spcPts val="300"/>
-              </a:spcBef>
-              <a:spcAft>
-                <a:spcPts val="300"/>
-              </a:spcAft>
-              <a:buNone/>
-            </a:pPr>
-            <a:r>
-              <a:rPr lang="en-US" sz="1300" b="1" i="1" dirty="0">
-                <a:solidFill>
-                  <a:srgbClr val="1C2833"/>
-                </a:solidFill>
-                <a:latin typeface="Georgia" pitchFamily="34" charset="0"/>
-                <a:ea typeface="Georgia" pitchFamily="34" charset="-122"/>
-                <a:cs typeface="Georgia" pitchFamily="34" charset="-120"/>
-              </a:rPr>
-              <a:t>auṣadhi</a:t>
-            </a:r>
-            <a:pPr algn="l" indent="0" marL="0">
-              <a:lnSpc>
-                <a:spcPts val="1820"/>
-              </a:lnSpc>
-              <a:spcBef>
-                <a:spcPts val="300"/>
-              </a:spcBef>
-              <a:spcAft>
-                <a:spcPts val="300"/>
-              </a:spcAft>
-              <a:buNone/>
-            </a:pPr>
-            <a:r>
-              <a:rPr lang="en-US" sz="1300" dirty="0">
-                <a:solidFill>
-                  <a:srgbClr val="1C2833"/>
-                </a:solidFill>
-                <a:latin typeface="Georgia" pitchFamily="34" charset="0"/>
-                <a:ea typeface="Georgia" pitchFamily="34" charset="-122"/>
-                <a:cs typeface="Georgia" pitchFamily="34" charset="-120"/>
-              </a:rPr>
-              <a:t> is a plant used for healing.</a:t>
-            </a:r>
-            <a:endParaRPr lang="en-US" sz="1300" dirty="0"/>
-          </a:p>
-        </p:txBody>
-      </p:sp>
-      <p:sp>
-        <p:nvSpPr>
-          <p:cNvPr id="7" name="Text 5"/>
-          <p:cNvSpPr/>
-          <p:nvPr/>
-        </p:nvSpPr>
-        <p:spPr>
-          <a:xfrm>
-            <a:off x="692051" y="1343174"/>
-            <a:ext cx="7973389" cy="230981"/>
-          </a:xfrm>
-          <a:prstGeom prst="rect">
-            <a:avLst/>
-          </a:prstGeom>
-          <a:noFill/>
-          <a:ln/>
-        </p:spPr>
-        <p:txBody>
-          <a:bodyPr wrap="square" lIns="0" tIns="0" rIns="0" bIns="0" rtlCol="0" anchor="t"/>
-          <a:lstStyle/>
-          <a:p>
-            <a:pPr algn="l" indent="0" marL="0">
-              <a:lnSpc>
-                <a:spcPts val="1820"/>
-              </a:lnSpc>
-              <a:spcBef>
-                <a:spcPts val="300"/>
-              </a:spcBef>
-              <a:spcAft>
-                <a:spcPts val="300"/>
-              </a:spcAft>
-              <a:buNone/>
-            </a:pPr>
-            <a:r>
-              <a:rPr lang="en-US" sz="1300" i="1" dirty="0">
-                <a:solidFill>
-                  <a:srgbClr val="1C2833"/>
-                </a:solidFill>
-                <a:latin typeface="Georgia" pitchFamily="34" charset="0"/>
-                <a:ea typeface="Georgia" pitchFamily="34" charset="-122"/>
-                <a:cs typeface="Georgia" pitchFamily="34" charset="-120"/>
-              </a:rPr>
-              <a:t>We're going to study six of them — every one is already in most Indian kitchens or gardens:</a:t>
-            </a:r>
-            <a:endParaRPr lang="en-US" sz="1300" dirty="0"/>
-          </a:p>
-        </p:txBody>
-      </p:sp>
-      <p:sp>
-        <p:nvSpPr>
-          <p:cNvPr id="8" name="Text 6"/>
-          <p:cNvSpPr/>
-          <p:nvPr/>
-        </p:nvSpPr>
-        <p:spPr>
-          <a:xfrm>
-            <a:off x="692051" y="1612255"/>
-            <a:ext cx="7973389" cy="230981"/>
-          </a:xfrm>
-          <a:prstGeom prst="rect">
-            <a:avLst/>
-          </a:prstGeom>
-          <a:noFill/>
-          <a:ln/>
-        </p:spPr>
-        <p:txBody>
-          <a:bodyPr wrap="square" lIns="0" tIns="0" rIns="0" bIns="0" rtlCol="0" anchor="t"/>
-          <a:lstStyle/>
-          <a:p>
-            <a:pPr algn="l" indent="0" marL="0">
-              <a:lnSpc>
-                <a:spcPts val="1820"/>
-              </a:lnSpc>
-              <a:spcBef>
-                <a:spcPts val="300"/>
-              </a:spcBef>
-              <a:spcAft>
-                <a:spcPts val="300"/>
-              </a:spcAft>
-              <a:buNone/>
-            </a:pPr>
-            <a:r>
-              <a:rPr lang="en-US" sz="1300" i="1" dirty="0">
-                <a:solidFill>
-                  <a:srgbClr val="1C2833"/>
-                </a:solidFill>
-                <a:latin typeface="Georgia" pitchFamily="34" charset="0"/>
-                <a:ea typeface="Georgia" pitchFamily="34" charset="-122"/>
-                <a:cs typeface="Georgia" pitchFamily="34" charset="-120"/>
-              </a:rPr>
-              <a:t>tulasī</a:t>
-            </a:r>
-            <a:pPr algn="l" indent="0" marL="0">
-              <a:lnSpc>
-                <a:spcPts val="1820"/>
-              </a:lnSpc>
-              <a:spcBef>
-                <a:spcPts val="300"/>
-              </a:spcBef>
-              <a:spcAft>
-                <a:spcPts val="300"/>
-              </a:spcAft>
-              <a:buNone/>
-            </a:pPr>
-            <a:r>
-              <a:rPr lang="en-US" sz="1300" dirty="0">
-                <a:solidFill>
-                  <a:srgbClr val="1C2833"/>
-                </a:solidFill>
-                <a:latin typeface="Georgia" pitchFamily="34" charset="0"/>
-                <a:ea typeface="Georgia" pitchFamily="34" charset="-122"/>
-                <a:cs typeface="Georgia" pitchFamily="34" charset="-120"/>
+            <a:pPr algn="l" marL="342900" indent="-342900">
+              <a:lnSpc>
+                <a:spcPts val="1620"/>
+              </a:lnSpc>
+              <a:spcAft>
+                <a:spcPts val="300"/>
+              </a:spcAft>
+              <a:buSzPct val="100000"/>
+              <a:buChar char="•"/>
+            </a:pPr>
+            <a:r>
+              <a:rPr lang="en-US" sz="1200" i="1" dirty="0">
+                <a:solidFill>
+                  <a:srgbClr val="1C2833"/>
+                </a:solidFill>
+                <a:latin typeface="Arial" pitchFamily="34" charset="0"/>
+                <a:ea typeface="Arial" pitchFamily="34" charset="-122"/>
+                <a:cs typeface="Arial" pitchFamily="34" charset="-120"/>
+              </a:rPr>
+              <a:t>Auṣadhi</a:t>
+            </a:r>
+            <a:pPr algn="l" indent="0" marL="0">
+              <a:lnSpc>
+                <a:spcPts val="1620"/>
+              </a:lnSpc>
+              <a:spcAft>
+                <a:spcPts val="300"/>
+              </a:spcAft>
+              <a:buNone/>
+            </a:pPr>
+            <a:r>
+              <a:rPr lang="en-US" sz="1200" dirty="0">
+                <a:solidFill>
+                  <a:srgbClr val="1C2833"/>
+                </a:solidFill>
+                <a:latin typeface="Arial" pitchFamily="34" charset="0"/>
+                <a:ea typeface="Arial" pitchFamily="34" charset="-122"/>
+                <a:cs typeface="Arial" pitchFamily="34" charset="-120"/>
+              </a:rPr>
+              <a:t> means "plant used for healing." It appears in the Ṛgveda, in a hymn called the </a:t>
+            </a:r>
+            <a:pPr algn="l" indent="0" marL="0">
+              <a:lnSpc>
+                <a:spcPts val="1620"/>
+              </a:lnSpc>
+              <a:spcAft>
+                <a:spcPts val="300"/>
+              </a:spcAft>
+              <a:buNone/>
+            </a:pPr>
+            <a:r>
+              <a:rPr lang="en-US" sz="1200" i="1" dirty="0">
+                <a:solidFill>
+                  <a:srgbClr val="1C2833"/>
+                </a:solidFill>
+                <a:latin typeface="Arial" pitchFamily="34" charset="0"/>
+                <a:ea typeface="Arial" pitchFamily="34" charset="-122"/>
+                <a:cs typeface="Arial" pitchFamily="34" charset="-120"/>
+              </a:rPr>
+              <a:t>Auṣadhi-sūkta</a:t>
+            </a:r>
+            <a:pPr algn="l" indent="0" marL="0">
+              <a:lnSpc>
+                <a:spcPts val="1620"/>
+              </a:lnSpc>
+              <a:spcAft>
+                <a:spcPts val="300"/>
+              </a:spcAft>
+              <a:buNone/>
+            </a:pPr>
+            <a:r>
+              <a:rPr lang="en-US" sz="1200" dirty="0">
+                <a:solidFill>
+                  <a:srgbClr val="1C2833"/>
+                </a:solidFill>
+                <a:latin typeface="Arial" pitchFamily="34" charset="0"/>
+                <a:ea typeface="Arial" pitchFamily="34" charset="-122"/>
+                <a:cs typeface="Arial" pitchFamily="34" charset="-120"/>
+              </a:rPr>
+              <a:t> (Ṛgveda 10.97), where the herbs are addressed directly — as though they were beings with names and personalities. We'll come back to this hymn on Day 8.</a:t>
+            </a:r>
+            <a:endParaRPr lang="en-US" sz="1200" dirty="0"/>
+          </a:p>
+          <a:p>
+            <a:pPr algn="l" marL="342900" indent="-342900">
+              <a:lnSpc>
+                <a:spcPts val="1620"/>
+              </a:lnSpc>
+              <a:spcAft>
+                <a:spcPts val="300"/>
+              </a:spcAft>
+              <a:buSzPct val="100000"/>
+              <a:buChar char="•"/>
+            </a:pPr>
+            <a:r>
+              <a:rPr lang="en-US" sz="1200" dirty="0">
+                <a:solidFill>
+                  <a:srgbClr val="1C2833"/>
+                </a:solidFill>
+                <a:latin typeface="Arial" pitchFamily="34" charset="0"/>
+                <a:ea typeface="Arial" pitchFamily="34" charset="-122"/>
+                <a:cs typeface="Arial" pitchFamily="34" charset="-120"/>
+              </a:rPr>
+              <a:t>In </a:t>
+            </a:r>
+            <a:pPr algn="l" indent="0" marL="0">
+              <a:lnSpc>
+                <a:spcPts val="1620"/>
+              </a:lnSpc>
+              <a:spcAft>
+                <a:spcPts val="300"/>
+              </a:spcAft>
+              <a:buNone/>
+            </a:pPr>
+            <a:r>
+              <a:rPr lang="en-US" sz="1200" i="1" dirty="0">
+                <a:solidFill>
+                  <a:srgbClr val="1C2833"/>
+                </a:solidFill>
+                <a:latin typeface="Arial" pitchFamily="34" charset="0"/>
+                <a:ea typeface="Arial" pitchFamily="34" charset="-122"/>
+                <a:cs typeface="Arial" pitchFamily="34" charset="-120"/>
+              </a:rPr>
+              <a:t>Caraka Saṁhitā</a:t>
+            </a:r>
+            <a:pPr algn="l" indent="0" marL="0">
+              <a:lnSpc>
+                <a:spcPts val="1620"/>
+              </a:lnSpc>
+              <a:spcAft>
+                <a:spcPts val="300"/>
+              </a:spcAft>
+              <a:buNone/>
+            </a:pPr>
+            <a:r>
+              <a:rPr lang="en-US" sz="1200" dirty="0">
+                <a:solidFill>
+                  <a:srgbClr val="1C2833"/>
+                </a:solidFill>
+                <a:latin typeface="Arial" pitchFamily="34" charset="0"/>
+                <a:ea typeface="Arial" pitchFamily="34" charset="-122"/>
+                <a:cs typeface="Arial" pitchFamily="34" charset="-120"/>
               </a:rPr>
               <a:t>, </a:t>
             </a:r>
             <a:pPr algn="l" indent="0" marL="0">
               <a:lnSpc>
-                <a:spcPts val="1820"/>
-              </a:lnSpc>
-              <a:spcBef>
-                <a:spcPts val="300"/>
-              </a:spcBef>
-              <a:spcAft>
-                <a:spcPts val="300"/>
-              </a:spcAft>
-              <a:buNone/>
-            </a:pPr>
-            <a:r>
-              <a:rPr lang="en-US" sz="1300" i="1" dirty="0">
-                <a:solidFill>
-                  <a:srgbClr val="1C2833"/>
-                </a:solidFill>
-                <a:latin typeface="Georgia" pitchFamily="34" charset="0"/>
-                <a:ea typeface="Georgia" pitchFamily="34" charset="-122"/>
-                <a:cs typeface="Georgia" pitchFamily="34" charset="-120"/>
-              </a:rPr>
-              <a:t>nimba</a:t>
-            </a:r>
-            <a:pPr algn="l" indent="0" marL="0">
-              <a:lnSpc>
-                <a:spcPts val="1820"/>
-              </a:lnSpc>
-              <a:spcBef>
-                <a:spcPts val="300"/>
-              </a:spcBef>
-              <a:spcAft>
-                <a:spcPts val="300"/>
-              </a:spcAft>
-              <a:buNone/>
-            </a:pPr>
-            <a:r>
-              <a:rPr lang="en-US" sz="1300" dirty="0">
-                <a:solidFill>
-                  <a:srgbClr val="1C2833"/>
-                </a:solidFill>
-                <a:latin typeface="Georgia" pitchFamily="34" charset="0"/>
-                <a:ea typeface="Georgia" pitchFamily="34" charset="-122"/>
-                <a:cs typeface="Georgia" pitchFamily="34" charset="-120"/>
-              </a:rPr>
-              <a:t>, </a:t>
-            </a:r>
-            <a:pPr algn="l" indent="0" marL="0">
-              <a:lnSpc>
-                <a:spcPts val="1820"/>
-              </a:lnSpc>
-              <a:spcBef>
-                <a:spcPts val="300"/>
-              </a:spcBef>
-              <a:spcAft>
-                <a:spcPts val="300"/>
-              </a:spcAft>
-              <a:buNone/>
-            </a:pPr>
-            <a:r>
-              <a:rPr lang="en-US" sz="1300" i="1" dirty="0">
-                <a:solidFill>
-                  <a:srgbClr val="1C2833"/>
-                </a:solidFill>
-                <a:latin typeface="Georgia" pitchFamily="34" charset="0"/>
-                <a:ea typeface="Georgia" pitchFamily="34" charset="-122"/>
-                <a:cs typeface="Georgia" pitchFamily="34" charset="-120"/>
-              </a:rPr>
-              <a:t>haridrā</a:t>
-            </a:r>
-            <a:pPr algn="l" indent="0" marL="0">
-              <a:lnSpc>
-                <a:spcPts val="1820"/>
-              </a:lnSpc>
-              <a:spcBef>
-                <a:spcPts val="300"/>
-              </a:spcBef>
-              <a:spcAft>
-                <a:spcPts val="300"/>
-              </a:spcAft>
-              <a:buNone/>
-            </a:pPr>
-            <a:r>
-              <a:rPr lang="en-US" sz="1300" dirty="0">
-                <a:solidFill>
-                  <a:srgbClr val="1C2833"/>
-                </a:solidFill>
-                <a:latin typeface="Georgia" pitchFamily="34" charset="0"/>
-                <a:ea typeface="Georgia" pitchFamily="34" charset="-122"/>
-                <a:cs typeface="Georgia" pitchFamily="34" charset="-120"/>
-              </a:rPr>
-              <a:t>, </a:t>
-            </a:r>
-            <a:pPr algn="l" indent="0" marL="0">
-              <a:lnSpc>
-                <a:spcPts val="1820"/>
-              </a:lnSpc>
-              <a:spcBef>
-                <a:spcPts val="300"/>
-              </a:spcBef>
-              <a:spcAft>
-                <a:spcPts val="300"/>
-              </a:spcAft>
-              <a:buNone/>
-            </a:pPr>
-            <a:r>
-              <a:rPr lang="en-US" sz="1300" i="1" dirty="0">
-                <a:solidFill>
-                  <a:srgbClr val="1C2833"/>
-                </a:solidFill>
-                <a:latin typeface="Georgia" pitchFamily="34" charset="0"/>
-                <a:ea typeface="Georgia" pitchFamily="34" charset="-122"/>
-                <a:cs typeface="Georgia" pitchFamily="34" charset="-120"/>
-              </a:rPr>
-              <a:t>adraka</a:t>
-            </a:r>
-            <a:pPr algn="l" indent="0" marL="0">
-              <a:lnSpc>
-                <a:spcPts val="1820"/>
-              </a:lnSpc>
-              <a:spcBef>
-                <a:spcPts val="300"/>
-              </a:spcBef>
-              <a:spcAft>
-                <a:spcPts val="300"/>
-              </a:spcAft>
-              <a:buNone/>
-            </a:pPr>
-            <a:r>
-              <a:rPr lang="en-US" sz="1300" dirty="0">
-                <a:solidFill>
-                  <a:srgbClr val="1C2833"/>
-                </a:solidFill>
-                <a:latin typeface="Georgia" pitchFamily="34" charset="0"/>
-                <a:ea typeface="Georgia" pitchFamily="34" charset="-122"/>
-                <a:cs typeface="Georgia" pitchFamily="34" charset="-120"/>
-              </a:rPr>
-              <a:t>, </a:t>
-            </a:r>
-            <a:pPr algn="l" indent="0" marL="0">
-              <a:lnSpc>
-                <a:spcPts val="1820"/>
-              </a:lnSpc>
-              <a:spcBef>
-                <a:spcPts val="300"/>
-              </a:spcBef>
-              <a:spcAft>
-                <a:spcPts val="300"/>
-              </a:spcAft>
-              <a:buNone/>
-            </a:pPr>
-            <a:r>
-              <a:rPr lang="en-US" sz="1300" i="1" dirty="0">
-                <a:solidFill>
-                  <a:srgbClr val="1C2833"/>
-                </a:solidFill>
-                <a:latin typeface="Georgia" pitchFamily="34" charset="0"/>
-                <a:ea typeface="Georgia" pitchFamily="34" charset="-122"/>
-                <a:cs typeface="Georgia" pitchFamily="34" charset="-120"/>
-              </a:rPr>
-              <a:t>yavānī</a:t>
-            </a:r>
-            <a:pPr algn="l" indent="0" marL="0">
-              <a:lnSpc>
-                <a:spcPts val="1820"/>
-              </a:lnSpc>
-              <a:spcBef>
-                <a:spcPts val="300"/>
-              </a:spcBef>
-              <a:spcAft>
-                <a:spcPts val="300"/>
-              </a:spcAft>
-              <a:buNone/>
-            </a:pPr>
-            <a:r>
-              <a:rPr lang="en-US" sz="1300" dirty="0">
-                <a:solidFill>
-                  <a:srgbClr val="1C2833"/>
-                </a:solidFill>
-                <a:latin typeface="Georgia" pitchFamily="34" charset="0"/>
-                <a:ea typeface="Georgia" pitchFamily="34" charset="-122"/>
-                <a:cs typeface="Georgia" pitchFamily="34" charset="-120"/>
-              </a:rPr>
-              <a:t>, </a:t>
-            </a:r>
-            <a:pPr algn="l" indent="0" marL="0">
-              <a:lnSpc>
-                <a:spcPts val="1820"/>
-              </a:lnSpc>
-              <a:spcBef>
-                <a:spcPts val="300"/>
-              </a:spcBef>
-              <a:spcAft>
-                <a:spcPts val="300"/>
-              </a:spcAft>
-              <a:buNone/>
-            </a:pPr>
-            <a:r>
-              <a:rPr lang="en-US" sz="1300" i="1" dirty="0">
-                <a:solidFill>
-                  <a:srgbClr val="1C2833"/>
-                </a:solidFill>
-                <a:latin typeface="Georgia" pitchFamily="34" charset="0"/>
-                <a:ea typeface="Georgia" pitchFamily="34" charset="-122"/>
-                <a:cs typeface="Georgia" pitchFamily="34" charset="-120"/>
-              </a:rPr>
-              <a:t>pudīnā</a:t>
-            </a:r>
-            <a:pPr algn="l" indent="0" marL="0">
-              <a:lnSpc>
-                <a:spcPts val="1820"/>
-              </a:lnSpc>
-              <a:spcBef>
-                <a:spcPts val="300"/>
-              </a:spcBef>
-              <a:spcAft>
-                <a:spcPts val="300"/>
-              </a:spcAft>
-              <a:buNone/>
-            </a:pPr>
-            <a:r>
-              <a:rPr lang="en-US" sz="1300" dirty="0">
-                <a:solidFill>
-                  <a:srgbClr val="1C2833"/>
-                </a:solidFill>
-                <a:latin typeface="Georgia" pitchFamily="34" charset="0"/>
-                <a:ea typeface="Georgia" pitchFamily="34" charset="-122"/>
-                <a:cs typeface="Georgia" pitchFamily="34" charset="-120"/>
-              </a:rPr>
-              <a:t>.</a:t>
-            </a:r>
-            <a:endParaRPr lang="en-US" sz="1300" dirty="0"/>
-          </a:p>
-        </p:txBody>
-      </p:sp>
-      <p:sp>
-        <p:nvSpPr>
-          <p:cNvPr id="9" name="Text 7"/>
-          <p:cNvSpPr/>
-          <p:nvPr/>
-        </p:nvSpPr>
-        <p:spPr>
-          <a:xfrm>
-            <a:off x="692051" y="1881336"/>
-            <a:ext cx="7973389" cy="461963"/>
-          </a:xfrm>
-          <a:prstGeom prst="rect">
-            <a:avLst/>
-          </a:prstGeom>
-          <a:noFill/>
-          <a:ln/>
-        </p:spPr>
-        <p:txBody>
-          <a:bodyPr wrap="square" lIns="0" tIns="0" rIns="0" bIns="0" rtlCol="0" anchor="t"/>
-          <a:lstStyle/>
-          <a:p>
-            <a:pPr algn="l" indent="0" marL="0">
-              <a:lnSpc>
-                <a:spcPts val="1820"/>
-              </a:lnSpc>
-              <a:spcBef>
-                <a:spcPts val="300"/>
-              </a:spcBef>
-              <a:spcAft>
-                <a:spcPts val="300"/>
-              </a:spcAft>
-              <a:buNone/>
-            </a:pPr>
-            <a:r>
-              <a:rPr lang="en-US" sz="1300" b="1" i="1" dirty="0">
-                <a:solidFill>
-                  <a:srgbClr val="1C2833"/>
-                </a:solidFill>
-                <a:latin typeface="Georgia" pitchFamily="34" charset="0"/>
-                <a:ea typeface="Georgia" pitchFamily="34" charset="-122"/>
-                <a:cs typeface="Georgia" pitchFamily="34" charset="-120"/>
-              </a:rPr>
-              <a:t>The rule:</a:t>
-            </a:r>
-            <a:pPr algn="l" indent="0" marL="0">
-              <a:lnSpc>
-                <a:spcPts val="1820"/>
-              </a:lnSpc>
-              <a:spcBef>
-                <a:spcPts val="300"/>
-              </a:spcBef>
-              <a:spcAft>
-                <a:spcPts val="300"/>
-              </a:spcAft>
-              <a:buNone/>
-            </a:pPr>
-            <a:r>
-              <a:rPr lang="en-US" sz="1300" dirty="0">
-                <a:solidFill>
-                  <a:srgbClr val="1C2833"/>
-                </a:solidFill>
-                <a:latin typeface="Georgia" pitchFamily="34" charset="0"/>
-                <a:ea typeface="Georgia" pitchFamily="34" charset="-122"/>
-                <a:cs typeface="Georgia" pitchFamily="34" charset="-120"/>
-              </a:rPr>
-              <a:t> food amounts are safe. Therapeutic doses (capsules, powders, oils) are for trained practitioners, not for us.</a:t>
-            </a:r>
-            <a:endParaRPr lang="en-US" sz="1300" dirty="0"/>
-          </a:p>
-        </p:txBody>
-      </p:sp>
-      <p:sp>
-        <p:nvSpPr>
-          <p:cNvPr id="10" name="Text 8"/>
-          <p:cNvSpPr/>
-          <p:nvPr/>
-        </p:nvSpPr>
-        <p:spPr>
-          <a:xfrm>
-            <a:off x="692051" y="2381399"/>
-            <a:ext cx="7973389" cy="692944"/>
-          </a:xfrm>
-          <a:prstGeom prst="rect">
-            <a:avLst/>
-          </a:prstGeom>
-          <a:noFill/>
-          <a:ln/>
-        </p:spPr>
-        <p:txBody>
-          <a:bodyPr wrap="square" lIns="0" tIns="0" rIns="0" bIns="0" rtlCol="0" anchor="t"/>
-          <a:lstStyle/>
-          <a:p>
-            <a:pPr algn="l" indent="0" marL="0">
-              <a:lnSpc>
-                <a:spcPts val="1820"/>
-              </a:lnSpc>
-              <a:spcBef>
-                <a:spcPts val="300"/>
-              </a:spcBef>
-              <a:spcAft>
-                <a:spcPts val="300"/>
-              </a:spcAft>
-              <a:buNone/>
-            </a:pPr>
-            <a:r>
-              <a:rPr lang="en-US" sz="1300" dirty="0">
-                <a:solidFill>
-                  <a:srgbClr val="1C2833"/>
-                </a:solidFill>
-                <a:latin typeface="Georgia" pitchFamily="34" charset="0"/>
-                <a:ea typeface="Georgia" pitchFamily="34" charset="-122"/>
-                <a:cs typeface="Georgia" pitchFamily="34" charset="-120"/>
-              </a:rPr>
-              <a:t>The early Indian tradition addressed these plants directly in a hymn called the </a:t>
-            </a:r>
-            <a:pPr algn="l" indent="0" marL="0">
-              <a:lnSpc>
-                <a:spcPts val="1820"/>
-              </a:lnSpc>
-              <a:spcBef>
-                <a:spcPts val="300"/>
-              </a:spcBef>
-              <a:spcAft>
-                <a:spcPts val="300"/>
-              </a:spcAft>
-              <a:buNone/>
-            </a:pPr>
-            <a:r>
-              <a:rPr lang="en-US" sz="1300" i="1" dirty="0">
-                <a:solidFill>
-                  <a:srgbClr val="1C2833"/>
-                </a:solidFill>
-                <a:latin typeface="Georgia" pitchFamily="34" charset="0"/>
-                <a:ea typeface="Georgia" pitchFamily="34" charset="-122"/>
-                <a:cs typeface="Georgia" pitchFamily="34" charset="-120"/>
-              </a:rPr>
-              <a:t>Auṣadhi-sūkta</a:t>
-            </a:r>
-            <a:pPr algn="l" indent="0" marL="0">
-              <a:lnSpc>
-                <a:spcPts val="1820"/>
-              </a:lnSpc>
-              <a:spcBef>
-                <a:spcPts val="300"/>
-              </a:spcBef>
-              <a:spcAft>
-                <a:spcPts val="300"/>
-              </a:spcAft>
-              <a:buNone/>
-            </a:pPr>
-            <a:r>
-              <a:rPr lang="en-US" sz="1300" dirty="0">
-                <a:solidFill>
-                  <a:srgbClr val="1C2833"/>
-                </a:solidFill>
-                <a:latin typeface="Georgia" pitchFamily="34" charset="0"/>
-                <a:ea typeface="Georgia" pitchFamily="34" charset="-122"/>
-                <a:cs typeface="Georgia" pitchFamily="34" charset="-120"/>
-              </a:rPr>
-              <a:t> (Ṛgveda 10.97). Later, the </a:t>
-            </a:r>
-            <a:pPr algn="l" indent="0" marL="0">
-              <a:lnSpc>
-                <a:spcPts val="1820"/>
-              </a:lnSpc>
-              <a:spcBef>
-                <a:spcPts val="300"/>
-              </a:spcBef>
-              <a:spcAft>
-                <a:spcPts val="300"/>
-              </a:spcAft>
-              <a:buNone/>
-            </a:pPr>
-            <a:r>
-              <a:rPr lang="en-US" sz="1300" i="1" dirty="0">
-                <a:solidFill>
-                  <a:srgbClr val="1C2833"/>
-                </a:solidFill>
-                <a:latin typeface="Georgia" pitchFamily="34" charset="0"/>
-                <a:ea typeface="Georgia" pitchFamily="34" charset="-122"/>
-                <a:cs typeface="Georgia" pitchFamily="34" charset="-120"/>
-              </a:rPr>
-              <a:t>Caraka Saṁhitā</a:t>
-            </a:r>
-            <a:pPr algn="l" indent="0" marL="0">
-              <a:lnSpc>
-                <a:spcPts val="1820"/>
-              </a:lnSpc>
-              <a:spcBef>
-                <a:spcPts val="300"/>
-              </a:spcBef>
-              <a:spcAft>
-                <a:spcPts val="300"/>
-              </a:spcAft>
-              <a:buNone/>
-            </a:pPr>
-            <a:r>
-              <a:rPr lang="en-US" sz="1300" dirty="0">
-                <a:solidFill>
-                  <a:srgbClr val="1C2833"/>
-                </a:solidFill>
-                <a:latin typeface="Georgia" pitchFamily="34" charset="0"/>
-                <a:ea typeface="Georgia" pitchFamily="34" charset="-122"/>
-                <a:cs typeface="Georgia" pitchFamily="34" charset="-120"/>
-              </a:rPr>
-              <a:t> (one of the foundational Ayurvedic texts) sorted them by their tastes, qualities, and heating/cooling effect. We'll meet both these ideas over the next two weeks.</a:t>
-            </a:r>
-            <a:endParaRPr lang="en-US" sz="1300" dirty="0"/>
-          </a:p>
-        </p:txBody>
-      </p:sp>
-      <p:sp>
-        <p:nvSpPr>
-          <p:cNvPr id="11" name="Text 9"/>
+                <a:spcPts val="1620"/>
+              </a:lnSpc>
+              <a:spcAft>
+                <a:spcPts val="300"/>
+              </a:spcAft>
+              <a:buNone/>
+            </a:pPr>
+            <a:r>
+              <a:rPr lang="en-US" sz="1200" i="1" dirty="0">
+                <a:solidFill>
+                  <a:srgbClr val="1C2833"/>
+                </a:solidFill>
+                <a:latin typeface="Arial" pitchFamily="34" charset="0"/>
+                <a:ea typeface="Arial" pitchFamily="34" charset="-122"/>
+                <a:cs typeface="Arial" pitchFamily="34" charset="-120"/>
+              </a:rPr>
+              <a:t>Sūtrasthāna</a:t>
+            </a:r>
+            <a:pPr algn="l" indent="0" marL="0">
+              <a:lnSpc>
+                <a:spcPts val="1620"/>
+              </a:lnSpc>
+              <a:spcAft>
+                <a:spcPts val="300"/>
+              </a:spcAft>
+              <a:buNone/>
+            </a:pPr>
+            <a:r>
+              <a:rPr lang="en-US" sz="1200" dirty="0">
+                <a:solidFill>
+                  <a:srgbClr val="1C2833"/>
+                </a:solidFill>
+                <a:latin typeface="Arial" pitchFamily="34" charset="0"/>
+                <a:ea typeface="Arial" pitchFamily="34" charset="-122"/>
+                <a:cs typeface="Arial" pitchFamily="34" charset="-120"/>
+              </a:rPr>
+              <a:t> 1 — one of the foundational texts of Āyurveda — herbs are sorted by their qualities (</a:t>
+            </a:r>
+            <a:pPr algn="l" indent="0" marL="0">
+              <a:lnSpc>
+                <a:spcPts val="1620"/>
+              </a:lnSpc>
+              <a:spcAft>
+                <a:spcPts val="300"/>
+              </a:spcAft>
+              <a:buNone/>
+            </a:pPr>
+            <a:r>
+              <a:rPr lang="en-US" sz="1200" i="1" dirty="0">
+                <a:solidFill>
+                  <a:srgbClr val="1C2833"/>
+                </a:solidFill>
+                <a:latin typeface="Arial" pitchFamily="34" charset="0"/>
+                <a:ea typeface="Arial" pitchFamily="34" charset="-122"/>
+                <a:cs typeface="Arial" pitchFamily="34" charset="-120"/>
+              </a:rPr>
+              <a:t>guṇa</a:t>
+            </a:r>
+            <a:pPr algn="l" indent="0" marL="0">
+              <a:lnSpc>
+                <a:spcPts val="1620"/>
+              </a:lnSpc>
+              <a:spcAft>
+                <a:spcPts val="300"/>
+              </a:spcAft>
+              <a:buNone/>
+            </a:pPr>
+            <a:r>
+              <a:rPr lang="en-US" sz="1200" dirty="0">
+                <a:solidFill>
+                  <a:srgbClr val="1C2833"/>
+                </a:solidFill>
+                <a:latin typeface="Arial" pitchFamily="34" charset="0"/>
+                <a:ea typeface="Arial" pitchFamily="34" charset="-122"/>
+                <a:cs typeface="Arial" pitchFamily="34" charset="-120"/>
+              </a:rPr>
+              <a:t>), their tastes (</a:t>
+            </a:r>
+            <a:pPr algn="l" indent="0" marL="0">
+              <a:lnSpc>
+                <a:spcPts val="1620"/>
+              </a:lnSpc>
+              <a:spcAft>
+                <a:spcPts val="300"/>
+              </a:spcAft>
+              <a:buNone/>
+            </a:pPr>
+            <a:r>
+              <a:rPr lang="en-US" sz="1200" i="1" dirty="0">
+                <a:solidFill>
+                  <a:srgbClr val="1C2833"/>
+                </a:solidFill>
+                <a:latin typeface="Arial" pitchFamily="34" charset="0"/>
+                <a:ea typeface="Arial" pitchFamily="34" charset="-122"/>
+                <a:cs typeface="Arial" pitchFamily="34" charset="-120"/>
+              </a:rPr>
+              <a:t>rasa</a:t>
+            </a:r>
+            <a:pPr algn="l" indent="0" marL="0">
+              <a:lnSpc>
+                <a:spcPts val="1620"/>
+              </a:lnSpc>
+              <a:spcAft>
+                <a:spcPts val="300"/>
+              </a:spcAft>
+              <a:buNone/>
+            </a:pPr>
+            <a:r>
+              <a:rPr lang="en-US" sz="1200" dirty="0">
+                <a:solidFill>
+                  <a:srgbClr val="1C2833"/>
+                </a:solidFill>
+                <a:latin typeface="Arial" pitchFamily="34" charset="0"/>
+                <a:ea typeface="Arial" pitchFamily="34" charset="-122"/>
+                <a:cs typeface="Arial" pitchFamily="34" charset="-120"/>
+              </a:rPr>
+              <a:t>), their heating/cooling potency (</a:t>
+            </a:r>
+            <a:pPr algn="l" indent="0" marL="0">
+              <a:lnSpc>
+                <a:spcPts val="1620"/>
+              </a:lnSpc>
+              <a:spcAft>
+                <a:spcPts val="300"/>
+              </a:spcAft>
+              <a:buNone/>
+            </a:pPr>
+            <a:r>
+              <a:rPr lang="en-US" sz="1200" i="1" dirty="0">
+                <a:solidFill>
+                  <a:srgbClr val="1C2833"/>
+                </a:solidFill>
+                <a:latin typeface="Arial" pitchFamily="34" charset="0"/>
+                <a:ea typeface="Arial" pitchFamily="34" charset="-122"/>
+                <a:cs typeface="Arial" pitchFamily="34" charset="-120"/>
+              </a:rPr>
+              <a:t>vīrya</a:t>
+            </a:r>
+            <a:pPr algn="l" indent="0" marL="0">
+              <a:lnSpc>
+                <a:spcPts val="1620"/>
+              </a:lnSpc>
+              <a:spcAft>
+                <a:spcPts val="300"/>
+              </a:spcAft>
+              <a:buNone/>
+            </a:pPr>
+            <a:r>
+              <a:rPr lang="en-US" sz="1200" dirty="0">
+                <a:solidFill>
+                  <a:srgbClr val="1C2833"/>
+                </a:solidFill>
+                <a:latin typeface="Arial" pitchFamily="34" charset="0"/>
+                <a:ea typeface="Arial" pitchFamily="34" charset="-122"/>
+                <a:cs typeface="Arial" pitchFamily="34" charset="-120"/>
+              </a:rPr>
+              <a:t>), and their effect after digestion (</a:t>
+            </a:r>
+            <a:pPr algn="l" indent="0" marL="0">
+              <a:lnSpc>
+                <a:spcPts val="1620"/>
+              </a:lnSpc>
+              <a:spcAft>
+                <a:spcPts val="300"/>
+              </a:spcAft>
+              <a:buNone/>
+            </a:pPr>
+            <a:r>
+              <a:rPr lang="en-US" sz="1200" i="1" dirty="0">
+                <a:solidFill>
+                  <a:srgbClr val="1C2833"/>
+                </a:solidFill>
+                <a:latin typeface="Arial" pitchFamily="34" charset="0"/>
+                <a:ea typeface="Arial" pitchFamily="34" charset="-122"/>
+                <a:cs typeface="Arial" pitchFamily="34" charset="-120"/>
+              </a:rPr>
+              <a:t>vipāka</a:t>
+            </a:r>
+            <a:pPr algn="l" indent="0" marL="0">
+              <a:lnSpc>
+                <a:spcPts val="1620"/>
+              </a:lnSpc>
+              <a:spcAft>
+                <a:spcPts val="300"/>
+              </a:spcAft>
+              <a:buNone/>
+            </a:pPr>
+            <a:r>
+              <a:rPr lang="en-US" sz="1200" dirty="0">
+                <a:solidFill>
+                  <a:srgbClr val="1C2833"/>
+                </a:solidFill>
+                <a:latin typeface="Arial" pitchFamily="34" charset="0"/>
+                <a:ea typeface="Arial" pitchFamily="34" charset="-122"/>
+                <a:cs typeface="Arial" pitchFamily="34" charset="-120"/>
+              </a:rPr>
+              <a:t>). Don't worry about all four right now — we'll meet </a:t>
+            </a:r>
+            <a:pPr algn="l" indent="0" marL="0">
+              <a:lnSpc>
+                <a:spcPts val="1620"/>
+              </a:lnSpc>
+              <a:spcAft>
+                <a:spcPts val="300"/>
+              </a:spcAft>
+              <a:buNone/>
+            </a:pPr>
+            <a:r>
+              <a:rPr lang="en-US" sz="1200" i="1" dirty="0">
+                <a:solidFill>
+                  <a:srgbClr val="1C2833"/>
+                </a:solidFill>
+                <a:latin typeface="Arial" pitchFamily="34" charset="0"/>
+                <a:ea typeface="Arial" pitchFamily="34" charset="-122"/>
+                <a:cs typeface="Arial" pitchFamily="34" charset="-120"/>
+              </a:rPr>
+              <a:t>vīrya</a:t>
+            </a:r>
+            <a:pPr algn="l" indent="0" marL="0">
+              <a:lnSpc>
+                <a:spcPts val="1620"/>
+              </a:lnSpc>
+              <a:spcAft>
+                <a:spcPts val="300"/>
+              </a:spcAft>
+              <a:buNone/>
+            </a:pPr>
+            <a:r>
+              <a:rPr lang="en-US" sz="1200" dirty="0">
+                <a:solidFill>
+                  <a:srgbClr val="1C2833"/>
+                </a:solidFill>
+                <a:latin typeface="Arial" pitchFamily="34" charset="0"/>
+                <a:ea typeface="Arial" pitchFamily="34" charset="-122"/>
+                <a:cs typeface="Arial" pitchFamily="34" charset="-120"/>
+              </a:rPr>
+              <a:t> on Day 8.</a:t>
+            </a:r>
+            <a:endParaRPr lang="en-US" sz="1200" dirty="0"/>
+          </a:p>
+        </p:txBody>
+      </p:sp>
+      <p:sp>
+        <p:nvSpPr>
+          <p:cNvPr id="5" name="Text 3"/>
           <p:cNvSpPr/>
           <p:nvPr/>
         </p:nvSpPr>
@@ -6048,7 +9596,7 @@
                 <a:ea typeface="Georgia" pitchFamily="34" charset="-122"/>
                 <a:cs typeface="Georgia" pitchFamily="34" charset="-120"/>
               </a:rPr>
-              <a:t>Homework</a:t>
+              <a:t>Core (20 min) (cont.)</a:t>
             </a:r>
             <a:endParaRPr lang="en-US" sz="1800" dirty="0"/>
           </a:p>
@@ -6062,8 +9610,8 @@
         </p:nvSpPr>
         <p:spPr>
           <a:xfrm>
-            <a:off x="406301" y="870942"/>
-            <a:ext cx="8498026" cy="426541"/>
+            <a:off x="634901" y="883593"/>
+            <a:ext cx="8102798" cy="281880"/>
           </a:xfrm>
           <a:prstGeom prst="rect">
             <a:avLst/>
@@ -6075,6 +9623,72 @@
           <a:bodyPr wrap="square" lIns="0" tIns="0" rIns="0" bIns="0" rtlCol="0" anchor="t"/>
           <a:lstStyle/>
           <a:p>
+            <a:pPr algn="l" marL="342900" indent="-342900">
+              <a:lnSpc>
+                <a:spcPts val="1620"/>
+              </a:lnSpc>
+              <a:spcAft>
+                <a:spcPts val="300"/>
+              </a:spcAft>
+              <a:buSzPct val="100000"/>
+              <a:buChar char="•"/>
+            </a:pPr>
+            <a:r>
+              <a:rPr lang="en-US" sz="1200" b="1" dirty="0">
+                <a:solidFill>
+                  <a:srgbClr val="1C2833"/>
+                </a:solidFill>
+                <a:latin typeface="Arial" pitchFamily="34" charset="0"/>
+                <a:ea typeface="Arial" pitchFamily="34" charset="-122"/>
+                <a:cs typeface="Arial" pitchFamily="34" charset="-120"/>
+              </a:rPr>
+              <a:t>The six herbs we'll study.</a:t>
+            </a:r>
+            <a:pPr algn="l" indent="0" marL="0">
+              <a:lnSpc>
+                <a:spcPts val="1620"/>
+              </a:lnSpc>
+              <a:spcAft>
+                <a:spcPts val="300"/>
+              </a:spcAft>
+              <a:buNone/>
+            </a:pPr>
+            <a:r>
+              <a:rPr lang="en-US" sz="1200" dirty="0">
+                <a:solidFill>
+                  <a:srgbClr val="1C2833"/>
+                </a:solidFill>
+                <a:latin typeface="Arial" pitchFamily="34" charset="0"/>
+                <a:ea typeface="Arial" pitchFamily="34" charset="-122"/>
+                <a:cs typeface="Arial" pitchFamily="34" charset="-120"/>
+              </a:rPr>
+              <a:t> Walk along the front bench, holding up each sample:</a:t>
+            </a:r>
+            <a:endParaRPr lang="en-US" sz="1200" dirty="0"/>
+          </a:p>
+        </p:txBody>
+      </p:sp>
+      <p:sp>
+        <p:nvSpPr>
+          <p:cNvPr id="5" name="Text 3"/>
+          <p:cNvSpPr/>
+          <p:nvPr/>
+        </p:nvSpPr>
+        <p:spPr>
+          <a:xfrm>
+            <a:off x="406301" y="1254323"/>
+            <a:ext cx="8498026" cy="213271"/>
+          </a:xfrm>
+          <a:prstGeom prst="rect">
+            <a:avLst/>
+          </a:prstGeom>
+          <a:noFill/>
+          <a:ln/>
+        </p:spPr>
+        <p:txBody>
+          <a:bodyPr wrap="square" lIns="0" tIns="0" rIns="0" bIns="0" rtlCol="0" anchor="t"/>
+          <a:lstStyle/>
+          <a:p>
             <a:pPr algn="l" indent="0" marL="0">
               <a:lnSpc>
                 <a:spcPts val="1680"/>
@@ -6088,15 +9702,15 @@
               <a:buNone/>
             </a:pPr>
             <a:r>
-              <a:rPr lang="en-US" sz="1200" dirty="0">
-                <a:solidFill>
-                  <a:srgbClr val="1C2833"/>
-                </a:solidFill>
-                <a:latin typeface="Arial" pitchFamily="34" charset="0"/>
-                <a:ea typeface="Arial" pitchFamily="34" charset="-122"/>
-                <a:cs typeface="Arial" pitchFamily="34" charset="-120"/>
-              </a:rPr>
-              <a:t>– List which of the six herbs are in your kitchen tonight. Bonus: bring a leaf or a piece (with a parent's permission) to class tomorrow for the tulsi day.</a:t>
+              <a:rPr lang="en-US" sz="1200" i="1" dirty="0">
+                <a:solidFill>
+                  <a:srgbClr val="1C2833"/>
+                </a:solidFill>
+                <a:latin typeface="Arial" pitchFamily="34" charset="0"/>
+                <a:ea typeface="Arial" pitchFamily="34" charset="-122"/>
+                <a:cs typeface="Arial" pitchFamily="34" charset="-120"/>
+              </a:rPr>
+              <a:t>Each row: Sanskrit · English · Botanical · Where you've seen it.</a:t>
             </a:r>
             <a:endParaRPr lang="en-US" sz="1200" dirty="0"/>
           </a:p>
@@ -6104,7 +9718,7 @@
       </p:sp>
       <p:sp>
         <p:nvSpPr>
-          <p:cNvPr id="5" name="Text 3"/>
+          <p:cNvPr id="6" name="Text 4"/>
           <p:cNvSpPr/>
           <p:nvPr/>
         </p:nvSpPr>
